--- a/temp/files/T3-temp.pptx
+++ b/temp/files/T3-temp.pptx
@@ -3316,8 +3316,8 @@
         </p:blipFill>
         <p:spPr>
           <a:xfrm>
-            <a:off x="426709" y="2255463"/>
-            <a:ext cx="6233004" cy="1203929"/>
+            <a:off x="426709" y="1569680"/>
+            <a:ext cx="6233004" cy="1889712"/>
           </a:xfrm>
           <a:prstGeom prst="rect">
             <a:avLst/>
@@ -3555,7 +3555,7 @@
                             </p:stCondLst>
                             <p:childTnLst>
                               <p:par>
-                                <p:cTn id="11" presetID="2" presetClass="entr" presetSubtype="8" fill="hold" decel="100000" grpId="0" nodeType="clickEffect">
+                                <p:cTn id="11" presetID="10" presetClass="entr" presetSubtype="0" fill="hold" grpId="0" nodeType="clickEffect">
                                   <p:stCondLst>
                                     <p:cond delay="0"/>
                                   </p:stCondLst>
@@ -3578,11 +3578,64 @@
                                         <p:strVal val="visible"/>
                                       </p:to>
                                     </p:set>
+                                    <p:animEffect transition="in" filter="fade">
+                                      <p:cBhvr>
+                                        <p:cTn id="13" dur="450"/>
+                                        <p:tgtEl>
+                                          <p:spTgt spid="4"/>
+                                        </p:tgtEl>
+                                      </p:cBhvr>
+                                    </p:animEffect>
+                                  </p:childTnLst>
+                                </p:cTn>
+                              </p:par>
+                            </p:childTnLst>
+                          </p:cTn>
+                        </p:par>
+                      </p:childTnLst>
+                    </p:cTn>
+                  </p:par>
+                  <p:par>
+                    <p:cTn id="14" fill="hold">
+                      <p:stCondLst>
+                        <p:cond delay="indefinite"/>
+                      </p:stCondLst>
+                      <p:childTnLst>
+                        <p:par>
+                          <p:cTn id="15" fill="hold">
+                            <p:stCondLst>
+                              <p:cond delay="0"/>
+                            </p:stCondLst>
+                            <p:childTnLst>
+                              <p:par>
+                                <p:cTn id="16" presetID="2" presetClass="entr" presetSubtype="8" fill="hold" decel="100000" grpId="0" nodeType="clickEffect">
+                                  <p:stCondLst>
+                                    <p:cond delay="0"/>
+                                  </p:stCondLst>
+                                  <p:childTnLst>
+                                    <p:set>
+                                      <p:cBhvr>
+                                        <p:cTn id="17" dur="1" fill="hold">
+                                          <p:stCondLst>
+                                            <p:cond delay="0"/>
+                                          </p:stCondLst>
+                                        </p:cTn>
+                                        <p:tgtEl>
+                                          <p:spTgt spid="5"/>
+                                        </p:tgtEl>
+                                        <p:attrNameLst>
+                                          <p:attrName>style.visibility</p:attrName>
+                                        </p:attrNameLst>
+                                      </p:cBhvr>
+                                      <p:to>
+                                        <p:strVal val="visible"/>
+                                      </p:to>
+                                    </p:set>
                                     <p:anim calcmode="lin" valueType="num">
                                       <p:cBhvr additive="base">
-                                        <p:cTn id="13" dur="550" fill="hold"/>
-                                        <p:tgtEl>
-                                          <p:spTgt spid="4"/>
+                                        <p:cTn id="18" dur="550" fill="hold"/>
+                                        <p:tgtEl>
+                                          <p:spTgt spid="5"/>
                                         </p:tgtEl>
                                         <p:attrNameLst>
                                           <p:attrName>ppt_x</p:attrName>
@@ -3603,9 +3656,9 @@
                                     </p:anim>
                                     <p:anim calcmode="lin" valueType="num">
                                       <p:cBhvr additive="base">
-                                        <p:cTn id="14" dur="550" fill="hold"/>
-                                        <p:tgtEl>
-                                          <p:spTgt spid="4"/>
+                                        <p:cTn id="19" dur="550" fill="hold"/>
+                                        <p:tgtEl>
+                                          <p:spTgt spid="5"/>
                                         </p:tgtEl>
                                         <p:attrNameLst>
                                           <p:attrName>ppt_y</p:attrName>
@@ -3634,32 +3687,32 @@
                     </p:cTn>
                   </p:par>
                   <p:par>
-                    <p:cTn id="15" fill="hold">
+                    <p:cTn id="20" fill="hold">
                       <p:stCondLst>
                         <p:cond delay="indefinite"/>
                       </p:stCondLst>
                       <p:childTnLst>
                         <p:par>
-                          <p:cTn id="16" fill="hold">
+                          <p:cTn id="21" fill="hold">
                             <p:stCondLst>
                               <p:cond delay="0"/>
                             </p:stCondLst>
                             <p:childTnLst>
                               <p:par>
-                                <p:cTn id="17" presetID="2" presetClass="entr" presetSubtype="8" fill="hold" decel="100000" grpId="0" nodeType="clickEffect">
+                                <p:cTn id="22" presetID="2" presetClass="entr" presetSubtype="8" fill="hold" decel="100000" grpId="0" nodeType="clickEffect">
                                   <p:stCondLst>
                                     <p:cond delay="0"/>
                                   </p:stCondLst>
                                   <p:childTnLst>
                                     <p:set>
                                       <p:cBhvr>
-                                        <p:cTn id="18" dur="1" fill="hold">
+                                        <p:cTn id="23" dur="1" fill="hold">
                                           <p:stCondLst>
                                             <p:cond delay="0"/>
                                           </p:stCondLst>
                                         </p:cTn>
                                         <p:tgtEl>
-                                          <p:spTgt spid="5"/>
+                                          <p:spTgt spid="6"/>
                                         </p:tgtEl>
                                         <p:attrNameLst>
                                           <p:attrName>style.visibility</p:attrName>
@@ -3671,9 +3724,9 @@
                                     </p:set>
                                     <p:anim calcmode="lin" valueType="num">
                                       <p:cBhvr additive="base">
-                                        <p:cTn id="19" dur="550" fill="hold"/>
-                                        <p:tgtEl>
-                                          <p:spTgt spid="5"/>
+                                        <p:cTn id="24" dur="550" fill="hold"/>
+                                        <p:tgtEl>
+                                          <p:spTgt spid="6"/>
                                         </p:tgtEl>
                                         <p:attrNameLst>
                                           <p:attrName>ppt_x</p:attrName>
@@ -3694,9 +3747,9 @@
                                     </p:anim>
                                     <p:anim calcmode="lin" valueType="num">
                                       <p:cBhvr additive="base">
-                                        <p:cTn id="20" dur="550" fill="hold"/>
-                                        <p:tgtEl>
-                                          <p:spTgt spid="5"/>
+                                        <p:cTn id="25" dur="550" fill="hold"/>
+                                        <p:tgtEl>
+                                          <p:spTgt spid="6"/>
                                         </p:tgtEl>
                                         <p:attrNameLst>
                                           <p:attrName>ppt_y</p:attrName>
@@ -3725,32 +3778,32 @@
                     </p:cTn>
                   </p:par>
                   <p:par>
-                    <p:cTn id="21" fill="hold">
+                    <p:cTn id="26" fill="hold">
                       <p:stCondLst>
                         <p:cond delay="indefinite"/>
                       </p:stCondLst>
                       <p:childTnLst>
                         <p:par>
-                          <p:cTn id="22" fill="hold">
+                          <p:cTn id="27" fill="hold">
                             <p:stCondLst>
                               <p:cond delay="0"/>
                             </p:stCondLst>
                             <p:childTnLst>
                               <p:par>
-                                <p:cTn id="23" presetID="2" presetClass="entr" presetSubtype="8" fill="hold" decel="100000" grpId="0" nodeType="clickEffect">
+                                <p:cTn id="28" presetID="2" presetClass="entr" presetSubtype="4" fill="hold" decel="100000" grpId="0" nodeType="clickEffect">
                                   <p:stCondLst>
                                     <p:cond delay="0"/>
                                   </p:stCondLst>
                                   <p:childTnLst>
                                     <p:set>
                                       <p:cBhvr>
-                                        <p:cTn id="24" dur="1" fill="hold">
+                                        <p:cTn id="29" dur="1" fill="hold">
                                           <p:stCondLst>
                                             <p:cond delay="0"/>
                                           </p:stCondLst>
                                         </p:cTn>
                                         <p:tgtEl>
-                                          <p:spTgt spid="6"/>
+                                          <p:spTgt spid="7"/>
                                         </p:tgtEl>
                                         <p:attrNameLst>
                                           <p:attrName>style.visibility</p:attrName>
@@ -3762,9 +3815,9 @@
                                     </p:set>
                                     <p:anim calcmode="lin" valueType="num">
                                       <p:cBhvr additive="base">
-                                        <p:cTn id="25" dur="550" fill="hold"/>
-                                        <p:tgtEl>
-                                          <p:spTgt spid="6"/>
+                                        <p:cTn id="30" dur="550" fill="hold"/>
+                                        <p:tgtEl>
+                                          <p:spTgt spid="7"/>
                                         </p:tgtEl>
                                         <p:attrNameLst>
                                           <p:attrName>ppt_x</p:attrName>
@@ -3773,7 +3826,7 @@
                                       <p:tavLst>
                                         <p:tav tm="0">
                                           <p:val>
-                                            <p:strVal val="0-#ppt_w/2"/>
+                                            <p:strVal val="#ppt_x"/>
                                           </p:val>
                                         </p:tav>
                                         <p:tav tm="100000">
@@ -3785,98 +3838,7 @@
                                     </p:anim>
                                     <p:anim calcmode="lin" valueType="num">
                                       <p:cBhvr additive="base">
-                                        <p:cTn id="26" dur="550" fill="hold"/>
-                                        <p:tgtEl>
-                                          <p:spTgt spid="6"/>
-                                        </p:tgtEl>
-                                        <p:attrNameLst>
-                                          <p:attrName>ppt_y</p:attrName>
-                                        </p:attrNameLst>
-                                      </p:cBhvr>
-                                      <p:tavLst>
-                                        <p:tav tm="0">
-                                          <p:val>
-                                            <p:strVal val="#ppt_y"/>
-                                          </p:val>
-                                        </p:tav>
-                                        <p:tav tm="100000">
-                                          <p:val>
-                                            <p:strVal val="#ppt_y"/>
-                                          </p:val>
-                                        </p:tav>
-                                      </p:tavLst>
-                                    </p:anim>
-                                  </p:childTnLst>
-                                </p:cTn>
-                              </p:par>
-                            </p:childTnLst>
-                          </p:cTn>
-                        </p:par>
-                      </p:childTnLst>
-                    </p:cTn>
-                  </p:par>
-                  <p:par>
-                    <p:cTn id="27" fill="hold">
-                      <p:stCondLst>
-                        <p:cond delay="indefinite"/>
-                      </p:stCondLst>
-                      <p:childTnLst>
-                        <p:par>
-                          <p:cTn id="28" fill="hold">
-                            <p:stCondLst>
-                              <p:cond delay="0"/>
-                            </p:stCondLst>
-                            <p:childTnLst>
-                              <p:par>
-                                <p:cTn id="29" presetID="2" presetClass="entr" presetSubtype="4" fill="hold" decel="100000" grpId="0" nodeType="clickEffect">
-                                  <p:stCondLst>
-                                    <p:cond delay="0"/>
-                                  </p:stCondLst>
-                                  <p:childTnLst>
-                                    <p:set>
-                                      <p:cBhvr>
-                                        <p:cTn id="30" dur="1" fill="hold">
-                                          <p:stCondLst>
-                                            <p:cond delay="0"/>
-                                          </p:stCondLst>
-                                        </p:cTn>
-                                        <p:tgtEl>
-                                          <p:spTgt spid="7"/>
-                                        </p:tgtEl>
-                                        <p:attrNameLst>
-                                          <p:attrName>style.visibility</p:attrName>
-                                        </p:attrNameLst>
-                                      </p:cBhvr>
-                                      <p:to>
-                                        <p:strVal val="visible"/>
-                                      </p:to>
-                                    </p:set>
-                                    <p:anim calcmode="lin" valueType="num">
-                                      <p:cBhvr additive="base">
                                         <p:cTn id="31" dur="550" fill="hold"/>
-                                        <p:tgtEl>
-                                          <p:spTgt spid="7"/>
-                                        </p:tgtEl>
-                                        <p:attrNameLst>
-                                          <p:attrName>ppt_x</p:attrName>
-                                        </p:attrNameLst>
-                                      </p:cBhvr>
-                                      <p:tavLst>
-                                        <p:tav tm="0">
-                                          <p:val>
-                                            <p:strVal val="#ppt_x"/>
-                                          </p:val>
-                                        </p:tav>
-                                        <p:tav tm="100000">
-                                          <p:val>
-                                            <p:strVal val="#ppt_x"/>
-                                          </p:val>
-                                        </p:tav>
-                                      </p:tavLst>
-                                    </p:anim>
-                                    <p:anim calcmode="lin" valueType="num">
-                                      <p:cBhvr additive="base">
-                                        <p:cTn id="32" dur="550" fill="hold"/>
                                         <p:tgtEl>
                                           <p:spTgt spid="7"/>
                                         </p:tgtEl>
@@ -4005,8 +3967,8 @@
         </p:blipFill>
         <p:spPr>
           <a:xfrm>
-            <a:off x="10180065" y="1645878"/>
-            <a:ext cx="1356326" cy="1127731"/>
+            <a:off x="10103867" y="1645878"/>
+            <a:ext cx="1432524" cy="1127731"/>
           </a:xfrm>
           <a:prstGeom prst="rect">
             <a:avLst/>
@@ -4053,8 +4015,8 @@
         </p:blipFill>
         <p:spPr>
           <a:xfrm>
-            <a:off x="10180065" y="3169840"/>
-            <a:ext cx="1356326" cy="1127731"/>
+            <a:off x="10103867" y="3169840"/>
+            <a:ext cx="1432524" cy="1127731"/>
           </a:xfrm>
           <a:prstGeom prst="rect">
             <a:avLst/>
@@ -4101,8 +4063,8 @@
         </p:blipFill>
         <p:spPr>
           <a:xfrm>
-            <a:off x="10180065" y="4693802"/>
-            <a:ext cx="1356326" cy="1127731"/>
+            <a:off x="10103867" y="4693802"/>
+            <a:ext cx="1432524" cy="1127731"/>
           </a:xfrm>
           <a:prstGeom prst="rect">
             <a:avLst/>
@@ -6373,8 +6335,8 @@
         </p:blipFill>
         <p:spPr>
           <a:xfrm>
-            <a:off x="10180065" y="1645878"/>
-            <a:ext cx="1356326" cy="1127731"/>
+            <a:off x="8427509" y="1569680"/>
+            <a:ext cx="3108882" cy="1280127"/>
           </a:xfrm>
           <a:prstGeom prst="rect">
             <a:avLst/>
@@ -6421,8 +6383,8 @@
         </p:blipFill>
         <p:spPr>
           <a:xfrm>
-            <a:off x="10180065" y="3169840"/>
-            <a:ext cx="1356326" cy="1127731"/>
+            <a:off x="9799074" y="3169840"/>
+            <a:ext cx="1737316" cy="1127731"/>
           </a:xfrm>
           <a:prstGeom prst="rect">
             <a:avLst/>
@@ -7584,7 +7546,7 @@
       </p:pic>
       <p:pic>
         <p:nvPicPr>
-          <p:cNvPr id="3" name="Picture 2" descr="c4_1_0.jpg"/>
+          <p:cNvPr id="3" name="Picture 2" descr="c3_1_0.jpg"/>
           <p:cNvPicPr>
             <a:picLocks noChangeAspect="1"/>
           </p:cNvPicPr>
@@ -8579,8 +8541,8 @@
         </p:blipFill>
         <p:spPr>
           <a:xfrm>
-            <a:off x="426709" y="2255463"/>
-            <a:ext cx="7299777" cy="1203929"/>
+            <a:off x="426709" y="1569680"/>
+            <a:ext cx="7299777" cy="1889712"/>
           </a:xfrm>
           <a:prstGeom prst="rect">
             <a:avLst/>
@@ -8818,7 +8780,7 @@
                             </p:stCondLst>
                             <p:childTnLst>
                               <p:par>
-                                <p:cTn id="11" presetID="2" presetClass="entr" presetSubtype="8" fill="hold" decel="100000" grpId="0" nodeType="clickEffect">
+                                <p:cTn id="11" presetID="10" presetClass="entr" presetSubtype="0" fill="hold" grpId="0" nodeType="clickEffect">
                                   <p:stCondLst>
                                     <p:cond delay="0"/>
                                   </p:stCondLst>
@@ -8841,11 +8803,64 @@
                                         <p:strVal val="visible"/>
                                       </p:to>
                                     </p:set>
+                                    <p:animEffect transition="in" filter="fade">
+                                      <p:cBhvr>
+                                        <p:cTn id="13" dur="450"/>
+                                        <p:tgtEl>
+                                          <p:spTgt spid="4"/>
+                                        </p:tgtEl>
+                                      </p:cBhvr>
+                                    </p:animEffect>
+                                  </p:childTnLst>
+                                </p:cTn>
+                              </p:par>
+                            </p:childTnLst>
+                          </p:cTn>
+                        </p:par>
+                      </p:childTnLst>
+                    </p:cTn>
+                  </p:par>
+                  <p:par>
+                    <p:cTn id="14" fill="hold">
+                      <p:stCondLst>
+                        <p:cond delay="indefinite"/>
+                      </p:stCondLst>
+                      <p:childTnLst>
+                        <p:par>
+                          <p:cTn id="15" fill="hold">
+                            <p:stCondLst>
+                              <p:cond delay="0"/>
+                            </p:stCondLst>
+                            <p:childTnLst>
+                              <p:par>
+                                <p:cTn id="16" presetID="2" presetClass="entr" presetSubtype="8" fill="hold" decel="100000" grpId="0" nodeType="clickEffect">
+                                  <p:stCondLst>
+                                    <p:cond delay="0"/>
+                                  </p:stCondLst>
+                                  <p:childTnLst>
+                                    <p:set>
+                                      <p:cBhvr>
+                                        <p:cTn id="17" dur="1" fill="hold">
+                                          <p:stCondLst>
+                                            <p:cond delay="0"/>
+                                          </p:stCondLst>
+                                        </p:cTn>
+                                        <p:tgtEl>
+                                          <p:spTgt spid="5"/>
+                                        </p:tgtEl>
+                                        <p:attrNameLst>
+                                          <p:attrName>style.visibility</p:attrName>
+                                        </p:attrNameLst>
+                                      </p:cBhvr>
+                                      <p:to>
+                                        <p:strVal val="visible"/>
+                                      </p:to>
+                                    </p:set>
                                     <p:anim calcmode="lin" valueType="num">
                                       <p:cBhvr additive="base">
-                                        <p:cTn id="13" dur="550" fill="hold"/>
-                                        <p:tgtEl>
-                                          <p:spTgt spid="4"/>
+                                        <p:cTn id="18" dur="550" fill="hold"/>
+                                        <p:tgtEl>
+                                          <p:spTgt spid="5"/>
                                         </p:tgtEl>
                                         <p:attrNameLst>
                                           <p:attrName>ppt_x</p:attrName>
@@ -8866,9 +8881,9 @@
                                     </p:anim>
                                     <p:anim calcmode="lin" valueType="num">
                                       <p:cBhvr additive="base">
-                                        <p:cTn id="14" dur="550" fill="hold"/>
-                                        <p:tgtEl>
-                                          <p:spTgt spid="4"/>
+                                        <p:cTn id="19" dur="550" fill="hold"/>
+                                        <p:tgtEl>
+                                          <p:spTgt spid="5"/>
                                         </p:tgtEl>
                                         <p:attrNameLst>
                                           <p:attrName>ppt_y</p:attrName>
@@ -8897,32 +8912,32 @@
                     </p:cTn>
                   </p:par>
                   <p:par>
-                    <p:cTn id="15" fill="hold">
+                    <p:cTn id="20" fill="hold">
                       <p:stCondLst>
                         <p:cond delay="indefinite"/>
                       </p:stCondLst>
                       <p:childTnLst>
                         <p:par>
-                          <p:cTn id="16" fill="hold">
+                          <p:cTn id="21" fill="hold">
                             <p:stCondLst>
                               <p:cond delay="0"/>
                             </p:stCondLst>
                             <p:childTnLst>
                               <p:par>
-                                <p:cTn id="17" presetID="2" presetClass="entr" presetSubtype="8" fill="hold" decel="100000" grpId="0" nodeType="clickEffect">
+                                <p:cTn id="22" presetID="2" presetClass="entr" presetSubtype="8" fill="hold" decel="100000" grpId="0" nodeType="clickEffect">
                                   <p:stCondLst>
                                     <p:cond delay="0"/>
                                   </p:stCondLst>
                                   <p:childTnLst>
                                     <p:set>
                                       <p:cBhvr>
-                                        <p:cTn id="18" dur="1" fill="hold">
+                                        <p:cTn id="23" dur="1" fill="hold">
                                           <p:stCondLst>
                                             <p:cond delay="0"/>
                                           </p:stCondLst>
                                         </p:cTn>
                                         <p:tgtEl>
-                                          <p:spTgt spid="5"/>
+                                          <p:spTgt spid="6"/>
                                         </p:tgtEl>
                                         <p:attrNameLst>
                                           <p:attrName>style.visibility</p:attrName>
@@ -8934,9 +8949,9 @@
                                     </p:set>
                                     <p:anim calcmode="lin" valueType="num">
                                       <p:cBhvr additive="base">
-                                        <p:cTn id="19" dur="550" fill="hold"/>
-                                        <p:tgtEl>
-                                          <p:spTgt spid="5"/>
+                                        <p:cTn id="24" dur="550" fill="hold"/>
+                                        <p:tgtEl>
+                                          <p:spTgt spid="6"/>
                                         </p:tgtEl>
                                         <p:attrNameLst>
                                           <p:attrName>ppt_x</p:attrName>
@@ -8957,9 +8972,9 @@
                                     </p:anim>
                                     <p:anim calcmode="lin" valueType="num">
                                       <p:cBhvr additive="base">
-                                        <p:cTn id="20" dur="550" fill="hold"/>
-                                        <p:tgtEl>
-                                          <p:spTgt spid="5"/>
+                                        <p:cTn id="25" dur="550" fill="hold"/>
+                                        <p:tgtEl>
+                                          <p:spTgt spid="6"/>
                                         </p:tgtEl>
                                         <p:attrNameLst>
                                           <p:attrName>ppt_y</p:attrName>
@@ -8988,32 +9003,32 @@
                     </p:cTn>
                   </p:par>
                   <p:par>
-                    <p:cTn id="21" fill="hold">
+                    <p:cTn id="26" fill="hold">
                       <p:stCondLst>
                         <p:cond delay="indefinite"/>
                       </p:stCondLst>
                       <p:childTnLst>
                         <p:par>
-                          <p:cTn id="22" fill="hold">
+                          <p:cTn id="27" fill="hold">
                             <p:stCondLst>
                               <p:cond delay="0"/>
                             </p:stCondLst>
                             <p:childTnLst>
                               <p:par>
-                                <p:cTn id="23" presetID="2" presetClass="entr" presetSubtype="8" fill="hold" decel="100000" grpId="0" nodeType="clickEffect">
+                                <p:cTn id="28" presetID="2" presetClass="entr" presetSubtype="4" fill="hold" decel="100000" grpId="0" nodeType="clickEffect">
                                   <p:stCondLst>
                                     <p:cond delay="0"/>
                                   </p:stCondLst>
                                   <p:childTnLst>
                                     <p:set>
                                       <p:cBhvr>
-                                        <p:cTn id="24" dur="1" fill="hold">
+                                        <p:cTn id="29" dur="1" fill="hold">
                                           <p:stCondLst>
                                             <p:cond delay="0"/>
                                           </p:stCondLst>
                                         </p:cTn>
                                         <p:tgtEl>
-                                          <p:spTgt spid="6"/>
+                                          <p:spTgt spid="7"/>
                                         </p:tgtEl>
                                         <p:attrNameLst>
                                           <p:attrName>style.visibility</p:attrName>
@@ -9025,9 +9040,9 @@
                                     </p:set>
                                     <p:anim calcmode="lin" valueType="num">
                                       <p:cBhvr additive="base">
-                                        <p:cTn id="25" dur="550" fill="hold"/>
-                                        <p:tgtEl>
-                                          <p:spTgt spid="6"/>
+                                        <p:cTn id="30" dur="550" fill="hold"/>
+                                        <p:tgtEl>
+                                          <p:spTgt spid="7"/>
                                         </p:tgtEl>
                                         <p:attrNameLst>
                                           <p:attrName>ppt_x</p:attrName>
@@ -9036,7 +9051,7 @@
                                       <p:tavLst>
                                         <p:tav tm="0">
                                           <p:val>
-                                            <p:strVal val="0-#ppt_w/2"/>
+                                            <p:strVal val="#ppt_x"/>
                                           </p:val>
                                         </p:tav>
                                         <p:tav tm="100000">
@@ -9048,98 +9063,7 @@
                                     </p:anim>
                                     <p:anim calcmode="lin" valueType="num">
                                       <p:cBhvr additive="base">
-                                        <p:cTn id="26" dur="550" fill="hold"/>
-                                        <p:tgtEl>
-                                          <p:spTgt spid="6"/>
-                                        </p:tgtEl>
-                                        <p:attrNameLst>
-                                          <p:attrName>ppt_y</p:attrName>
-                                        </p:attrNameLst>
-                                      </p:cBhvr>
-                                      <p:tavLst>
-                                        <p:tav tm="0">
-                                          <p:val>
-                                            <p:strVal val="#ppt_y"/>
-                                          </p:val>
-                                        </p:tav>
-                                        <p:tav tm="100000">
-                                          <p:val>
-                                            <p:strVal val="#ppt_y"/>
-                                          </p:val>
-                                        </p:tav>
-                                      </p:tavLst>
-                                    </p:anim>
-                                  </p:childTnLst>
-                                </p:cTn>
-                              </p:par>
-                            </p:childTnLst>
-                          </p:cTn>
-                        </p:par>
-                      </p:childTnLst>
-                    </p:cTn>
-                  </p:par>
-                  <p:par>
-                    <p:cTn id="27" fill="hold">
-                      <p:stCondLst>
-                        <p:cond delay="indefinite"/>
-                      </p:stCondLst>
-                      <p:childTnLst>
-                        <p:par>
-                          <p:cTn id="28" fill="hold">
-                            <p:stCondLst>
-                              <p:cond delay="0"/>
-                            </p:stCondLst>
-                            <p:childTnLst>
-                              <p:par>
-                                <p:cTn id="29" presetID="2" presetClass="entr" presetSubtype="4" fill="hold" decel="100000" grpId="0" nodeType="clickEffect">
-                                  <p:stCondLst>
-                                    <p:cond delay="0"/>
-                                  </p:stCondLst>
-                                  <p:childTnLst>
-                                    <p:set>
-                                      <p:cBhvr>
-                                        <p:cTn id="30" dur="1" fill="hold">
-                                          <p:stCondLst>
-                                            <p:cond delay="0"/>
-                                          </p:stCondLst>
-                                        </p:cTn>
-                                        <p:tgtEl>
-                                          <p:spTgt spid="7"/>
-                                        </p:tgtEl>
-                                        <p:attrNameLst>
-                                          <p:attrName>style.visibility</p:attrName>
-                                        </p:attrNameLst>
-                                      </p:cBhvr>
-                                      <p:to>
-                                        <p:strVal val="visible"/>
-                                      </p:to>
-                                    </p:set>
-                                    <p:anim calcmode="lin" valueType="num">
-                                      <p:cBhvr additive="base">
                                         <p:cTn id="31" dur="550" fill="hold"/>
-                                        <p:tgtEl>
-                                          <p:spTgt spid="7"/>
-                                        </p:tgtEl>
-                                        <p:attrNameLst>
-                                          <p:attrName>ppt_x</p:attrName>
-                                        </p:attrNameLst>
-                                      </p:cBhvr>
-                                      <p:tavLst>
-                                        <p:tav tm="0">
-                                          <p:val>
-                                            <p:strVal val="#ppt_x"/>
-                                          </p:val>
-                                        </p:tav>
-                                        <p:tav tm="100000">
-                                          <p:val>
-                                            <p:strVal val="#ppt_x"/>
-                                          </p:val>
-                                        </p:tav>
-                                      </p:tavLst>
-                                    </p:anim>
-                                    <p:anim calcmode="lin" valueType="num">
-                                      <p:cBhvr additive="base">
-                                        <p:cTn id="32" dur="550" fill="hold"/>
                                         <p:tgtEl>
                                           <p:spTgt spid="7"/>
                                         </p:tgtEl>
@@ -9292,8 +9216,8 @@
         </p:blipFill>
         <p:spPr>
           <a:xfrm>
-            <a:off x="426709" y="2407859"/>
-            <a:ext cx="6690192" cy="1203929"/>
+            <a:off x="426709" y="1722076"/>
+            <a:ext cx="6690192" cy="1889712"/>
           </a:xfrm>
           <a:prstGeom prst="rect">
             <a:avLst/>
@@ -9574,7 +9498,7 @@
                             </p:stCondLst>
                             <p:childTnLst>
                               <p:par>
-                                <p:cTn id="15" presetID="53" presetClass="entr" presetSubtype="16" fill="hold" grpId="0" nodeType="clickEffect">
+                                <p:cTn id="15" presetID="10" presetClass="entr" presetSubtype="0" fill="hold" grpId="0" nodeType="clickEffect">
                                   <p:stCondLst>
                                     <p:cond delay="0"/>
                                   </p:stCondLst>
@@ -9597,55 +9521,9 @@
                                         <p:strVal val="visible"/>
                                       </p:to>
                                     </p:set>
-                                    <p:anim calcmode="lin" valueType="num">
-                                      <p:cBhvr additive="base">
-                                        <p:cTn id="17" dur="420" fill="hold"/>
-                                        <p:tgtEl>
-                                          <p:spTgt spid="5"/>
-                                        </p:tgtEl>
-                                        <p:attrNameLst>
-                                          <p:attrName>ppt_w</p:attrName>
-                                        </p:attrNameLst>
-                                      </p:cBhvr>
-                                      <p:tavLst>
-                                        <p:tav tm="0">
-                                          <p:val>
-                                            <p:strVal val="0"/>
-                                          </p:val>
-                                        </p:tav>
-                                        <p:tav tm="100000">
-                                          <p:val>
-                                            <p:strVal val="#ppt_w"/>
-                                          </p:val>
-                                        </p:tav>
-                                      </p:tavLst>
-                                    </p:anim>
-                                    <p:anim calcmode="lin" valueType="num">
-                                      <p:cBhvr additive="base">
-                                        <p:cTn id="18" dur="420" fill="hold"/>
-                                        <p:tgtEl>
-                                          <p:spTgt spid="5"/>
-                                        </p:tgtEl>
-                                        <p:attrNameLst>
-                                          <p:attrName>ppt_h</p:attrName>
-                                        </p:attrNameLst>
-                                      </p:cBhvr>
-                                      <p:tavLst>
-                                        <p:tav tm="0">
-                                          <p:val>
-                                            <p:strVal val="0"/>
-                                          </p:val>
-                                        </p:tav>
-                                        <p:tav tm="100000">
-                                          <p:val>
-                                            <p:strVal val="#ppt_h"/>
-                                          </p:val>
-                                        </p:tav>
-                                      </p:tavLst>
-                                    </p:anim>
                                     <p:animEffect transition="in" filter="fade">
                                       <p:cBhvr>
-                                        <p:cTn id="19" dur="420"/>
+                                        <p:cTn id="17" dur="450"/>
                                         <p:tgtEl>
                                           <p:spTgt spid="5"/>
                                         </p:tgtEl>
@@ -9655,14 +9533,14 @@
                                 </p:cTn>
                               </p:par>
                               <p:par>
-                                <p:cTn id="20" presetID="10" presetClass="entr" presetSubtype="0" fill="hold" grpId="0" nodeType="withEffect">
+                                <p:cTn id="18" presetID="10" presetClass="entr" presetSubtype="0" fill="hold" grpId="0" nodeType="withEffect">
                                   <p:stCondLst>
                                     <p:cond delay="120"/>
                                   </p:stCondLst>
                                   <p:childTnLst>
                                     <p:set>
                                       <p:cBhvr>
-                                        <p:cTn id="21" dur="1" fill="hold">
+                                        <p:cTn id="19" dur="1" fill="hold">
                                           <p:stCondLst>
                                             <p:cond delay="0"/>
                                           </p:stCondLst>
@@ -9680,7 +9558,7 @@
                                     </p:set>
                                     <p:animEffect transition="in" filter="fade">
                                       <p:cBhvr>
-                                        <p:cTn id="22" dur="450"/>
+                                        <p:cTn id="20" dur="450"/>
                                         <p:tgtEl>
                                           <p:spTgt spid="6"/>
                                         </p:tgtEl>
@@ -9696,26 +9574,26 @@
                     </p:cTn>
                   </p:par>
                   <p:par>
-                    <p:cTn id="23" fill="hold">
+                    <p:cTn id="21" fill="hold">
                       <p:stCondLst>
                         <p:cond delay="indefinite"/>
                       </p:stCondLst>
                       <p:childTnLst>
                         <p:par>
-                          <p:cTn id="24" fill="hold">
+                          <p:cTn id="22" fill="hold">
                             <p:stCondLst>
                               <p:cond delay="0"/>
                             </p:stCondLst>
                             <p:childTnLst>
                               <p:par>
-                                <p:cTn id="25" presetID="2" presetClass="entr" presetSubtype="8" fill="hold" decel="100000" grpId="0" nodeType="clickEffect">
+                                <p:cTn id="23" presetID="2" presetClass="entr" presetSubtype="8" fill="hold" decel="100000" grpId="0" nodeType="clickEffect">
                                   <p:stCondLst>
                                     <p:cond delay="0"/>
                                   </p:stCondLst>
                                   <p:childTnLst>
                                     <p:set>
                                       <p:cBhvr>
-                                        <p:cTn id="26" dur="1" fill="hold">
+                                        <p:cTn id="24" dur="1" fill="hold">
                                           <p:stCondLst>
                                             <p:cond delay="0"/>
                                           </p:stCondLst>
@@ -9733,7 +9611,7 @@
                                     </p:set>
                                     <p:anim calcmode="lin" valueType="num">
                                       <p:cBhvr additive="base">
-                                        <p:cTn id="27" dur="550" fill="hold"/>
+                                        <p:cTn id="25" dur="550" fill="hold"/>
                                         <p:tgtEl>
                                           <p:spTgt spid="7"/>
                                         </p:tgtEl>
@@ -9756,7 +9634,7 @@
                                     </p:anim>
                                     <p:anim calcmode="lin" valueType="num">
                                       <p:cBhvr additive="base">
-                                        <p:cTn id="28" dur="550" fill="hold"/>
+                                        <p:cTn id="26" dur="550" fill="hold"/>
                                         <p:tgtEl>
                                           <p:spTgt spid="7"/>
                                         </p:tgtEl>
@@ -9787,26 +9665,26 @@
                     </p:cTn>
                   </p:par>
                   <p:par>
-                    <p:cTn id="29" fill="hold">
+                    <p:cTn id="27" fill="hold">
                       <p:stCondLst>
                         <p:cond delay="indefinite"/>
                       </p:stCondLst>
                       <p:childTnLst>
                         <p:par>
-                          <p:cTn id="30" fill="hold">
+                          <p:cTn id="28" fill="hold">
                             <p:stCondLst>
                               <p:cond delay="0"/>
                             </p:stCondLst>
                             <p:childTnLst>
                               <p:par>
-                                <p:cTn id="31" presetID="53" presetClass="entr" presetSubtype="16" fill="hold" grpId="0" nodeType="clickEffect">
+                                <p:cTn id="29" presetID="53" presetClass="entr" presetSubtype="16" fill="hold" grpId="0" nodeType="clickEffect">
                                   <p:stCondLst>
                                     <p:cond delay="0"/>
                                   </p:stCondLst>
                                   <p:childTnLst>
                                     <p:set>
                                       <p:cBhvr>
-                                        <p:cTn id="32" dur="1" fill="hold">
+                                        <p:cTn id="30" dur="1" fill="hold">
                                           <p:stCondLst>
                                             <p:cond delay="0"/>
                                           </p:stCondLst>
@@ -9824,7 +9702,7 @@
                                     </p:set>
                                     <p:anim calcmode="lin" valueType="num">
                                       <p:cBhvr additive="base">
-                                        <p:cTn id="33" dur="420" fill="hold"/>
+                                        <p:cTn id="31" dur="420" fill="hold"/>
                                         <p:tgtEl>
                                           <p:spTgt spid="8"/>
                                         </p:tgtEl>
@@ -9847,7 +9725,7 @@
                                     </p:anim>
                                     <p:anim calcmode="lin" valueType="num">
                                       <p:cBhvr additive="base">
-                                        <p:cTn id="34" dur="420" fill="hold"/>
+                                        <p:cTn id="32" dur="420" fill="hold"/>
                                         <p:tgtEl>
                                           <p:spTgt spid="8"/>
                                         </p:tgtEl>
@@ -9870,7 +9748,7 @@
                                     </p:anim>
                                     <p:animEffect transition="in" filter="fade">
                                       <p:cBhvr>
-                                        <p:cTn id="35" dur="420"/>
+                                        <p:cTn id="33" dur="420"/>
                                         <p:tgtEl>
                                           <p:spTgt spid="8"/>
                                         </p:tgtEl>

--- a/temp/files/T3-temp.pptx
+++ b/temp/files/T3-temp.pptx
@@ -4891,8 +4891,8 @@
         </p:blipFill>
         <p:spPr>
           <a:xfrm>
-            <a:off x="5074793" y="4236614"/>
-            <a:ext cx="1432524" cy="822939"/>
+            <a:off x="6065368" y="4236614"/>
+            <a:ext cx="1508722" cy="822939"/>
           </a:xfrm>
           <a:prstGeom prst="rect">
             <a:avLst/>
@@ -9169,7 +9169,7 @@
         <p:spPr>
           <a:xfrm>
             <a:off x="426709" y="1493482"/>
-            <a:ext cx="6690192" cy="1203929"/>
+            <a:ext cx="6690192" cy="1432524"/>
           </a:xfrm>
           <a:prstGeom prst="rect">
             <a:avLst/>
@@ -9216,8 +9216,8 @@
         </p:blipFill>
         <p:spPr>
           <a:xfrm>
-            <a:off x="426709" y="1722076"/>
-            <a:ext cx="6690192" cy="1889712"/>
+            <a:off x="883897" y="1645878"/>
+            <a:ext cx="5699617" cy="975335"/>
           </a:xfrm>
           <a:prstGeom prst="rect">
             <a:avLst/>
@@ -9250,7 +9250,7 @@
       </p:pic>
       <p:pic>
         <p:nvPicPr>
-          <p:cNvPr id="7" name="Picture 6" descr="c7_3_0.jpg"/>
+          <p:cNvPr id="7" name="Picture 6" descr="c7_2_2.jpg"/>
           <p:cNvPicPr>
             <a:picLocks noChangeAspect="1"/>
           </p:cNvPicPr>
@@ -9264,7 +9264,7 @@
         </p:blipFill>
         <p:spPr>
           <a:xfrm>
-            <a:off x="426709" y="3322236"/>
+            <a:off x="426709" y="2636454"/>
             <a:ext cx="6690192" cy="1203929"/>
           </a:xfrm>
           <a:prstGeom prst="rect">
@@ -9274,7 +9274,7 @@
       </p:pic>
       <p:pic>
         <p:nvPicPr>
-          <p:cNvPr id="8" name="Picture 7" descr="c7_4_0.jpg"/>
+          <p:cNvPr id="8" name="Picture 7" descr="c7_3_0.jpg"/>
           <p:cNvPicPr>
             <a:picLocks noChangeAspect="1"/>
           </p:cNvPicPr>
@@ -9288,18 +9288,42 @@
         </p:blipFill>
         <p:spPr>
           <a:xfrm>
-            <a:off x="9570480" y="1569680"/>
-            <a:ext cx="2270703" cy="1432524"/>
+            <a:off x="426709" y="3550831"/>
+            <a:ext cx="6690192" cy="1203929"/>
           </a:xfrm>
           <a:prstGeom prst="rect">
             <a:avLst/>
           </a:prstGeom>
         </p:spPr>
       </p:pic>
+      <p:pic>
+        <p:nvPicPr>
+          <p:cNvPr id="9" name="Picture 8" descr="c7_4_0.jpg"/>
+          <p:cNvPicPr>
+            <a:picLocks noChangeAspect="1"/>
+          </p:cNvPicPr>
+          <p:nvPr/>
+        </p:nvPicPr>
+        <p:blipFill>
+          <a:blip r:embed="rId9"/>
+          <a:stretch>
+            <a:fillRect/>
+          </a:stretch>
+        </p:blipFill>
+        <p:spPr>
+          <a:xfrm>
+            <a:off x="9570480" y="1569680"/>
+            <a:ext cx="2270703" cy="1432524"/>
+          </a:xfrm>
+          <a:prstGeom prst="rect">
+            <a:avLst/>
+          </a:prstGeom>
+        </p:spPr>
+      </p:pic>
       <p:sp>
         <p:nvSpPr>
-          <p:cNvPr id="9" name="TextBox 8">
-            <a:hlinkClick action="ppaction://hlinksldjump" r:id="rId9"/>
+          <p:cNvPr id="10" name="TextBox 9">
+            <a:hlinkClick action="ppaction://hlinksldjump" r:id="rId10"/>
           </p:cNvPr>
           <p:cNvSpPr txBox="1"/>
           <p:nvPr/>
@@ -9567,6 +9591,87 @@
                                   </p:childTnLst>
                                 </p:cTn>
                               </p:par>
+                              <p:par>
+                                <p:cTn id="21" presetID="53" presetClass="entr" presetSubtype="16" fill="hold" grpId="0" nodeType="withEffect">
+                                  <p:stCondLst>
+                                    <p:cond delay="240"/>
+                                  </p:stCondLst>
+                                  <p:childTnLst>
+                                    <p:set>
+                                      <p:cBhvr>
+                                        <p:cTn id="22" dur="1" fill="hold">
+                                          <p:stCondLst>
+                                            <p:cond delay="0"/>
+                                          </p:stCondLst>
+                                        </p:cTn>
+                                        <p:tgtEl>
+                                          <p:spTgt spid="7"/>
+                                        </p:tgtEl>
+                                        <p:attrNameLst>
+                                          <p:attrName>style.visibility</p:attrName>
+                                        </p:attrNameLst>
+                                      </p:cBhvr>
+                                      <p:to>
+                                        <p:strVal val="visible"/>
+                                      </p:to>
+                                    </p:set>
+                                    <p:anim calcmode="lin" valueType="num">
+                                      <p:cBhvr additive="base">
+                                        <p:cTn id="23" dur="420" fill="hold"/>
+                                        <p:tgtEl>
+                                          <p:spTgt spid="7"/>
+                                        </p:tgtEl>
+                                        <p:attrNameLst>
+                                          <p:attrName>ppt_w</p:attrName>
+                                        </p:attrNameLst>
+                                      </p:cBhvr>
+                                      <p:tavLst>
+                                        <p:tav tm="0">
+                                          <p:val>
+                                            <p:strVal val="0"/>
+                                          </p:val>
+                                        </p:tav>
+                                        <p:tav tm="100000">
+                                          <p:val>
+                                            <p:strVal val="#ppt_w"/>
+                                          </p:val>
+                                        </p:tav>
+                                      </p:tavLst>
+                                    </p:anim>
+                                    <p:anim calcmode="lin" valueType="num">
+                                      <p:cBhvr additive="base">
+                                        <p:cTn id="24" dur="420" fill="hold"/>
+                                        <p:tgtEl>
+                                          <p:spTgt spid="7"/>
+                                        </p:tgtEl>
+                                        <p:attrNameLst>
+                                          <p:attrName>ppt_h</p:attrName>
+                                        </p:attrNameLst>
+                                      </p:cBhvr>
+                                      <p:tavLst>
+                                        <p:tav tm="0">
+                                          <p:val>
+                                            <p:strVal val="0"/>
+                                          </p:val>
+                                        </p:tav>
+                                        <p:tav tm="100000">
+                                          <p:val>
+                                            <p:strVal val="#ppt_h"/>
+                                          </p:val>
+                                        </p:tav>
+                                      </p:tavLst>
+                                    </p:anim>
+                                    <p:animEffect transition="in" filter="fade">
+                                      <p:cBhvr>
+                                        <p:cTn id="25" dur="420"/>
+                                        <p:tgtEl>
+                                          <p:spTgt spid="7"/>
+                                        </p:tgtEl>
+                                      </p:cBhvr>
+                                    </p:animEffect>
+                                  </p:childTnLst>
+                                </p:cTn>
+                              </p:par>
                             </p:childTnLst>
                           </p:cTn>
                         </p:par>
@@ -9574,32 +9679,32 @@
                     </p:cTn>
                   </p:par>
                   <p:par>
-                    <p:cTn id="21" fill="hold">
+                    <p:cTn id="26" fill="hold">
                       <p:stCondLst>
                         <p:cond delay="indefinite"/>
                       </p:stCondLst>
                       <p:childTnLst>
                         <p:par>
-                          <p:cTn id="22" fill="hold">
+                          <p:cTn id="27" fill="hold">
                             <p:stCondLst>
                               <p:cond delay="0"/>
                             </p:stCondLst>
                             <p:childTnLst>
                               <p:par>
-                                <p:cTn id="23" presetID="2" presetClass="entr" presetSubtype="8" fill="hold" decel="100000" grpId="0" nodeType="clickEffect">
+                                <p:cTn id="28" presetID="2" presetClass="entr" presetSubtype="8" fill="hold" decel="100000" grpId="0" nodeType="clickEffect">
                                   <p:stCondLst>
                                     <p:cond delay="0"/>
                                   </p:stCondLst>
                                   <p:childTnLst>
                                     <p:set>
                                       <p:cBhvr>
-                                        <p:cTn id="24" dur="1" fill="hold">
+                                        <p:cTn id="29" dur="1" fill="hold">
                                           <p:stCondLst>
                                             <p:cond delay="0"/>
                                           </p:stCondLst>
                                         </p:cTn>
                                         <p:tgtEl>
-                                          <p:spTgt spid="7"/>
+                                          <p:spTgt spid="8"/>
                                         </p:tgtEl>
                                         <p:attrNameLst>
                                           <p:attrName>style.visibility</p:attrName>
@@ -9611,9 +9716,9 @@
                                     </p:set>
                                     <p:anim calcmode="lin" valueType="num">
                                       <p:cBhvr additive="base">
-                                        <p:cTn id="25" dur="550" fill="hold"/>
-                                        <p:tgtEl>
-                                          <p:spTgt spid="7"/>
+                                        <p:cTn id="30" dur="550" fill="hold"/>
+                                        <p:tgtEl>
+                                          <p:spTgt spid="8"/>
                                         </p:tgtEl>
                                         <p:attrNameLst>
                                           <p:attrName>ppt_x</p:attrName>
@@ -9634,9 +9739,9 @@
                                     </p:anim>
                                     <p:anim calcmode="lin" valueType="num">
                                       <p:cBhvr additive="base">
-                                        <p:cTn id="26" dur="550" fill="hold"/>
-                                        <p:tgtEl>
-                                          <p:spTgt spid="7"/>
+                                        <p:cTn id="31" dur="550" fill="hold"/>
+                                        <p:tgtEl>
+                                          <p:spTgt spid="8"/>
                                         </p:tgtEl>
                                         <p:attrNameLst>
                                           <p:attrName>ppt_y</p:attrName>
@@ -9665,32 +9770,32 @@
                     </p:cTn>
                   </p:par>
                   <p:par>
-                    <p:cTn id="27" fill="hold">
+                    <p:cTn id="32" fill="hold">
                       <p:stCondLst>
                         <p:cond delay="indefinite"/>
                       </p:stCondLst>
                       <p:childTnLst>
                         <p:par>
-                          <p:cTn id="28" fill="hold">
+                          <p:cTn id="33" fill="hold">
                             <p:stCondLst>
                               <p:cond delay="0"/>
                             </p:stCondLst>
                             <p:childTnLst>
                               <p:par>
-                                <p:cTn id="29" presetID="53" presetClass="entr" presetSubtype="16" fill="hold" grpId="0" nodeType="clickEffect">
+                                <p:cTn id="34" presetID="53" presetClass="entr" presetSubtype="16" fill="hold" grpId="0" nodeType="clickEffect">
                                   <p:stCondLst>
                                     <p:cond delay="0"/>
                                   </p:stCondLst>
                                   <p:childTnLst>
                                     <p:set>
                                       <p:cBhvr>
-                                        <p:cTn id="30" dur="1" fill="hold">
+                                        <p:cTn id="35" dur="1" fill="hold">
                                           <p:stCondLst>
                                             <p:cond delay="0"/>
                                           </p:stCondLst>
                                         </p:cTn>
                                         <p:tgtEl>
-                                          <p:spTgt spid="8"/>
+                                          <p:spTgt spid="9"/>
                                         </p:tgtEl>
                                         <p:attrNameLst>
                                           <p:attrName>style.visibility</p:attrName>
@@ -9702,9 +9807,9 @@
                                     </p:set>
                                     <p:anim calcmode="lin" valueType="num">
                                       <p:cBhvr additive="base">
-                                        <p:cTn id="31" dur="420" fill="hold"/>
-                                        <p:tgtEl>
-                                          <p:spTgt spid="8"/>
+                                        <p:cTn id="36" dur="420" fill="hold"/>
+                                        <p:tgtEl>
+                                          <p:spTgt spid="9"/>
                                         </p:tgtEl>
                                         <p:attrNameLst>
                                           <p:attrName>ppt_w</p:attrName>
@@ -9725,9 +9830,9 @@
                                     </p:anim>
                                     <p:anim calcmode="lin" valueType="num">
                                       <p:cBhvr additive="base">
-                                        <p:cTn id="32" dur="420" fill="hold"/>
-                                        <p:tgtEl>
-                                          <p:spTgt spid="8"/>
+                                        <p:cTn id="37" dur="420" fill="hold"/>
+                                        <p:tgtEl>
+                                          <p:spTgt spid="9"/>
                                         </p:tgtEl>
                                         <p:attrNameLst>
                                           <p:attrName>ppt_h</p:attrName>
@@ -9748,9 +9853,9 @@
                                     </p:anim>
                                     <p:animEffect transition="in" filter="fade">
                                       <p:cBhvr>
-                                        <p:cTn id="33" dur="420"/>
-                                        <p:tgtEl>
-                                          <p:spTgt spid="8"/>
+                                        <p:cTn id="38" dur="420"/>
+                                        <p:tgtEl>
+                                          <p:spTgt spid="9"/>
                                         </p:tgtEl>
                                       </p:cBhvr>
                                     </p:animEffect>

--- a/temp/files/T3-temp.pptx
+++ b/temp/files/T3-temp.pptx
@@ -6383,8 +6383,8 @@
         </p:blipFill>
         <p:spPr>
           <a:xfrm>
-            <a:off x="9799074" y="3169840"/>
-            <a:ext cx="1737316" cy="1127731"/>
+            <a:off x="10180065" y="3169840"/>
+            <a:ext cx="1356326" cy="1127731"/>
           </a:xfrm>
           <a:prstGeom prst="rect">
             <a:avLst/>

--- a/temp/files/T3-temp.pptx
+++ b/temp/files/T3-temp.pptx
@@ -18,6 +18,7 @@
     <p:sldId id="266" r:id="rId17"/>
     <p:sldId id="267" r:id="rId18"/>
     <p:sldId id="268" r:id="rId19"/>
+    <p:sldId id="269" r:id="rId20"/>
   </p:sldIdLst>
   <p:sldSz cx="12191695" cy="6858000" type="screen4x3"/>
   <p:notesSz cx="6858000" cy="9144000"/>
@@ -3292,114 +3293,66 @@
         </p:blipFill>
         <p:spPr>
           <a:xfrm>
-            <a:off x="426709" y="1341086"/>
-            <a:ext cx="6233004" cy="1203929"/>
+            <a:off x="10180065" y="4160415"/>
+            <a:ext cx="1584920" cy="2042108"/>
           </a:xfrm>
           <a:prstGeom prst="rect">
             <a:avLst/>
           </a:prstGeom>
         </p:spPr>
       </p:pic>
-      <p:pic>
-        <p:nvPicPr>
-          <p:cNvPr id="4" name="Picture 3" descr="c9_2_0.jpg"/>
-          <p:cNvPicPr>
-            <a:picLocks noChangeAspect="1"/>
-          </p:cNvPicPr>
+      <p:sp>
+        <p:nvSpPr>
+          <p:cNvPr id="4" name="Rectangle 3">
+            <a:hlinkClick r:id="rId4"/>
+          </p:cNvPr>
+          <p:cNvSpPr/>
           <p:nvPr/>
-        </p:nvPicPr>
-        <p:blipFill>
-          <a:blip r:embed="rId4"/>
-          <a:stretch>
-            <a:fillRect/>
-          </a:stretch>
-        </p:blipFill>
-        <p:spPr>
-          <a:xfrm>
-            <a:off x="426709" y="1569680"/>
-            <a:ext cx="6233004" cy="1889712"/>
+        </p:nvSpPr>
+        <p:spPr>
+          <a:xfrm>
+            <a:off x="655303" y="4724281"/>
+            <a:ext cx="2523109" cy="754361"/>
           </a:xfrm>
           <a:prstGeom prst="rect">
             <a:avLst/>
           </a:prstGeom>
-        </p:spPr>
-      </p:pic>
-      <p:pic>
-        <p:nvPicPr>
-          <p:cNvPr id="5" name="Picture 4" descr="c9_3_0.jpg"/>
-          <p:cNvPicPr>
-            <a:picLocks noChangeAspect="1"/>
-          </p:cNvPicPr>
-          <p:nvPr/>
-        </p:nvPicPr>
-        <p:blipFill>
-          <a:blip r:embed="rId5"/>
-          <a:stretch>
-            <a:fillRect/>
-          </a:stretch>
-        </p:blipFill>
-        <p:spPr>
-          <a:xfrm>
-            <a:off x="426709" y="3169840"/>
-            <a:ext cx="6233004" cy="1203929"/>
-          </a:xfrm>
-          <a:prstGeom prst="rect">
-            <a:avLst/>
-          </a:prstGeom>
-        </p:spPr>
-      </p:pic>
-      <p:pic>
-        <p:nvPicPr>
-          <p:cNvPr id="6" name="Picture 5" descr="c9_4_0.jpg"/>
-          <p:cNvPicPr>
-            <a:picLocks noChangeAspect="1"/>
-          </p:cNvPicPr>
-          <p:nvPr/>
-        </p:nvPicPr>
-        <p:blipFill>
-          <a:blip r:embed="rId6"/>
-          <a:stretch>
-            <a:fillRect/>
-          </a:stretch>
-        </p:blipFill>
-        <p:spPr>
-          <a:xfrm>
-            <a:off x="426709" y="4084217"/>
-            <a:ext cx="6233004" cy="1203929"/>
-          </a:xfrm>
-          <a:prstGeom prst="rect">
-            <a:avLst/>
-          </a:prstGeom>
-        </p:spPr>
-      </p:pic>
-      <p:pic>
-        <p:nvPicPr>
-          <p:cNvPr id="7" name="Picture 6" descr="c9_5_0.jpg"/>
-          <p:cNvPicPr>
-            <a:picLocks noChangeAspect="1"/>
-          </p:cNvPicPr>
-          <p:nvPr/>
-        </p:nvPicPr>
-        <p:blipFill>
-          <a:blip r:embed="rId7"/>
-          <a:stretch>
-            <a:fillRect/>
-          </a:stretch>
-        </p:blipFill>
-        <p:spPr>
-          <a:xfrm>
-            <a:off x="0" y="5836773"/>
-            <a:ext cx="12191695" cy="1021054"/>
-          </a:xfrm>
-          <a:prstGeom prst="rect">
-            <a:avLst/>
-          </a:prstGeom>
-        </p:spPr>
-      </p:pic>
+          <a:solidFill>
+            <a:srgbClr val="FFFFFF">
+              <a:alpha val="0"/>
+            </a:srgbClr>
+          </a:solidFill>
+          <a:ln>
+            <a:noFill/>
+          </a:ln>
+          <a:effectLst/>
+        </p:spPr>
+        <p:style>
+          <a:lnRef idx="1">
+            <a:schemeClr val="accent1"/>
+          </a:lnRef>
+          <a:fillRef idx="3">
+            <a:schemeClr val="accent1"/>
+          </a:fillRef>
+          <a:effectRef idx="2">
+            <a:schemeClr val="accent1"/>
+          </a:effectRef>
+          <a:fontRef idx="minor">
+            <a:schemeClr val="lt1"/>
+          </a:fontRef>
+        </p:style>
+        <p:txBody>
+          <a:bodyPr rtlCol="0" anchor="ctr"/>
+          <a:lstStyle/>
+          <a:p>
+            <a:pPr algn="ctr"/>
+          </a:p>
+        </p:txBody>
+      </p:sp>
       <p:sp>
         <p:nvSpPr>
-          <p:cNvPr id="8" name="TextBox 7">
-            <a:hlinkClick action="ppaction://hlinksldjump" r:id="rId8"/>
+          <p:cNvPr id="5" name="TextBox 4">
+            <a:hlinkClick action="ppaction://hlinksldjump" r:id="rId5"/>
           </p:cNvPr>
           <p:cNvSpPr txBox="1"/>
           <p:nvPr/>
@@ -3464,7 +3417,7 @@
                             </p:stCondLst>
                             <p:childTnLst>
                               <p:par>
-                                <p:cTn id="5" presetID="2" presetClass="entr" presetSubtype="8" fill="hold" decel="100000" grpId="0" nodeType="clickEffect">
+                                <p:cTn id="5" presetID="10" presetClass="entr" presetSubtype="0" fill="hold" grpId="0" nodeType="clickEffect">
                                   <p:stCondLst>
                                     <p:cond delay="0"/>
                                   </p:stCondLst>
@@ -3487,378 +3440,14 @@
                                         <p:strVal val="visible"/>
                                       </p:to>
                                     </p:set>
-                                    <p:anim calcmode="lin" valueType="num">
-                                      <p:cBhvr additive="base">
-                                        <p:cTn id="7" dur="550" fill="hold"/>
-                                        <p:tgtEl>
-                                          <p:spTgt spid="3"/>
-                                        </p:tgtEl>
-                                        <p:attrNameLst>
-                                          <p:attrName>ppt_x</p:attrName>
-                                        </p:attrNameLst>
-                                      </p:cBhvr>
-                                      <p:tavLst>
-                                        <p:tav tm="0">
-                                          <p:val>
-                                            <p:strVal val="0-#ppt_w/2"/>
-                                          </p:val>
-                                        </p:tav>
-                                        <p:tav tm="100000">
-                                          <p:val>
-                                            <p:strVal val="#ppt_x"/>
-                                          </p:val>
-                                        </p:tav>
-                                      </p:tavLst>
-                                    </p:anim>
-                                    <p:anim calcmode="lin" valueType="num">
-                                      <p:cBhvr additive="base">
-                                        <p:cTn id="8" dur="550" fill="hold"/>
-                                        <p:tgtEl>
-                                          <p:spTgt spid="3"/>
-                                        </p:tgtEl>
-                                        <p:attrNameLst>
-                                          <p:attrName>ppt_y</p:attrName>
-                                        </p:attrNameLst>
-                                      </p:cBhvr>
-                                      <p:tavLst>
-                                        <p:tav tm="0">
-                                          <p:val>
-                                            <p:strVal val="#ppt_y"/>
-                                          </p:val>
-                                        </p:tav>
-                                        <p:tav tm="100000">
-                                          <p:val>
-                                            <p:strVal val="#ppt_y"/>
-                                          </p:val>
-                                        </p:tav>
-                                      </p:tavLst>
-                                    </p:anim>
-                                  </p:childTnLst>
-                                </p:cTn>
-                              </p:par>
-                            </p:childTnLst>
-                          </p:cTn>
-                        </p:par>
-                      </p:childTnLst>
-                    </p:cTn>
-                  </p:par>
-                  <p:par>
-                    <p:cTn id="9" fill="hold">
-                      <p:stCondLst>
-                        <p:cond delay="indefinite"/>
-                      </p:stCondLst>
-                      <p:childTnLst>
-                        <p:par>
-                          <p:cTn id="10" fill="hold">
-                            <p:stCondLst>
-                              <p:cond delay="0"/>
-                            </p:stCondLst>
-                            <p:childTnLst>
-                              <p:par>
-                                <p:cTn id="11" presetID="10" presetClass="entr" presetSubtype="0" fill="hold" grpId="0" nodeType="clickEffect">
-                                  <p:stCondLst>
-                                    <p:cond delay="0"/>
-                                  </p:stCondLst>
-                                  <p:childTnLst>
-                                    <p:set>
-                                      <p:cBhvr>
-                                        <p:cTn id="12" dur="1" fill="hold">
-                                          <p:stCondLst>
-                                            <p:cond delay="0"/>
-                                          </p:stCondLst>
-                                        </p:cTn>
-                                        <p:tgtEl>
-                                          <p:spTgt spid="4"/>
-                                        </p:tgtEl>
-                                        <p:attrNameLst>
-                                          <p:attrName>style.visibility</p:attrName>
-                                        </p:attrNameLst>
-                                      </p:cBhvr>
-                                      <p:to>
-                                        <p:strVal val="visible"/>
-                                      </p:to>
-                                    </p:set>
                                     <p:animEffect transition="in" filter="fade">
                                       <p:cBhvr>
-                                        <p:cTn id="13" dur="450"/>
-                                        <p:tgtEl>
-                                          <p:spTgt spid="4"/>
+                                        <p:cTn id="7" dur="450"/>
+                                        <p:tgtEl>
+                                          <p:spTgt spid="3"/>
                                         </p:tgtEl>
                                       </p:cBhvr>
                                     </p:animEffect>
-                                  </p:childTnLst>
-                                </p:cTn>
-                              </p:par>
-                            </p:childTnLst>
-                          </p:cTn>
-                        </p:par>
-                      </p:childTnLst>
-                    </p:cTn>
-                  </p:par>
-                  <p:par>
-                    <p:cTn id="14" fill="hold">
-                      <p:stCondLst>
-                        <p:cond delay="indefinite"/>
-                      </p:stCondLst>
-                      <p:childTnLst>
-                        <p:par>
-                          <p:cTn id="15" fill="hold">
-                            <p:stCondLst>
-                              <p:cond delay="0"/>
-                            </p:stCondLst>
-                            <p:childTnLst>
-                              <p:par>
-                                <p:cTn id="16" presetID="2" presetClass="entr" presetSubtype="8" fill="hold" decel="100000" grpId="0" nodeType="clickEffect">
-                                  <p:stCondLst>
-                                    <p:cond delay="0"/>
-                                  </p:stCondLst>
-                                  <p:childTnLst>
-                                    <p:set>
-                                      <p:cBhvr>
-                                        <p:cTn id="17" dur="1" fill="hold">
-                                          <p:stCondLst>
-                                            <p:cond delay="0"/>
-                                          </p:stCondLst>
-                                        </p:cTn>
-                                        <p:tgtEl>
-                                          <p:spTgt spid="5"/>
-                                        </p:tgtEl>
-                                        <p:attrNameLst>
-                                          <p:attrName>style.visibility</p:attrName>
-                                        </p:attrNameLst>
-                                      </p:cBhvr>
-                                      <p:to>
-                                        <p:strVal val="visible"/>
-                                      </p:to>
-                                    </p:set>
-                                    <p:anim calcmode="lin" valueType="num">
-                                      <p:cBhvr additive="base">
-                                        <p:cTn id="18" dur="550" fill="hold"/>
-                                        <p:tgtEl>
-                                          <p:spTgt spid="5"/>
-                                        </p:tgtEl>
-                                        <p:attrNameLst>
-                                          <p:attrName>ppt_x</p:attrName>
-                                        </p:attrNameLst>
-                                      </p:cBhvr>
-                                      <p:tavLst>
-                                        <p:tav tm="0">
-                                          <p:val>
-                                            <p:strVal val="0-#ppt_w/2"/>
-                                          </p:val>
-                                        </p:tav>
-                                        <p:tav tm="100000">
-                                          <p:val>
-                                            <p:strVal val="#ppt_x"/>
-                                          </p:val>
-                                        </p:tav>
-                                      </p:tavLst>
-                                    </p:anim>
-                                    <p:anim calcmode="lin" valueType="num">
-                                      <p:cBhvr additive="base">
-                                        <p:cTn id="19" dur="550" fill="hold"/>
-                                        <p:tgtEl>
-                                          <p:spTgt spid="5"/>
-                                        </p:tgtEl>
-                                        <p:attrNameLst>
-                                          <p:attrName>ppt_y</p:attrName>
-                                        </p:attrNameLst>
-                                      </p:cBhvr>
-                                      <p:tavLst>
-                                        <p:tav tm="0">
-                                          <p:val>
-                                            <p:strVal val="#ppt_y"/>
-                                          </p:val>
-                                        </p:tav>
-                                        <p:tav tm="100000">
-                                          <p:val>
-                                            <p:strVal val="#ppt_y"/>
-                                          </p:val>
-                                        </p:tav>
-                                      </p:tavLst>
-                                    </p:anim>
-                                  </p:childTnLst>
-                                </p:cTn>
-                              </p:par>
-                            </p:childTnLst>
-                          </p:cTn>
-                        </p:par>
-                      </p:childTnLst>
-                    </p:cTn>
-                  </p:par>
-                  <p:par>
-                    <p:cTn id="20" fill="hold">
-                      <p:stCondLst>
-                        <p:cond delay="indefinite"/>
-                      </p:stCondLst>
-                      <p:childTnLst>
-                        <p:par>
-                          <p:cTn id="21" fill="hold">
-                            <p:stCondLst>
-                              <p:cond delay="0"/>
-                            </p:stCondLst>
-                            <p:childTnLst>
-                              <p:par>
-                                <p:cTn id="22" presetID="2" presetClass="entr" presetSubtype="8" fill="hold" decel="100000" grpId="0" nodeType="clickEffect">
-                                  <p:stCondLst>
-                                    <p:cond delay="0"/>
-                                  </p:stCondLst>
-                                  <p:childTnLst>
-                                    <p:set>
-                                      <p:cBhvr>
-                                        <p:cTn id="23" dur="1" fill="hold">
-                                          <p:stCondLst>
-                                            <p:cond delay="0"/>
-                                          </p:stCondLst>
-                                        </p:cTn>
-                                        <p:tgtEl>
-                                          <p:spTgt spid="6"/>
-                                        </p:tgtEl>
-                                        <p:attrNameLst>
-                                          <p:attrName>style.visibility</p:attrName>
-                                        </p:attrNameLst>
-                                      </p:cBhvr>
-                                      <p:to>
-                                        <p:strVal val="visible"/>
-                                      </p:to>
-                                    </p:set>
-                                    <p:anim calcmode="lin" valueType="num">
-                                      <p:cBhvr additive="base">
-                                        <p:cTn id="24" dur="550" fill="hold"/>
-                                        <p:tgtEl>
-                                          <p:spTgt spid="6"/>
-                                        </p:tgtEl>
-                                        <p:attrNameLst>
-                                          <p:attrName>ppt_x</p:attrName>
-                                        </p:attrNameLst>
-                                      </p:cBhvr>
-                                      <p:tavLst>
-                                        <p:tav tm="0">
-                                          <p:val>
-                                            <p:strVal val="0-#ppt_w/2"/>
-                                          </p:val>
-                                        </p:tav>
-                                        <p:tav tm="100000">
-                                          <p:val>
-                                            <p:strVal val="#ppt_x"/>
-                                          </p:val>
-                                        </p:tav>
-                                      </p:tavLst>
-                                    </p:anim>
-                                    <p:anim calcmode="lin" valueType="num">
-                                      <p:cBhvr additive="base">
-                                        <p:cTn id="25" dur="550" fill="hold"/>
-                                        <p:tgtEl>
-                                          <p:spTgt spid="6"/>
-                                        </p:tgtEl>
-                                        <p:attrNameLst>
-                                          <p:attrName>ppt_y</p:attrName>
-                                        </p:attrNameLst>
-                                      </p:cBhvr>
-                                      <p:tavLst>
-                                        <p:tav tm="0">
-                                          <p:val>
-                                            <p:strVal val="#ppt_y"/>
-                                          </p:val>
-                                        </p:tav>
-                                        <p:tav tm="100000">
-                                          <p:val>
-                                            <p:strVal val="#ppt_y"/>
-                                          </p:val>
-                                        </p:tav>
-                                      </p:tavLst>
-                                    </p:anim>
-                                  </p:childTnLst>
-                                </p:cTn>
-                              </p:par>
-                            </p:childTnLst>
-                          </p:cTn>
-                        </p:par>
-                      </p:childTnLst>
-                    </p:cTn>
-                  </p:par>
-                  <p:par>
-                    <p:cTn id="26" fill="hold">
-                      <p:stCondLst>
-                        <p:cond delay="indefinite"/>
-                      </p:stCondLst>
-                      <p:childTnLst>
-                        <p:par>
-                          <p:cTn id="27" fill="hold">
-                            <p:stCondLst>
-                              <p:cond delay="0"/>
-                            </p:stCondLst>
-                            <p:childTnLst>
-                              <p:par>
-                                <p:cTn id="28" presetID="2" presetClass="entr" presetSubtype="4" fill="hold" decel="100000" grpId="0" nodeType="clickEffect">
-                                  <p:stCondLst>
-                                    <p:cond delay="0"/>
-                                  </p:stCondLst>
-                                  <p:childTnLst>
-                                    <p:set>
-                                      <p:cBhvr>
-                                        <p:cTn id="29" dur="1" fill="hold">
-                                          <p:stCondLst>
-                                            <p:cond delay="0"/>
-                                          </p:stCondLst>
-                                        </p:cTn>
-                                        <p:tgtEl>
-                                          <p:spTgt spid="7"/>
-                                        </p:tgtEl>
-                                        <p:attrNameLst>
-                                          <p:attrName>style.visibility</p:attrName>
-                                        </p:attrNameLst>
-                                      </p:cBhvr>
-                                      <p:to>
-                                        <p:strVal val="visible"/>
-                                      </p:to>
-                                    </p:set>
-                                    <p:anim calcmode="lin" valueType="num">
-                                      <p:cBhvr additive="base">
-                                        <p:cTn id="30" dur="550" fill="hold"/>
-                                        <p:tgtEl>
-                                          <p:spTgt spid="7"/>
-                                        </p:tgtEl>
-                                        <p:attrNameLst>
-                                          <p:attrName>ppt_x</p:attrName>
-                                        </p:attrNameLst>
-                                      </p:cBhvr>
-                                      <p:tavLst>
-                                        <p:tav tm="0">
-                                          <p:val>
-                                            <p:strVal val="#ppt_x"/>
-                                          </p:val>
-                                        </p:tav>
-                                        <p:tav tm="100000">
-                                          <p:val>
-                                            <p:strVal val="#ppt_x"/>
-                                          </p:val>
-                                        </p:tav>
-                                      </p:tavLst>
-                                    </p:anim>
-                                    <p:anim calcmode="lin" valueType="num">
-                                      <p:cBhvr additive="base">
-                                        <p:cTn id="31" dur="550" fill="hold"/>
-                                        <p:tgtEl>
-                                          <p:spTgt spid="7"/>
-                                        </p:tgtEl>
-                                        <p:attrNameLst>
-                                          <p:attrName>ppt_y</p:attrName>
-                                        </p:attrNameLst>
-                                      </p:cBhvr>
-                                      <p:tavLst>
-                                        <p:tav tm="0">
-                                          <p:val>
-                                            <p:strVal val="1+#ppt_h/2"/>
-                                          </p:val>
-                                        </p:tav>
-                                        <p:tav tm="100000">
-                                          <p:val>
-                                            <p:strVal val="#ppt_y"/>
-                                          </p:val>
-                                        </p:tav>
-                                      </p:tavLst>
-                                    </p:anim>
                                   </p:childTnLst>
                                 </p:cTn>
                               </p:par>
@@ -3944,7 +3533,7 @@
         <p:spPr>
           <a:xfrm>
             <a:off x="426709" y="1341086"/>
-            <a:ext cx="11338276" cy="1737316"/>
+            <a:ext cx="6233004" cy="1203929"/>
           </a:xfrm>
           <a:prstGeom prst="rect">
             <a:avLst/>
@@ -3967,8 +3556,8 @@
         </p:blipFill>
         <p:spPr>
           <a:xfrm>
-            <a:off x="10103867" y="1645878"/>
-            <a:ext cx="1432524" cy="1127731"/>
+            <a:off x="426709" y="1569680"/>
+            <a:ext cx="6233004" cy="1889712"/>
           </a:xfrm>
           <a:prstGeom prst="rect">
             <a:avLst/>
@@ -3991,8 +3580,8 @@
         </p:blipFill>
         <p:spPr>
           <a:xfrm>
-            <a:off x="426709" y="2865048"/>
-            <a:ext cx="11338276" cy="1737316"/>
+            <a:off x="426709" y="3169840"/>
+            <a:ext cx="6233004" cy="1203929"/>
           </a:xfrm>
           <a:prstGeom prst="rect">
             <a:avLst/>
@@ -4015,8 +3604,8 @@
         </p:blipFill>
         <p:spPr>
           <a:xfrm>
-            <a:off x="10103867" y="3169840"/>
-            <a:ext cx="1432524" cy="1127731"/>
+            <a:off x="426709" y="4084217"/>
+            <a:ext cx="6233004" cy="1203929"/>
           </a:xfrm>
           <a:prstGeom prst="rect">
             <a:avLst/>
@@ -4039,42 +3628,18 @@
         </p:blipFill>
         <p:spPr>
           <a:xfrm>
-            <a:off x="426709" y="4389010"/>
-            <a:ext cx="11338276" cy="1737316"/>
+            <a:off x="0" y="5836773"/>
+            <a:ext cx="12191695" cy="1021054"/>
           </a:xfrm>
           <a:prstGeom prst="rect">
             <a:avLst/>
           </a:prstGeom>
         </p:spPr>
       </p:pic>
-      <p:pic>
-        <p:nvPicPr>
-          <p:cNvPr id="8" name="Picture 7" descr="c10_6_0.jpg"/>
-          <p:cNvPicPr>
-            <a:picLocks noChangeAspect="1"/>
-          </p:cNvPicPr>
-          <p:nvPr/>
-        </p:nvPicPr>
-        <p:blipFill>
-          <a:blip r:embed="rId8"/>
-          <a:stretch>
-            <a:fillRect/>
-          </a:stretch>
-        </p:blipFill>
-        <p:spPr>
-          <a:xfrm>
-            <a:off x="10103867" y="4693802"/>
-            <a:ext cx="1432524" cy="1127731"/>
-          </a:xfrm>
-          <a:prstGeom prst="rect">
-            <a:avLst/>
-          </a:prstGeom>
-        </p:spPr>
-      </p:pic>
       <p:sp>
         <p:nvSpPr>
-          <p:cNvPr id="9" name="TextBox 8">
-            <a:hlinkClick action="ppaction://hlinksldjump" r:id="rId9"/>
+          <p:cNvPr id="8" name="TextBox 7">
+            <a:hlinkClick action="ppaction://hlinksldjump" r:id="rId8"/>
           </p:cNvPr>
           <p:cNvSpPr txBox="1"/>
           <p:nvPr/>
@@ -4230,7 +3795,7 @@
                             </p:stCondLst>
                             <p:childTnLst>
                               <p:par>
-                                <p:cTn id="11" presetID="53" presetClass="entr" presetSubtype="16" fill="hold" grpId="0" nodeType="clickEffect">
+                                <p:cTn id="11" presetID="10" presetClass="entr" presetSubtype="0" fill="hold" grpId="0" nodeType="clickEffect">
                                   <p:stCondLst>
                                     <p:cond delay="0"/>
                                   </p:stCondLst>
@@ -4253,55 +3818,9 @@
                                         <p:strVal val="visible"/>
                                       </p:to>
                                     </p:set>
-                                    <p:anim calcmode="lin" valueType="num">
-                                      <p:cBhvr additive="base">
-                                        <p:cTn id="13" dur="420" fill="hold"/>
-                                        <p:tgtEl>
-                                          <p:spTgt spid="4"/>
-                                        </p:tgtEl>
-                                        <p:attrNameLst>
-                                          <p:attrName>ppt_w</p:attrName>
-                                        </p:attrNameLst>
-                                      </p:cBhvr>
-                                      <p:tavLst>
-                                        <p:tav tm="0">
-                                          <p:val>
-                                            <p:strVal val="0"/>
-                                          </p:val>
-                                        </p:tav>
-                                        <p:tav tm="100000">
-                                          <p:val>
-                                            <p:strVal val="#ppt_w"/>
-                                          </p:val>
-                                        </p:tav>
-                                      </p:tavLst>
-                                    </p:anim>
-                                    <p:anim calcmode="lin" valueType="num">
-                                      <p:cBhvr additive="base">
-                                        <p:cTn id="14" dur="420" fill="hold"/>
-                                        <p:tgtEl>
-                                          <p:spTgt spid="4"/>
-                                        </p:tgtEl>
-                                        <p:attrNameLst>
-                                          <p:attrName>ppt_h</p:attrName>
-                                        </p:attrNameLst>
-                                      </p:cBhvr>
-                                      <p:tavLst>
-                                        <p:tav tm="0">
-                                          <p:val>
-                                            <p:strVal val="0"/>
-                                          </p:val>
-                                        </p:tav>
-                                        <p:tav tm="100000">
-                                          <p:val>
-                                            <p:strVal val="#ppt_h"/>
-                                          </p:val>
-                                        </p:tav>
-                                      </p:tavLst>
-                                    </p:anim>
                                     <p:animEffect transition="in" filter="fade">
                                       <p:cBhvr>
-                                        <p:cTn id="15" dur="420"/>
+                                        <p:cTn id="13" dur="450"/>
                                         <p:tgtEl>
                                           <p:spTgt spid="4"/>
                                         </p:tgtEl>
@@ -4317,26 +3836,26 @@
                     </p:cTn>
                   </p:par>
                   <p:par>
-                    <p:cTn id="16" fill="hold">
+                    <p:cTn id="14" fill="hold">
                       <p:stCondLst>
                         <p:cond delay="indefinite"/>
                       </p:stCondLst>
                       <p:childTnLst>
                         <p:par>
-                          <p:cTn id="17" fill="hold">
+                          <p:cTn id="15" fill="hold">
                             <p:stCondLst>
                               <p:cond delay="0"/>
                             </p:stCondLst>
                             <p:childTnLst>
                               <p:par>
-                                <p:cTn id="18" presetID="2" presetClass="entr" presetSubtype="8" fill="hold" decel="100000" grpId="0" nodeType="clickEffect">
+                                <p:cTn id="16" presetID="2" presetClass="entr" presetSubtype="8" fill="hold" decel="100000" grpId="0" nodeType="clickEffect">
                                   <p:stCondLst>
                                     <p:cond delay="0"/>
                                   </p:stCondLst>
                                   <p:childTnLst>
                                     <p:set>
                                       <p:cBhvr>
-                                        <p:cTn id="19" dur="1" fill="hold">
+                                        <p:cTn id="17" dur="1" fill="hold">
                                           <p:stCondLst>
                                             <p:cond delay="0"/>
                                           </p:stCondLst>
@@ -4354,7 +3873,7 @@
                                     </p:set>
                                     <p:anim calcmode="lin" valueType="num">
                                       <p:cBhvr additive="base">
-                                        <p:cTn id="20" dur="550" fill="hold"/>
+                                        <p:cTn id="18" dur="550" fill="hold"/>
                                         <p:tgtEl>
                                           <p:spTgt spid="5"/>
                                         </p:tgtEl>
@@ -4377,7 +3896,7 @@
                                     </p:anim>
                                     <p:anim calcmode="lin" valueType="num">
                                       <p:cBhvr additive="base">
-                                        <p:cTn id="21" dur="550" fill="hold"/>
+                                        <p:cTn id="19" dur="550" fill="hold"/>
                                         <p:tgtEl>
                                           <p:spTgt spid="5"/>
                                         </p:tgtEl>
@@ -4408,26 +3927,26 @@
                     </p:cTn>
                   </p:par>
                   <p:par>
-                    <p:cTn id="22" fill="hold">
+                    <p:cTn id="20" fill="hold">
                       <p:stCondLst>
                         <p:cond delay="indefinite"/>
                       </p:stCondLst>
                       <p:childTnLst>
                         <p:par>
-                          <p:cTn id="23" fill="hold">
+                          <p:cTn id="21" fill="hold">
                             <p:stCondLst>
                               <p:cond delay="0"/>
                             </p:stCondLst>
                             <p:childTnLst>
                               <p:par>
-                                <p:cTn id="24" presetID="53" presetClass="entr" presetSubtype="16" fill="hold" grpId="0" nodeType="clickEffect">
+                                <p:cTn id="22" presetID="2" presetClass="entr" presetSubtype="8" fill="hold" decel="100000" grpId="0" nodeType="clickEffect">
                                   <p:stCondLst>
                                     <p:cond delay="0"/>
                                   </p:stCondLst>
                                   <p:childTnLst>
                                     <p:set>
                                       <p:cBhvr>
-                                        <p:cTn id="25" dur="1" fill="hold">
+                                        <p:cTn id="23" dur="1" fill="hold">
                                           <p:stCondLst>
                                             <p:cond delay="0"/>
                                           </p:stCondLst>
@@ -4445,131 +3964,32 @@
                                     </p:set>
                                     <p:anim calcmode="lin" valueType="num">
                                       <p:cBhvr additive="base">
-                                        <p:cTn id="26" dur="420" fill="hold"/>
+                                        <p:cTn id="24" dur="550" fill="hold"/>
                                         <p:tgtEl>
                                           <p:spTgt spid="6"/>
                                         </p:tgtEl>
                                         <p:attrNameLst>
-                                          <p:attrName>ppt_w</p:attrName>
+                                          <p:attrName>ppt_x</p:attrName>
                                         </p:attrNameLst>
                                       </p:cBhvr>
                                       <p:tavLst>
                                         <p:tav tm="0">
                                           <p:val>
-                                            <p:strVal val="0"/>
+                                            <p:strVal val="0-#ppt_w/2"/>
                                           </p:val>
                                         </p:tav>
                                         <p:tav tm="100000">
                                           <p:val>
-                                            <p:strVal val="#ppt_w"/>
+                                            <p:strVal val="#ppt_x"/>
                                           </p:val>
                                         </p:tav>
                                       </p:tavLst>
                                     </p:anim>
                                     <p:anim calcmode="lin" valueType="num">
                                       <p:cBhvr additive="base">
-                                        <p:cTn id="27" dur="420" fill="hold"/>
+                                        <p:cTn id="25" dur="550" fill="hold"/>
                                         <p:tgtEl>
                                           <p:spTgt spid="6"/>
-                                        </p:tgtEl>
-                                        <p:attrNameLst>
-                                          <p:attrName>ppt_h</p:attrName>
-                                        </p:attrNameLst>
-                                      </p:cBhvr>
-                                      <p:tavLst>
-                                        <p:tav tm="0">
-                                          <p:val>
-                                            <p:strVal val="0"/>
-                                          </p:val>
-                                        </p:tav>
-                                        <p:tav tm="100000">
-                                          <p:val>
-                                            <p:strVal val="#ppt_h"/>
-                                          </p:val>
-                                        </p:tav>
-                                      </p:tavLst>
-                                    </p:anim>
-                                    <p:animEffect transition="in" filter="fade">
-                                      <p:cBhvr>
-                                        <p:cTn id="28" dur="420"/>
-                                        <p:tgtEl>
-                                          <p:spTgt spid="6"/>
-                                        </p:tgtEl>
-                                      </p:cBhvr>
-                                    </p:animEffect>
-                                  </p:childTnLst>
-                                </p:cTn>
-                              </p:par>
-                            </p:childTnLst>
-                          </p:cTn>
-                        </p:par>
-                      </p:childTnLst>
-                    </p:cTn>
-                  </p:par>
-                  <p:par>
-                    <p:cTn id="29" fill="hold">
-                      <p:stCondLst>
-                        <p:cond delay="indefinite"/>
-                      </p:stCondLst>
-                      <p:childTnLst>
-                        <p:par>
-                          <p:cTn id="30" fill="hold">
-                            <p:stCondLst>
-                              <p:cond delay="0"/>
-                            </p:stCondLst>
-                            <p:childTnLst>
-                              <p:par>
-                                <p:cTn id="31" presetID="2" presetClass="entr" presetSubtype="8" fill="hold" decel="100000" grpId="0" nodeType="clickEffect">
-                                  <p:stCondLst>
-                                    <p:cond delay="0"/>
-                                  </p:stCondLst>
-                                  <p:childTnLst>
-                                    <p:set>
-                                      <p:cBhvr>
-                                        <p:cTn id="32" dur="1" fill="hold">
-                                          <p:stCondLst>
-                                            <p:cond delay="0"/>
-                                          </p:stCondLst>
-                                        </p:cTn>
-                                        <p:tgtEl>
-                                          <p:spTgt spid="7"/>
-                                        </p:tgtEl>
-                                        <p:attrNameLst>
-                                          <p:attrName>style.visibility</p:attrName>
-                                        </p:attrNameLst>
-                                      </p:cBhvr>
-                                      <p:to>
-                                        <p:strVal val="visible"/>
-                                      </p:to>
-                                    </p:set>
-                                    <p:anim calcmode="lin" valueType="num">
-                                      <p:cBhvr additive="base">
-                                        <p:cTn id="33" dur="550" fill="hold"/>
-                                        <p:tgtEl>
-                                          <p:spTgt spid="7"/>
-                                        </p:tgtEl>
-                                        <p:attrNameLst>
-                                          <p:attrName>ppt_x</p:attrName>
-                                        </p:attrNameLst>
-                                      </p:cBhvr>
-                                      <p:tavLst>
-                                        <p:tav tm="0">
-                                          <p:val>
-                                            <p:strVal val="0-#ppt_w/2"/>
-                                          </p:val>
-                                        </p:tav>
-                                        <p:tav tm="100000">
-                                          <p:val>
-                                            <p:strVal val="#ppt_x"/>
-                                          </p:val>
-                                        </p:tav>
-                                      </p:tavLst>
-                                    </p:anim>
-                                    <p:anim calcmode="lin" valueType="num">
-                                      <p:cBhvr additive="base">
-                                        <p:cTn id="34" dur="550" fill="hold"/>
-                                        <p:tgtEl>
-                                          <p:spTgt spid="7"/>
                                         </p:tgtEl>
                                         <p:attrNameLst>
                                           <p:attrName>ppt_y</p:attrName>
@@ -4598,32 +4018,32 @@
                     </p:cTn>
                   </p:par>
                   <p:par>
-                    <p:cTn id="35" fill="hold">
+                    <p:cTn id="26" fill="hold">
                       <p:stCondLst>
                         <p:cond delay="indefinite"/>
                       </p:stCondLst>
                       <p:childTnLst>
                         <p:par>
-                          <p:cTn id="36" fill="hold">
+                          <p:cTn id="27" fill="hold">
                             <p:stCondLst>
                               <p:cond delay="0"/>
                             </p:stCondLst>
                             <p:childTnLst>
                               <p:par>
-                                <p:cTn id="37" presetID="53" presetClass="entr" presetSubtype="16" fill="hold" grpId="0" nodeType="clickEffect">
+                                <p:cTn id="28" presetID="2" presetClass="entr" presetSubtype="4" fill="hold" decel="100000" grpId="0" nodeType="clickEffect">
                                   <p:stCondLst>
                                     <p:cond delay="0"/>
                                   </p:stCondLst>
                                   <p:childTnLst>
                                     <p:set>
                                       <p:cBhvr>
-                                        <p:cTn id="38" dur="1" fill="hold">
+                                        <p:cTn id="29" dur="1" fill="hold">
                                           <p:stCondLst>
                                             <p:cond delay="0"/>
                                           </p:stCondLst>
                                         </p:cTn>
                                         <p:tgtEl>
-                                          <p:spTgt spid="8"/>
+                                          <p:spTgt spid="7"/>
                                         </p:tgtEl>
                                         <p:attrNameLst>
                                           <p:attrName>style.visibility</p:attrName>
@@ -4635,58 +4055,50 @@
                                     </p:set>
                                     <p:anim calcmode="lin" valueType="num">
                                       <p:cBhvr additive="base">
-                                        <p:cTn id="39" dur="420" fill="hold"/>
-                                        <p:tgtEl>
-                                          <p:spTgt spid="8"/>
-                                        </p:tgtEl>
-                                        <p:attrNameLst>
-                                          <p:attrName>ppt_w</p:attrName>
+                                        <p:cTn id="30" dur="550" fill="hold"/>
+                                        <p:tgtEl>
+                                          <p:spTgt spid="7"/>
+                                        </p:tgtEl>
+                                        <p:attrNameLst>
+                                          <p:attrName>ppt_x</p:attrName>
                                         </p:attrNameLst>
                                       </p:cBhvr>
                                       <p:tavLst>
                                         <p:tav tm="0">
                                           <p:val>
-                                            <p:strVal val="0"/>
+                                            <p:strVal val="#ppt_x"/>
                                           </p:val>
                                         </p:tav>
                                         <p:tav tm="100000">
                                           <p:val>
-                                            <p:strVal val="#ppt_w"/>
+                                            <p:strVal val="#ppt_x"/>
                                           </p:val>
                                         </p:tav>
                                       </p:tavLst>
                                     </p:anim>
                                     <p:anim calcmode="lin" valueType="num">
                                       <p:cBhvr additive="base">
-                                        <p:cTn id="40" dur="420" fill="hold"/>
-                                        <p:tgtEl>
-                                          <p:spTgt spid="8"/>
-                                        </p:tgtEl>
-                                        <p:attrNameLst>
-                                          <p:attrName>ppt_h</p:attrName>
+                                        <p:cTn id="31" dur="550" fill="hold"/>
+                                        <p:tgtEl>
+                                          <p:spTgt spid="7"/>
+                                        </p:tgtEl>
+                                        <p:attrNameLst>
+                                          <p:attrName>ppt_y</p:attrName>
                                         </p:attrNameLst>
                                       </p:cBhvr>
                                       <p:tavLst>
                                         <p:tav tm="0">
                                           <p:val>
-                                            <p:strVal val="0"/>
+                                            <p:strVal val="1+#ppt_h/2"/>
                                           </p:val>
                                         </p:tav>
                                         <p:tav tm="100000">
                                           <p:val>
-                                            <p:strVal val="#ppt_h"/>
+                                            <p:strVal val="#ppt_y"/>
                                           </p:val>
                                         </p:tav>
                                       </p:tavLst>
                                     </p:anim>
-                                    <p:animEffect transition="in" filter="fade">
-                                      <p:cBhvr>
-                                        <p:cTn id="41" dur="420"/>
-                                        <p:tgtEl>
-                                          <p:spTgt spid="8"/>
-                                        </p:tgtEl>
-                                      </p:cBhvr>
-                                    </p:animEffect>
                                   </p:childTnLst>
                                 </p:cTn>
                               </p:par>
@@ -4771,8 +4183,8 @@
         </p:blipFill>
         <p:spPr>
           <a:xfrm>
-            <a:off x="426709" y="1417284"/>
-            <a:ext cx="11338276" cy="1356326"/>
+            <a:off x="426709" y="1341086"/>
+            <a:ext cx="11338276" cy="1737316"/>
           </a:xfrm>
           <a:prstGeom prst="rect">
             <a:avLst/>
@@ -4795,8 +4207,8 @@
         </p:blipFill>
         <p:spPr>
           <a:xfrm>
-            <a:off x="3855623" y="1645878"/>
-            <a:ext cx="1127731" cy="822939"/>
+            <a:off x="10103867" y="1645878"/>
+            <a:ext cx="1432524" cy="1127731"/>
           </a:xfrm>
           <a:prstGeom prst="rect">
             <a:avLst/>
@@ -4819,8 +4231,8 @@
         </p:blipFill>
         <p:spPr>
           <a:xfrm>
-            <a:off x="426709" y="2712652"/>
-            <a:ext cx="11338276" cy="1356326"/>
+            <a:off x="426709" y="2865048"/>
+            <a:ext cx="11338276" cy="1737316"/>
           </a:xfrm>
           <a:prstGeom prst="rect">
             <a:avLst/>
@@ -4843,8 +4255,8 @@
         </p:blipFill>
         <p:spPr>
           <a:xfrm>
-            <a:off x="3855623" y="2941246"/>
-            <a:ext cx="1127731" cy="822939"/>
+            <a:off x="10103867" y="3169840"/>
+            <a:ext cx="1432524" cy="1127731"/>
           </a:xfrm>
           <a:prstGeom prst="rect">
             <a:avLst/>
@@ -4867,8 +4279,8 @@
         </p:blipFill>
         <p:spPr>
           <a:xfrm>
-            <a:off x="426709" y="4008019"/>
-            <a:ext cx="11338276" cy="1356326"/>
+            <a:off x="426709" y="4389010"/>
+            <a:ext cx="11338276" cy="1737316"/>
           </a:xfrm>
           <a:prstGeom prst="rect">
             <a:avLst/>
@@ -4891,42 +4303,18 @@
         </p:blipFill>
         <p:spPr>
           <a:xfrm>
-            <a:off x="6065368" y="4236614"/>
-            <a:ext cx="1508722" cy="822939"/>
+            <a:off x="10103867" y="4693802"/>
+            <a:ext cx="1432524" cy="1127731"/>
           </a:xfrm>
           <a:prstGeom prst="rect">
             <a:avLst/>
           </a:prstGeom>
         </p:spPr>
       </p:pic>
-      <p:pic>
-        <p:nvPicPr>
-          <p:cNvPr id="9" name="Picture 8" descr="c11_7_0.jpg"/>
-          <p:cNvPicPr>
-            <a:picLocks noChangeAspect="1"/>
-          </p:cNvPicPr>
-          <p:nvPr/>
-        </p:nvPicPr>
-        <p:blipFill>
-          <a:blip r:embed="rId9"/>
-          <a:stretch>
-            <a:fillRect/>
-          </a:stretch>
-        </p:blipFill>
-        <p:spPr>
-          <a:xfrm>
-            <a:off x="7665528" y="45718"/>
-            <a:ext cx="4099457" cy="1661118"/>
-          </a:xfrm>
-          <a:prstGeom prst="rect">
-            <a:avLst/>
-          </a:prstGeom>
-        </p:spPr>
-      </p:pic>
       <p:sp>
         <p:nvSpPr>
-          <p:cNvPr id="10" name="TextBox 9">
-            <a:hlinkClick action="ppaction://hlinksldjump" r:id="rId10"/>
+          <p:cNvPr id="9" name="TextBox 8">
+            <a:hlinkClick action="ppaction://hlinksldjump" r:id="rId9"/>
           </p:cNvPr>
           <p:cNvSpPr txBox="1"/>
           <p:nvPr/>
@@ -5082,7 +4470,7 @@
                             </p:stCondLst>
                             <p:childTnLst>
                               <p:par>
-                                <p:cTn id="11" presetID="10" presetClass="entr" presetSubtype="0" fill="hold" grpId="0" nodeType="clickEffect">
+                                <p:cTn id="11" presetID="53" presetClass="entr" presetSubtype="16" fill="hold" grpId="0" nodeType="clickEffect">
                                   <p:stCondLst>
                                     <p:cond delay="0"/>
                                   </p:stCondLst>
@@ -5105,9 +4493,55 @@
                                         <p:strVal val="visible"/>
                                       </p:to>
                                     </p:set>
+                                    <p:anim calcmode="lin" valueType="num">
+                                      <p:cBhvr additive="base">
+                                        <p:cTn id="13" dur="420" fill="hold"/>
+                                        <p:tgtEl>
+                                          <p:spTgt spid="4"/>
+                                        </p:tgtEl>
+                                        <p:attrNameLst>
+                                          <p:attrName>ppt_w</p:attrName>
+                                        </p:attrNameLst>
+                                      </p:cBhvr>
+                                      <p:tavLst>
+                                        <p:tav tm="0">
+                                          <p:val>
+                                            <p:strVal val="0"/>
+                                          </p:val>
+                                        </p:tav>
+                                        <p:tav tm="100000">
+                                          <p:val>
+                                            <p:strVal val="#ppt_w"/>
+                                          </p:val>
+                                        </p:tav>
+                                      </p:tavLst>
+                                    </p:anim>
+                                    <p:anim calcmode="lin" valueType="num">
+                                      <p:cBhvr additive="base">
+                                        <p:cTn id="14" dur="420" fill="hold"/>
+                                        <p:tgtEl>
+                                          <p:spTgt spid="4"/>
+                                        </p:tgtEl>
+                                        <p:attrNameLst>
+                                          <p:attrName>ppt_h</p:attrName>
+                                        </p:attrNameLst>
+                                      </p:cBhvr>
+                                      <p:tavLst>
+                                        <p:tav tm="0">
+                                          <p:val>
+                                            <p:strVal val="0"/>
+                                          </p:val>
+                                        </p:tav>
+                                        <p:tav tm="100000">
+                                          <p:val>
+                                            <p:strVal val="#ppt_h"/>
+                                          </p:val>
+                                        </p:tav>
+                                      </p:tavLst>
+                                    </p:anim>
                                     <p:animEffect transition="in" filter="fade">
                                       <p:cBhvr>
-                                        <p:cTn id="13" dur="450"/>
+                                        <p:cTn id="15" dur="420"/>
                                         <p:tgtEl>
                                           <p:spTgt spid="4"/>
                                         </p:tgtEl>
@@ -5123,26 +4557,26 @@
                     </p:cTn>
                   </p:par>
                   <p:par>
-                    <p:cTn id="14" fill="hold">
+                    <p:cTn id="16" fill="hold">
                       <p:stCondLst>
                         <p:cond delay="indefinite"/>
                       </p:stCondLst>
                       <p:childTnLst>
                         <p:par>
-                          <p:cTn id="15" fill="hold">
+                          <p:cTn id="17" fill="hold">
                             <p:stCondLst>
                               <p:cond delay="0"/>
                             </p:stCondLst>
                             <p:childTnLst>
                               <p:par>
-                                <p:cTn id="16" presetID="2" presetClass="entr" presetSubtype="8" fill="hold" decel="100000" grpId="0" nodeType="clickEffect">
+                                <p:cTn id="18" presetID="2" presetClass="entr" presetSubtype="8" fill="hold" decel="100000" grpId="0" nodeType="clickEffect">
                                   <p:stCondLst>
                                     <p:cond delay="0"/>
                                   </p:stCondLst>
                                   <p:childTnLst>
                                     <p:set>
                                       <p:cBhvr>
-                                        <p:cTn id="17" dur="1" fill="hold">
+                                        <p:cTn id="19" dur="1" fill="hold">
                                           <p:stCondLst>
                                             <p:cond delay="0"/>
                                           </p:stCondLst>
@@ -5160,7 +4594,7 @@
                                     </p:set>
                                     <p:anim calcmode="lin" valueType="num">
                                       <p:cBhvr additive="base">
-                                        <p:cTn id="18" dur="550" fill="hold"/>
+                                        <p:cTn id="20" dur="550" fill="hold"/>
                                         <p:tgtEl>
                                           <p:spTgt spid="5"/>
                                         </p:tgtEl>
@@ -5183,7 +4617,7 @@
                                     </p:anim>
                                     <p:anim calcmode="lin" valueType="num">
                                       <p:cBhvr additive="base">
-                                        <p:cTn id="19" dur="550" fill="hold"/>
+                                        <p:cTn id="21" dur="550" fill="hold"/>
                                         <p:tgtEl>
                                           <p:spTgt spid="5"/>
                                         </p:tgtEl>
@@ -5214,26 +4648,26 @@
                     </p:cTn>
                   </p:par>
                   <p:par>
-                    <p:cTn id="20" fill="hold">
+                    <p:cTn id="22" fill="hold">
                       <p:stCondLst>
                         <p:cond delay="indefinite"/>
                       </p:stCondLst>
                       <p:childTnLst>
                         <p:par>
-                          <p:cTn id="21" fill="hold">
+                          <p:cTn id="23" fill="hold">
                             <p:stCondLst>
                               <p:cond delay="0"/>
                             </p:stCondLst>
                             <p:childTnLst>
                               <p:par>
-                                <p:cTn id="22" presetID="10" presetClass="entr" presetSubtype="0" fill="hold" grpId="0" nodeType="clickEffect">
+                                <p:cTn id="24" presetID="53" presetClass="entr" presetSubtype="16" fill="hold" grpId="0" nodeType="clickEffect">
                                   <p:stCondLst>
                                     <p:cond delay="0"/>
                                   </p:stCondLst>
                                   <p:childTnLst>
                                     <p:set>
                                       <p:cBhvr>
-                                        <p:cTn id="23" dur="1" fill="hold">
+                                        <p:cTn id="25" dur="1" fill="hold">
                                           <p:stCondLst>
                                             <p:cond delay="0"/>
                                           </p:stCondLst>
@@ -5249,9 +4683,55 @@
                                         <p:strVal val="visible"/>
                                       </p:to>
                                     </p:set>
+                                    <p:anim calcmode="lin" valueType="num">
+                                      <p:cBhvr additive="base">
+                                        <p:cTn id="26" dur="420" fill="hold"/>
+                                        <p:tgtEl>
+                                          <p:spTgt spid="6"/>
+                                        </p:tgtEl>
+                                        <p:attrNameLst>
+                                          <p:attrName>ppt_w</p:attrName>
+                                        </p:attrNameLst>
+                                      </p:cBhvr>
+                                      <p:tavLst>
+                                        <p:tav tm="0">
+                                          <p:val>
+                                            <p:strVal val="0"/>
+                                          </p:val>
+                                        </p:tav>
+                                        <p:tav tm="100000">
+                                          <p:val>
+                                            <p:strVal val="#ppt_w"/>
+                                          </p:val>
+                                        </p:tav>
+                                      </p:tavLst>
+                                    </p:anim>
+                                    <p:anim calcmode="lin" valueType="num">
+                                      <p:cBhvr additive="base">
+                                        <p:cTn id="27" dur="420" fill="hold"/>
+                                        <p:tgtEl>
+                                          <p:spTgt spid="6"/>
+                                        </p:tgtEl>
+                                        <p:attrNameLst>
+                                          <p:attrName>ppt_h</p:attrName>
+                                        </p:attrNameLst>
+                                      </p:cBhvr>
+                                      <p:tavLst>
+                                        <p:tav tm="0">
+                                          <p:val>
+                                            <p:strVal val="0"/>
+                                          </p:val>
+                                        </p:tav>
+                                        <p:tav tm="100000">
+                                          <p:val>
+                                            <p:strVal val="#ppt_h"/>
+                                          </p:val>
+                                        </p:tav>
+                                      </p:tavLst>
+                                    </p:anim>
                                     <p:animEffect transition="in" filter="fade">
                                       <p:cBhvr>
-                                        <p:cTn id="24" dur="450"/>
+                                        <p:cTn id="28" dur="420"/>
                                         <p:tgtEl>
                                           <p:spTgt spid="6"/>
                                         </p:tgtEl>
@@ -5267,26 +4747,26 @@
                     </p:cTn>
                   </p:par>
                   <p:par>
-                    <p:cTn id="25" fill="hold">
+                    <p:cTn id="29" fill="hold">
                       <p:stCondLst>
                         <p:cond delay="indefinite"/>
                       </p:stCondLst>
                       <p:childTnLst>
                         <p:par>
-                          <p:cTn id="26" fill="hold">
+                          <p:cTn id="30" fill="hold">
                             <p:stCondLst>
                               <p:cond delay="0"/>
                             </p:stCondLst>
                             <p:childTnLst>
                               <p:par>
-                                <p:cTn id="27" presetID="2" presetClass="entr" presetSubtype="8" fill="hold" decel="100000" grpId="0" nodeType="clickEffect">
+                                <p:cTn id="31" presetID="2" presetClass="entr" presetSubtype="8" fill="hold" decel="100000" grpId="0" nodeType="clickEffect">
                                   <p:stCondLst>
                                     <p:cond delay="0"/>
                                   </p:stCondLst>
                                   <p:childTnLst>
                                     <p:set>
                                       <p:cBhvr>
-                                        <p:cTn id="28" dur="1" fill="hold">
+                                        <p:cTn id="32" dur="1" fill="hold">
                                           <p:stCondLst>
                                             <p:cond delay="0"/>
                                           </p:stCondLst>
@@ -5304,7 +4784,7 @@
                                     </p:set>
                                     <p:anim calcmode="lin" valueType="num">
                                       <p:cBhvr additive="base">
-                                        <p:cTn id="29" dur="550" fill="hold"/>
+                                        <p:cTn id="33" dur="550" fill="hold"/>
                                         <p:tgtEl>
                                           <p:spTgt spid="7"/>
                                         </p:tgtEl>
@@ -5327,7 +4807,7 @@
                                     </p:anim>
                                     <p:anim calcmode="lin" valueType="num">
                                       <p:cBhvr additive="base">
-                                        <p:cTn id="30" dur="550" fill="hold"/>
+                                        <p:cTn id="34" dur="550" fill="hold"/>
                                         <p:tgtEl>
                                           <p:spTgt spid="7"/>
                                         </p:tgtEl>
@@ -5358,85 +4838,32 @@
                     </p:cTn>
                   </p:par>
                   <p:par>
-                    <p:cTn id="31" fill="hold">
+                    <p:cTn id="35" fill="hold">
                       <p:stCondLst>
                         <p:cond delay="indefinite"/>
                       </p:stCondLst>
                       <p:childTnLst>
                         <p:par>
-                          <p:cTn id="32" fill="hold">
+                          <p:cTn id="36" fill="hold">
                             <p:stCondLst>
                               <p:cond delay="0"/>
                             </p:stCondLst>
                             <p:childTnLst>
                               <p:par>
-                                <p:cTn id="33" presetID="10" presetClass="entr" presetSubtype="0" fill="hold" grpId="0" nodeType="clickEffect">
+                                <p:cTn id="37" presetID="53" presetClass="entr" presetSubtype="16" fill="hold" grpId="0" nodeType="clickEffect">
                                   <p:stCondLst>
                                     <p:cond delay="0"/>
                                   </p:stCondLst>
                                   <p:childTnLst>
                                     <p:set>
                                       <p:cBhvr>
-                                        <p:cTn id="34" dur="1" fill="hold">
+                                        <p:cTn id="38" dur="1" fill="hold">
                                           <p:stCondLst>
                                             <p:cond delay="0"/>
                                           </p:stCondLst>
                                         </p:cTn>
                                         <p:tgtEl>
                                           <p:spTgt spid="8"/>
-                                        </p:tgtEl>
-                                        <p:attrNameLst>
-                                          <p:attrName>style.visibility</p:attrName>
-                                        </p:attrNameLst>
-                                      </p:cBhvr>
-                                      <p:to>
-                                        <p:strVal val="visible"/>
-                                      </p:to>
-                                    </p:set>
-                                    <p:animEffect transition="in" filter="fade">
-                                      <p:cBhvr>
-                                        <p:cTn id="35" dur="450"/>
-                                        <p:tgtEl>
-                                          <p:spTgt spid="8"/>
-                                        </p:tgtEl>
-                                      </p:cBhvr>
-                                    </p:animEffect>
-                                  </p:childTnLst>
-                                </p:cTn>
-                              </p:par>
-                            </p:childTnLst>
-                          </p:cTn>
-                        </p:par>
-                      </p:childTnLst>
-                    </p:cTn>
-                  </p:par>
-                  <p:par>
-                    <p:cTn id="36" fill="hold">
-                      <p:stCondLst>
-                        <p:cond delay="indefinite"/>
-                      </p:stCondLst>
-                      <p:childTnLst>
-                        <p:par>
-                          <p:cTn id="37" fill="hold">
-                            <p:stCondLst>
-                              <p:cond delay="0"/>
-                            </p:stCondLst>
-                            <p:childTnLst>
-                              <p:par>
-                                <p:cTn id="38" presetID="53" presetClass="entr" presetSubtype="16" fill="hold" grpId="0" nodeType="clickEffect">
-                                  <p:stCondLst>
-                                    <p:cond delay="0"/>
-                                  </p:stCondLst>
-                                  <p:childTnLst>
-                                    <p:set>
-                                      <p:cBhvr>
-                                        <p:cTn id="39" dur="1" fill="hold">
-                                          <p:stCondLst>
-                                            <p:cond delay="0"/>
-                                          </p:stCondLst>
-                                        </p:cTn>
-                                        <p:tgtEl>
-                                          <p:spTgt spid="9"/>
                                         </p:tgtEl>
                                         <p:attrNameLst>
                                           <p:attrName>style.visibility</p:attrName>
@@ -5448,9 +4875,9 @@
                                     </p:set>
                                     <p:anim calcmode="lin" valueType="num">
                                       <p:cBhvr additive="base">
-                                        <p:cTn id="40" dur="420" fill="hold"/>
-                                        <p:tgtEl>
-                                          <p:spTgt spid="9"/>
+                                        <p:cTn id="39" dur="420" fill="hold"/>
+                                        <p:tgtEl>
+                                          <p:spTgt spid="8"/>
                                         </p:tgtEl>
                                         <p:attrNameLst>
                                           <p:attrName>ppt_w</p:attrName>
@@ -5471,9 +4898,9 @@
                                     </p:anim>
                                     <p:anim calcmode="lin" valueType="num">
                                       <p:cBhvr additive="base">
-                                        <p:cTn id="41" dur="420" fill="hold"/>
-                                        <p:tgtEl>
-                                          <p:spTgt spid="9"/>
+                                        <p:cTn id="40" dur="420" fill="hold"/>
+                                        <p:tgtEl>
+                                          <p:spTgt spid="8"/>
                                         </p:tgtEl>
                                         <p:attrNameLst>
                                           <p:attrName>ppt_h</p:attrName>
@@ -5494,9 +4921,9 @@
                                     </p:anim>
                                     <p:animEffect transition="in" filter="fade">
                                       <p:cBhvr>
-                                        <p:cTn id="42" dur="420"/>
-                                        <p:tgtEl>
-                                          <p:spTgt spid="9"/>
+                                        <p:cTn id="41" dur="420"/>
+                                        <p:tgtEl>
+                                          <p:spTgt spid="8"/>
                                         </p:tgtEl>
                                       </p:cBhvr>
                                     </p:animEffect>
@@ -5584,8 +5011,8 @@
         </p:blipFill>
         <p:spPr>
           <a:xfrm>
-            <a:off x="426709" y="2636454"/>
-            <a:ext cx="6842588" cy="1280127"/>
+            <a:off x="426709" y="1417284"/>
+            <a:ext cx="11338276" cy="1356326"/>
           </a:xfrm>
           <a:prstGeom prst="rect">
             <a:avLst/>
@@ -5594,7 +5021,7 @@
       </p:pic>
       <p:pic>
         <p:nvPicPr>
-          <p:cNvPr id="4" name="Picture 3" descr="c12_1_1.jpg"/>
+          <p:cNvPr id="4" name="Picture 3" descr="c12_2_0.jpg"/>
           <p:cNvPicPr>
             <a:picLocks noChangeAspect="1"/>
           </p:cNvPicPr>
@@ -5608,18 +5035,138 @@
         </p:blipFill>
         <p:spPr>
           <a:xfrm>
-            <a:off x="9418084" y="3550831"/>
-            <a:ext cx="1965910" cy="2423099"/>
+            <a:off x="3855623" y="1645878"/>
+            <a:ext cx="1127731" cy="822939"/>
           </a:xfrm>
           <a:prstGeom prst="rect">
             <a:avLst/>
           </a:prstGeom>
         </p:spPr>
       </p:pic>
+      <p:pic>
+        <p:nvPicPr>
+          <p:cNvPr id="5" name="Picture 4" descr="c12_3_0.jpg"/>
+          <p:cNvPicPr>
+            <a:picLocks noChangeAspect="1"/>
+          </p:cNvPicPr>
+          <p:nvPr/>
+        </p:nvPicPr>
+        <p:blipFill>
+          <a:blip r:embed="rId5"/>
+          <a:stretch>
+            <a:fillRect/>
+          </a:stretch>
+        </p:blipFill>
+        <p:spPr>
+          <a:xfrm>
+            <a:off x="426709" y="2712652"/>
+            <a:ext cx="11338276" cy="1356326"/>
+          </a:xfrm>
+          <a:prstGeom prst="rect">
+            <a:avLst/>
+          </a:prstGeom>
+        </p:spPr>
+      </p:pic>
+      <p:pic>
+        <p:nvPicPr>
+          <p:cNvPr id="6" name="Picture 5" descr="c12_4_0.jpg"/>
+          <p:cNvPicPr>
+            <a:picLocks noChangeAspect="1"/>
+          </p:cNvPicPr>
+          <p:nvPr/>
+        </p:nvPicPr>
+        <p:blipFill>
+          <a:blip r:embed="rId6"/>
+          <a:stretch>
+            <a:fillRect/>
+          </a:stretch>
+        </p:blipFill>
+        <p:spPr>
+          <a:xfrm>
+            <a:off x="3855623" y="2941246"/>
+            <a:ext cx="1127731" cy="822939"/>
+          </a:xfrm>
+          <a:prstGeom prst="rect">
+            <a:avLst/>
+          </a:prstGeom>
+        </p:spPr>
+      </p:pic>
+      <p:pic>
+        <p:nvPicPr>
+          <p:cNvPr id="7" name="Picture 6" descr="c12_5_0.jpg"/>
+          <p:cNvPicPr>
+            <a:picLocks noChangeAspect="1"/>
+          </p:cNvPicPr>
+          <p:nvPr/>
+        </p:nvPicPr>
+        <p:blipFill>
+          <a:blip r:embed="rId7"/>
+          <a:stretch>
+            <a:fillRect/>
+          </a:stretch>
+        </p:blipFill>
+        <p:spPr>
+          <a:xfrm>
+            <a:off x="426709" y="4008019"/>
+            <a:ext cx="11338276" cy="1356326"/>
+          </a:xfrm>
+          <a:prstGeom prst="rect">
+            <a:avLst/>
+          </a:prstGeom>
+        </p:spPr>
+      </p:pic>
+      <p:pic>
+        <p:nvPicPr>
+          <p:cNvPr id="8" name="Picture 7" descr="c12_6_0.jpg"/>
+          <p:cNvPicPr>
+            <a:picLocks noChangeAspect="1"/>
+          </p:cNvPicPr>
+          <p:nvPr/>
+        </p:nvPicPr>
+        <p:blipFill>
+          <a:blip r:embed="rId8"/>
+          <a:stretch>
+            <a:fillRect/>
+          </a:stretch>
+        </p:blipFill>
+        <p:spPr>
+          <a:xfrm>
+            <a:off x="6065368" y="4236614"/>
+            <a:ext cx="1508722" cy="822939"/>
+          </a:xfrm>
+          <a:prstGeom prst="rect">
+            <a:avLst/>
+          </a:prstGeom>
+        </p:spPr>
+      </p:pic>
+      <p:pic>
+        <p:nvPicPr>
+          <p:cNvPr id="9" name="Picture 8" descr="c12_7_0.jpg"/>
+          <p:cNvPicPr>
+            <a:picLocks noChangeAspect="1"/>
+          </p:cNvPicPr>
+          <p:nvPr/>
+        </p:nvPicPr>
+        <p:blipFill>
+          <a:blip r:embed="rId9"/>
+          <a:stretch>
+            <a:fillRect/>
+          </a:stretch>
+        </p:blipFill>
+        <p:spPr>
+          <a:xfrm>
+            <a:off x="7665528" y="45718"/>
+            <a:ext cx="4099457" cy="1661118"/>
+          </a:xfrm>
+          <a:prstGeom prst="rect">
+            <a:avLst/>
+          </a:prstGeom>
+        </p:spPr>
+      </p:pic>
       <p:sp>
         <p:nvSpPr>
-          <p:cNvPr id="5" name="TextBox 4">
-            <a:hlinkClick action="ppaction://hlinksldjump" r:id="rId5"/>
+          <p:cNvPr id="10" name="TextBox 9">
+            <a:hlinkClick action="ppaction://hlinksldjump" r:id="rId10"/>
           </p:cNvPr>
           <p:cNvSpPr txBox="1"/>
           <p:nvPr/>
@@ -5662,6 +5209,699 @@
   </p:clrMapOvr>
   <p:transition spd="med">
     <p:fade/>
+  </p:transition>
+  <p:timing>
+    <p:tnLst>
+      <p:par>
+        <p:cTn id="1" dur="indefinite" restart="never" nodeType="tmRoot">
+          <p:childTnLst>
+            <p:seq concurrent="1" nextAc="seek">
+              <p:cTn id="2" dur="indefinite" nodeType="mainSeq">
+                <p:childTnLst>
+                  <p:par>
+                    <p:cTn id="3" fill="hold">
+                      <p:stCondLst>
+                        <p:cond delay="indefinite"/>
+                      </p:stCondLst>
+                      <p:childTnLst>
+                        <p:par>
+                          <p:cTn id="4" fill="hold">
+                            <p:stCondLst>
+                              <p:cond delay="0"/>
+                            </p:stCondLst>
+                            <p:childTnLst>
+                              <p:par>
+                                <p:cTn id="5" presetID="2" presetClass="entr" presetSubtype="8" fill="hold" decel="100000" grpId="0" nodeType="clickEffect">
+                                  <p:stCondLst>
+                                    <p:cond delay="0"/>
+                                  </p:stCondLst>
+                                  <p:childTnLst>
+                                    <p:set>
+                                      <p:cBhvr>
+                                        <p:cTn id="6" dur="1" fill="hold">
+                                          <p:stCondLst>
+                                            <p:cond delay="0"/>
+                                          </p:stCondLst>
+                                        </p:cTn>
+                                        <p:tgtEl>
+                                          <p:spTgt spid="3"/>
+                                        </p:tgtEl>
+                                        <p:attrNameLst>
+                                          <p:attrName>style.visibility</p:attrName>
+                                        </p:attrNameLst>
+                                      </p:cBhvr>
+                                      <p:to>
+                                        <p:strVal val="visible"/>
+                                      </p:to>
+                                    </p:set>
+                                    <p:anim calcmode="lin" valueType="num">
+                                      <p:cBhvr additive="base">
+                                        <p:cTn id="7" dur="550" fill="hold"/>
+                                        <p:tgtEl>
+                                          <p:spTgt spid="3"/>
+                                        </p:tgtEl>
+                                        <p:attrNameLst>
+                                          <p:attrName>ppt_x</p:attrName>
+                                        </p:attrNameLst>
+                                      </p:cBhvr>
+                                      <p:tavLst>
+                                        <p:tav tm="0">
+                                          <p:val>
+                                            <p:strVal val="0-#ppt_w/2"/>
+                                          </p:val>
+                                        </p:tav>
+                                        <p:tav tm="100000">
+                                          <p:val>
+                                            <p:strVal val="#ppt_x"/>
+                                          </p:val>
+                                        </p:tav>
+                                      </p:tavLst>
+                                    </p:anim>
+                                    <p:anim calcmode="lin" valueType="num">
+                                      <p:cBhvr additive="base">
+                                        <p:cTn id="8" dur="550" fill="hold"/>
+                                        <p:tgtEl>
+                                          <p:spTgt spid="3"/>
+                                        </p:tgtEl>
+                                        <p:attrNameLst>
+                                          <p:attrName>ppt_y</p:attrName>
+                                        </p:attrNameLst>
+                                      </p:cBhvr>
+                                      <p:tavLst>
+                                        <p:tav tm="0">
+                                          <p:val>
+                                            <p:strVal val="#ppt_y"/>
+                                          </p:val>
+                                        </p:tav>
+                                        <p:tav tm="100000">
+                                          <p:val>
+                                            <p:strVal val="#ppt_y"/>
+                                          </p:val>
+                                        </p:tav>
+                                      </p:tavLst>
+                                    </p:anim>
+                                  </p:childTnLst>
+                                </p:cTn>
+                              </p:par>
+                            </p:childTnLst>
+                          </p:cTn>
+                        </p:par>
+                      </p:childTnLst>
+                    </p:cTn>
+                  </p:par>
+                  <p:par>
+                    <p:cTn id="9" fill="hold">
+                      <p:stCondLst>
+                        <p:cond delay="indefinite"/>
+                      </p:stCondLst>
+                      <p:childTnLst>
+                        <p:par>
+                          <p:cTn id="10" fill="hold">
+                            <p:stCondLst>
+                              <p:cond delay="0"/>
+                            </p:stCondLst>
+                            <p:childTnLst>
+                              <p:par>
+                                <p:cTn id="11" presetID="10" presetClass="entr" presetSubtype="0" fill="hold" grpId="0" nodeType="clickEffect">
+                                  <p:stCondLst>
+                                    <p:cond delay="0"/>
+                                  </p:stCondLst>
+                                  <p:childTnLst>
+                                    <p:set>
+                                      <p:cBhvr>
+                                        <p:cTn id="12" dur="1" fill="hold">
+                                          <p:stCondLst>
+                                            <p:cond delay="0"/>
+                                          </p:stCondLst>
+                                        </p:cTn>
+                                        <p:tgtEl>
+                                          <p:spTgt spid="4"/>
+                                        </p:tgtEl>
+                                        <p:attrNameLst>
+                                          <p:attrName>style.visibility</p:attrName>
+                                        </p:attrNameLst>
+                                      </p:cBhvr>
+                                      <p:to>
+                                        <p:strVal val="visible"/>
+                                      </p:to>
+                                    </p:set>
+                                    <p:animEffect transition="in" filter="fade">
+                                      <p:cBhvr>
+                                        <p:cTn id="13" dur="450"/>
+                                        <p:tgtEl>
+                                          <p:spTgt spid="4"/>
+                                        </p:tgtEl>
+                                      </p:cBhvr>
+                                    </p:animEffect>
+                                  </p:childTnLst>
+                                </p:cTn>
+                              </p:par>
+                            </p:childTnLst>
+                          </p:cTn>
+                        </p:par>
+                      </p:childTnLst>
+                    </p:cTn>
+                  </p:par>
+                  <p:par>
+                    <p:cTn id="14" fill="hold">
+                      <p:stCondLst>
+                        <p:cond delay="indefinite"/>
+                      </p:stCondLst>
+                      <p:childTnLst>
+                        <p:par>
+                          <p:cTn id="15" fill="hold">
+                            <p:stCondLst>
+                              <p:cond delay="0"/>
+                            </p:stCondLst>
+                            <p:childTnLst>
+                              <p:par>
+                                <p:cTn id="16" presetID="2" presetClass="entr" presetSubtype="8" fill="hold" decel="100000" grpId="0" nodeType="clickEffect">
+                                  <p:stCondLst>
+                                    <p:cond delay="0"/>
+                                  </p:stCondLst>
+                                  <p:childTnLst>
+                                    <p:set>
+                                      <p:cBhvr>
+                                        <p:cTn id="17" dur="1" fill="hold">
+                                          <p:stCondLst>
+                                            <p:cond delay="0"/>
+                                          </p:stCondLst>
+                                        </p:cTn>
+                                        <p:tgtEl>
+                                          <p:spTgt spid="5"/>
+                                        </p:tgtEl>
+                                        <p:attrNameLst>
+                                          <p:attrName>style.visibility</p:attrName>
+                                        </p:attrNameLst>
+                                      </p:cBhvr>
+                                      <p:to>
+                                        <p:strVal val="visible"/>
+                                      </p:to>
+                                    </p:set>
+                                    <p:anim calcmode="lin" valueType="num">
+                                      <p:cBhvr additive="base">
+                                        <p:cTn id="18" dur="550" fill="hold"/>
+                                        <p:tgtEl>
+                                          <p:spTgt spid="5"/>
+                                        </p:tgtEl>
+                                        <p:attrNameLst>
+                                          <p:attrName>ppt_x</p:attrName>
+                                        </p:attrNameLst>
+                                      </p:cBhvr>
+                                      <p:tavLst>
+                                        <p:tav tm="0">
+                                          <p:val>
+                                            <p:strVal val="0-#ppt_w/2"/>
+                                          </p:val>
+                                        </p:tav>
+                                        <p:tav tm="100000">
+                                          <p:val>
+                                            <p:strVal val="#ppt_x"/>
+                                          </p:val>
+                                        </p:tav>
+                                      </p:tavLst>
+                                    </p:anim>
+                                    <p:anim calcmode="lin" valueType="num">
+                                      <p:cBhvr additive="base">
+                                        <p:cTn id="19" dur="550" fill="hold"/>
+                                        <p:tgtEl>
+                                          <p:spTgt spid="5"/>
+                                        </p:tgtEl>
+                                        <p:attrNameLst>
+                                          <p:attrName>ppt_y</p:attrName>
+                                        </p:attrNameLst>
+                                      </p:cBhvr>
+                                      <p:tavLst>
+                                        <p:tav tm="0">
+                                          <p:val>
+                                            <p:strVal val="#ppt_y"/>
+                                          </p:val>
+                                        </p:tav>
+                                        <p:tav tm="100000">
+                                          <p:val>
+                                            <p:strVal val="#ppt_y"/>
+                                          </p:val>
+                                        </p:tav>
+                                      </p:tavLst>
+                                    </p:anim>
+                                  </p:childTnLst>
+                                </p:cTn>
+                              </p:par>
+                            </p:childTnLst>
+                          </p:cTn>
+                        </p:par>
+                      </p:childTnLst>
+                    </p:cTn>
+                  </p:par>
+                  <p:par>
+                    <p:cTn id="20" fill="hold">
+                      <p:stCondLst>
+                        <p:cond delay="indefinite"/>
+                      </p:stCondLst>
+                      <p:childTnLst>
+                        <p:par>
+                          <p:cTn id="21" fill="hold">
+                            <p:stCondLst>
+                              <p:cond delay="0"/>
+                            </p:stCondLst>
+                            <p:childTnLst>
+                              <p:par>
+                                <p:cTn id="22" presetID="10" presetClass="entr" presetSubtype="0" fill="hold" grpId="0" nodeType="clickEffect">
+                                  <p:stCondLst>
+                                    <p:cond delay="0"/>
+                                  </p:stCondLst>
+                                  <p:childTnLst>
+                                    <p:set>
+                                      <p:cBhvr>
+                                        <p:cTn id="23" dur="1" fill="hold">
+                                          <p:stCondLst>
+                                            <p:cond delay="0"/>
+                                          </p:stCondLst>
+                                        </p:cTn>
+                                        <p:tgtEl>
+                                          <p:spTgt spid="6"/>
+                                        </p:tgtEl>
+                                        <p:attrNameLst>
+                                          <p:attrName>style.visibility</p:attrName>
+                                        </p:attrNameLst>
+                                      </p:cBhvr>
+                                      <p:to>
+                                        <p:strVal val="visible"/>
+                                      </p:to>
+                                    </p:set>
+                                    <p:animEffect transition="in" filter="fade">
+                                      <p:cBhvr>
+                                        <p:cTn id="24" dur="450"/>
+                                        <p:tgtEl>
+                                          <p:spTgt spid="6"/>
+                                        </p:tgtEl>
+                                      </p:cBhvr>
+                                    </p:animEffect>
+                                  </p:childTnLst>
+                                </p:cTn>
+                              </p:par>
+                            </p:childTnLst>
+                          </p:cTn>
+                        </p:par>
+                      </p:childTnLst>
+                    </p:cTn>
+                  </p:par>
+                  <p:par>
+                    <p:cTn id="25" fill="hold">
+                      <p:stCondLst>
+                        <p:cond delay="indefinite"/>
+                      </p:stCondLst>
+                      <p:childTnLst>
+                        <p:par>
+                          <p:cTn id="26" fill="hold">
+                            <p:stCondLst>
+                              <p:cond delay="0"/>
+                            </p:stCondLst>
+                            <p:childTnLst>
+                              <p:par>
+                                <p:cTn id="27" presetID="2" presetClass="entr" presetSubtype="8" fill="hold" decel="100000" grpId="0" nodeType="clickEffect">
+                                  <p:stCondLst>
+                                    <p:cond delay="0"/>
+                                  </p:stCondLst>
+                                  <p:childTnLst>
+                                    <p:set>
+                                      <p:cBhvr>
+                                        <p:cTn id="28" dur="1" fill="hold">
+                                          <p:stCondLst>
+                                            <p:cond delay="0"/>
+                                          </p:stCondLst>
+                                        </p:cTn>
+                                        <p:tgtEl>
+                                          <p:spTgt spid="7"/>
+                                        </p:tgtEl>
+                                        <p:attrNameLst>
+                                          <p:attrName>style.visibility</p:attrName>
+                                        </p:attrNameLst>
+                                      </p:cBhvr>
+                                      <p:to>
+                                        <p:strVal val="visible"/>
+                                      </p:to>
+                                    </p:set>
+                                    <p:anim calcmode="lin" valueType="num">
+                                      <p:cBhvr additive="base">
+                                        <p:cTn id="29" dur="550" fill="hold"/>
+                                        <p:tgtEl>
+                                          <p:spTgt spid="7"/>
+                                        </p:tgtEl>
+                                        <p:attrNameLst>
+                                          <p:attrName>ppt_x</p:attrName>
+                                        </p:attrNameLst>
+                                      </p:cBhvr>
+                                      <p:tavLst>
+                                        <p:tav tm="0">
+                                          <p:val>
+                                            <p:strVal val="0-#ppt_w/2"/>
+                                          </p:val>
+                                        </p:tav>
+                                        <p:tav tm="100000">
+                                          <p:val>
+                                            <p:strVal val="#ppt_x"/>
+                                          </p:val>
+                                        </p:tav>
+                                      </p:tavLst>
+                                    </p:anim>
+                                    <p:anim calcmode="lin" valueType="num">
+                                      <p:cBhvr additive="base">
+                                        <p:cTn id="30" dur="550" fill="hold"/>
+                                        <p:tgtEl>
+                                          <p:spTgt spid="7"/>
+                                        </p:tgtEl>
+                                        <p:attrNameLst>
+                                          <p:attrName>ppt_y</p:attrName>
+                                        </p:attrNameLst>
+                                      </p:cBhvr>
+                                      <p:tavLst>
+                                        <p:tav tm="0">
+                                          <p:val>
+                                            <p:strVal val="#ppt_y"/>
+                                          </p:val>
+                                        </p:tav>
+                                        <p:tav tm="100000">
+                                          <p:val>
+                                            <p:strVal val="#ppt_y"/>
+                                          </p:val>
+                                        </p:tav>
+                                      </p:tavLst>
+                                    </p:anim>
+                                  </p:childTnLst>
+                                </p:cTn>
+                              </p:par>
+                            </p:childTnLst>
+                          </p:cTn>
+                        </p:par>
+                      </p:childTnLst>
+                    </p:cTn>
+                  </p:par>
+                  <p:par>
+                    <p:cTn id="31" fill="hold">
+                      <p:stCondLst>
+                        <p:cond delay="indefinite"/>
+                      </p:stCondLst>
+                      <p:childTnLst>
+                        <p:par>
+                          <p:cTn id="32" fill="hold">
+                            <p:stCondLst>
+                              <p:cond delay="0"/>
+                            </p:stCondLst>
+                            <p:childTnLst>
+                              <p:par>
+                                <p:cTn id="33" presetID="10" presetClass="entr" presetSubtype="0" fill="hold" grpId="0" nodeType="clickEffect">
+                                  <p:stCondLst>
+                                    <p:cond delay="0"/>
+                                  </p:stCondLst>
+                                  <p:childTnLst>
+                                    <p:set>
+                                      <p:cBhvr>
+                                        <p:cTn id="34" dur="1" fill="hold">
+                                          <p:stCondLst>
+                                            <p:cond delay="0"/>
+                                          </p:stCondLst>
+                                        </p:cTn>
+                                        <p:tgtEl>
+                                          <p:spTgt spid="8"/>
+                                        </p:tgtEl>
+                                        <p:attrNameLst>
+                                          <p:attrName>style.visibility</p:attrName>
+                                        </p:attrNameLst>
+                                      </p:cBhvr>
+                                      <p:to>
+                                        <p:strVal val="visible"/>
+                                      </p:to>
+                                    </p:set>
+                                    <p:animEffect transition="in" filter="fade">
+                                      <p:cBhvr>
+                                        <p:cTn id="35" dur="450"/>
+                                        <p:tgtEl>
+                                          <p:spTgt spid="8"/>
+                                        </p:tgtEl>
+                                      </p:cBhvr>
+                                    </p:animEffect>
+                                  </p:childTnLst>
+                                </p:cTn>
+                              </p:par>
+                            </p:childTnLst>
+                          </p:cTn>
+                        </p:par>
+                      </p:childTnLst>
+                    </p:cTn>
+                  </p:par>
+                  <p:par>
+                    <p:cTn id="36" fill="hold">
+                      <p:stCondLst>
+                        <p:cond delay="indefinite"/>
+                      </p:stCondLst>
+                      <p:childTnLst>
+                        <p:par>
+                          <p:cTn id="37" fill="hold">
+                            <p:stCondLst>
+                              <p:cond delay="0"/>
+                            </p:stCondLst>
+                            <p:childTnLst>
+                              <p:par>
+                                <p:cTn id="38" presetID="53" presetClass="entr" presetSubtype="16" fill="hold" grpId="0" nodeType="clickEffect">
+                                  <p:stCondLst>
+                                    <p:cond delay="0"/>
+                                  </p:stCondLst>
+                                  <p:childTnLst>
+                                    <p:set>
+                                      <p:cBhvr>
+                                        <p:cTn id="39" dur="1" fill="hold">
+                                          <p:stCondLst>
+                                            <p:cond delay="0"/>
+                                          </p:stCondLst>
+                                        </p:cTn>
+                                        <p:tgtEl>
+                                          <p:spTgt spid="9"/>
+                                        </p:tgtEl>
+                                        <p:attrNameLst>
+                                          <p:attrName>style.visibility</p:attrName>
+                                        </p:attrNameLst>
+                                      </p:cBhvr>
+                                      <p:to>
+                                        <p:strVal val="visible"/>
+                                      </p:to>
+                                    </p:set>
+                                    <p:anim calcmode="lin" valueType="num">
+                                      <p:cBhvr additive="base">
+                                        <p:cTn id="40" dur="420" fill="hold"/>
+                                        <p:tgtEl>
+                                          <p:spTgt spid="9"/>
+                                        </p:tgtEl>
+                                        <p:attrNameLst>
+                                          <p:attrName>ppt_w</p:attrName>
+                                        </p:attrNameLst>
+                                      </p:cBhvr>
+                                      <p:tavLst>
+                                        <p:tav tm="0">
+                                          <p:val>
+                                            <p:strVal val="0"/>
+                                          </p:val>
+                                        </p:tav>
+                                        <p:tav tm="100000">
+                                          <p:val>
+                                            <p:strVal val="#ppt_w"/>
+                                          </p:val>
+                                        </p:tav>
+                                      </p:tavLst>
+                                    </p:anim>
+                                    <p:anim calcmode="lin" valueType="num">
+                                      <p:cBhvr additive="base">
+                                        <p:cTn id="41" dur="420" fill="hold"/>
+                                        <p:tgtEl>
+                                          <p:spTgt spid="9"/>
+                                        </p:tgtEl>
+                                        <p:attrNameLst>
+                                          <p:attrName>ppt_h</p:attrName>
+                                        </p:attrNameLst>
+                                      </p:cBhvr>
+                                      <p:tavLst>
+                                        <p:tav tm="0">
+                                          <p:val>
+                                            <p:strVal val="0"/>
+                                          </p:val>
+                                        </p:tav>
+                                        <p:tav tm="100000">
+                                          <p:val>
+                                            <p:strVal val="#ppt_h"/>
+                                          </p:val>
+                                        </p:tav>
+                                      </p:tavLst>
+                                    </p:anim>
+                                    <p:animEffect transition="in" filter="fade">
+                                      <p:cBhvr>
+                                        <p:cTn id="42" dur="420"/>
+                                        <p:tgtEl>
+                                          <p:spTgt spid="9"/>
+                                        </p:tgtEl>
+                                      </p:cBhvr>
+                                    </p:animEffect>
+                                  </p:childTnLst>
+                                </p:cTn>
+                              </p:par>
+                            </p:childTnLst>
+                          </p:cTn>
+                        </p:par>
+                      </p:childTnLst>
+                    </p:cTn>
+                  </p:par>
+                </p:childTnLst>
+              </p:cTn>
+              <p:prevCondLst>
+                <p:cond evt="onPrev" delay="0">
+                  <p:tgtEl>
+                    <p:sldTgt/>
+                  </p:tgtEl>
+                </p:cond>
+              </p:prevCondLst>
+              <p:nextCondLst>
+                <p:cond evt="onNext" delay="0">
+                  <p:tgtEl>
+                    <p:sldTgt/>
+                  </p:tgtEl>
+                </p:cond>
+              </p:nextCondLst>
+            </p:seq>
+          </p:childTnLst>
+        </p:cTn>
+      </p:par>
+    </p:tnLst>
+  </p:timing>
+</p:sld>
+</file>
+
+<file path=ppt/slides/slide14.xml><?xml version="1.0" encoding="utf-8"?>
+<p:sld xmlns:a="http://schemas.openxmlformats.org/drawingml/2006/main" xmlns:p="http://schemas.openxmlformats.org/presentationml/2006/main" xmlns:r="http://schemas.openxmlformats.org/officeDocument/2006/relationships">
+  <p:cSld>
+    <p:spTree>
+      <p:nvGrpSpPr>
+        <p:cNvPr id="1" name=""/>
+        <p:cNvGrpSpPr/>
+        <p:nvPr/>
+      </p:nvGrpSpPr>
+      <p:grpSpPr/>
+      <p:pic>
+        <p:nvPicPr>
+          <p:cNvPr id="2" name="Picture 1" descr="b13.jpg"/>
+          <p:cNvPicPr>
+            <a:picLocks noChangeAspect="1"/>
+          </p:cNvPicPr>
+          <p:nvPr/>
+        </p:nvPicPr>
+        <p:blipFill>
+          <a:blip r:embed="rId2"/>
+          <a:stretch>
+            <a:fillRect/>
+          </a:stretch>
+        </p:blipFill>
+        <p:spPr>
+          <a:xfrm>
+            <a:off x="0" y="0"/>
+            <a:ext cx="12191695" cy="6857828"/>
+          </a:xfrm>
+          <a:prstGeom prst="rect">
+            <a:avLst/>
+          </a:prstGeom>
+        </p:spPr>
+      </p:pic>
+      <p:pic>
+        <p:nvPicPr>
+          <p:cNvPr id="3" name="Picture 2" descr="c13_1_0.jpg"/>
+          <p:cNvPicPr>
+            <a:picLocks noChangeAspect="1"/>
+          </p:cNvPicPr>
+          <p:nvPr/>
+        </p:nvPicPr>
+        <p:blipFill>
+          <a:blip r:embed="rId3"/>
+          <a:stretch>
+            <a:fillRect/>
+          </a:stretch>
+        </p:blipFill>
+        <p:spPr>
+          <a:xfrm>
+            <a:off x="426709" y="2636454"/>
+            <a:ext cx="6842588" cy="1203929"/>
+          </a:xfrm>
+          <a:prstGeom prst="rect">
+            <a:avLst/>
+          </a:prstGeom>
+        </p:spPr>
+      </p:pic>
+      <p:pic>
+        <p:nvPicPr>
+          <p:cNvPr id="4" name="Picture 3" descr="c13_1_1.jpg"/>
+          <p:cNvPicPr>
+            <a:picLocks noChangeAspect="1"/>
+          </p:cNvPicPr>
+          <p:nvPr/>
+        </p:nvPicPr>
+        <p:blipFill>
+          <a:blip r:embed="rId4"/>
+          <a:stretch>
+            <a:fillRect/>
+          </a:stretch>
+        </p:blipFill>
+        <p:spPr>
+          <a:xfrm>
+            <a:off x="9418084" y="3550831"/>
+            <a:ext cx="1965910" cy="2499297"/>
+          </a:xfrm>
+          <a:prstGeom prst="rect">
+            <a:avLst/>
+          </a:prstGeom>
+        </p:spPr>
+      </p:pic>
+      <p:sp>
+        <p:nvSpPr>
+          <p:cNvPr id="5" name="TextBox 4">
+            <a:hlinkClick action="ppaction://hlinksldjump" r:id="rId5"/>
+          </p:cNvPr>
+          <p:cNvSpPr txBox="1"/>
+          <p:nvPr/>
+        </p:nvSpPr>
+        <p:spPr>
+          <a:xfrm>
+            <a:off x="11048723" y="76198"/>
+            <a:ext cx="1066773" cy="304792"/>
+          </a:xfrm>
+          <a:prstGeom prst="rect">
+            <a:avLst/>
+          </a:prstGeom>
+          <a:noFill/>
+        </p:spPr>
+        <p:txBody>
+          <a:bodyPr wrap="none">
+            <a:spAutoFit/>
+          </a:bodyPr>
+          <a:lstStyle/>
+          <a:p>
+            <a:pPr algn="r"/>
+            <a:r>
+              <a:rPr sz="1200" b="0">
+                <a:solidFill>
+                  <a:srgbClr val="8A8F96"/>
+                </a:solidFill>
+                <a:latin typeface="微軟正黑體"/>
+                <a:ea typeface="微軟正黑體"/>
+                <a:cs typeface="微軟正黑體"/>
+              </a:rPr>
+              <a:t>流程 ↩</a:t>
+            </a:r>
+          </a:p>
+        </p:txBody>
+      </p:sp>
+    </p:spTree>
+  </p:cSld>
+  <p:clrMapOvr>
+    <a:masterClrMapping/>
+  </p:clrMapOvr>
+  <p:transition spd="med">
+    <p:push dir="l"/>
   </p:transition>
   <p:timing>
     <p:tnLst>
@@ -6061,7 +6301,7 @@
       <p:sp>
         <p:nvSpPr>
           <p:cNvPr id="8" name="Rectangle 7">
-            <a:hlinkClick r:id="rId8"/>
+            <a:hlinkClick action="ppaction://hlinksldjump" r:id="rId8"/>
           </p:cNvPr>
           <p:cNvSpPr/>
           <p:nvPr/>
@@ -6109,7 +6349,7 @@
       <p:sp>
         <p:nvSpPr>
           <p:cNvPr id="9" name="Rectangle 8">
-            <a:hlinkClick action="ppaction://hlinksldjump" r:id="rId9"/>
+            <a:hlinkClick r:id="rId9"/>
           </p:cNvPr>
           <p:cNvSpPr/>
           <p:nvPr/>
@@ -6157,7 +6397,7 @@
       <p:sp>
         <p:nvSpPr>
           <p:cNvPr id="10" name="Rectangle 9">
-            <a:hlinkClick r:id="rId10"/>
+            <a:hlinkClick action="ppaction://hlinksldjump" r:id="rId10"/>
           </p:cNvPr>
           <p:cNvSpPr/>
           <p:nvPr/>
@@ -6213,6 +6453,54 @@
         <p:spPr>
           <a:xfrm>
             <a:off x="655303" y="6286342"/>
+            <a:ext cx="10881087" cy="533386"/>
+          </a:xfrm>
+          <a:prstGeom prst="rect">
+            <a:avLst/>
+          </a:prstGeom>
+          <a:solidFill>
+            <a:srgbClr val="FFFFFF">
+              <a:alpha val="0"/>
+            </a:srgbClr>
+          </a:solidFill>
+          <a:ln>
+            <a:noFill/>
+          </a:ln>
+          <a:effectLst/>
+        </p:spPr>
+        <p:style>
+          <a:lnRef idx="1">
+            <a:schemeClr val="accent1"/>
+          </a:lnRef>
+          <a:fillRef idx="3">
+            <a:schemeClr val="accent1"/>
+          </a:fillRef>
+          <a:effectRef idx="2">
+            <a:schemeClr val="accent1"/>
+          </a:effectRef>
+          <a:fontRef idx="minor">
+            <a:schemeClr val="lt1"/>
+          </a:fontRef>
+        </p:style>
+        <p:txBody>
+          <a:bodyPr rtlCol="0" anchor="ctr"/>
+          <a:lstStyle/>
+          <a:p>
+            <a:pPr algn="ctr"/>
+          </a:p>
+        </p:txBody>
+      </p:sp>
+      <p:sp>
+        <p:nvSpPr>
+          <p:cNvPr id="12" name="Rectangle 11">
+            <a:hlinkClick r:id="rId12"/>
+          </p:cNvPr>
+          <p:cNvSpPr/>
+          <p:nvPr/>
+        </p:nvSpPr>
+        <p:spPr>
+          <a:xfrm>
+            <a:off x="655303" y="6895927"/>
             <a:ext cx="10881087" cy="533386"/>
           </a:xfrm>
           <a:prstGeom prst="rect">
@@ -7139,8 +7427,8 @@
         </p:blipFill>
         <p:spPr>
           <a:xfrm>
-            <a:off x="426709" y="2103067"/>
-            <a:ext cx="5699617" cy="2804089"/>
+            <a:off x="502907" y="1417284"/>
+            <a:ext cx="5623419" cy="822939"/>
           </a:xfrm>
           <a:prstGeom prst="rect">
             <a:avLst/>
@@ -7163,8 +7451,8 @@
         </p:blipFill>
         <p:spPr>
           <a:xfrm>
-            <a:off x="350511" y="1722076"/>
-            <a:ext cx="11566870" cy="4099457"/>
+            <a:off x="426709" y="2026869"/>
+            <a:ext cx="4404249" cy="822939"/>
           </a:xfrm>
           <a:prstGeom prst="rect">
             <a:avLst/>
@@ -7187,18 +7475,42 @@
         </p:blipFill>
         <p:spPr>
           <a:xfrm>
-            <a:off x="0" y="5836773"/>
-            <a:ext cx="12191695" cy="1021054"/>
+            <a:off x="426709" y="2636454"/>
+            <a:ext cx="5013834" cy="822939"/>
           </a:xfrm>
           <a:prstGeom prst="rect">
             <a:avLst/>
           </a:prstGeom>
         </p:spPr>
       </p:pic>
+      <p:pic>
+        <p:nvPicPr>
+          <p:cNvPr id="6" name="Picture 5" descr="c3_4_0.jpg"/>
+          <p:cNvPicPr>
+            <a:picLocks noChangeAspect="1"/>
+          </p:cNvPicPr>
+          <p:nvPr/>
+        </p:nvPicPr>
+        <p:blipFill>
+          <a:blip r:embed="rId6"/>
+          <a:stretch>
+            <a:fillRect/>
+          </a:stretch>
+        </p:blipFill>
+        <p:spPr>
+          <a:xfrm>
+            <a:off x="0" y="5836773"/>
+            <a:ext cx="12191695" cy="1021054"/>
+          </a:xfrm>
+          <a:prstGeom prst="rect">
+            <a:avLst/>
+          </a:prstGeom>
+        </p:spPr>
+      </p:pic>
       <p:sp>
         <p:nvSpPr>
-          <p:cNvPr id="6" name="TextBox 5">
-            <a:hlinkClick action="ppaction://hlinksldjump" r:id="rId6"/>
+          <p:cNvPr id="7" name="TextBox 6">
+            <a:hlinkClick action="ppaction://hlinksldjump" r:id="rId7"/>
           </p:cNvPr>
           <p:cNvSpPr txBox="1"/>
           <p:nvPr/>
@@ -7263,7 +7575,7 @@
                             </p:stCondLst>
                             <p:childTnLst>
                               <p:par>
-                                <p:cTn id="5" presetID="2" presetClass="entr" presetSubtype="4" fill="hold" decel="100000" grpId="0" nodeType="clickEffect">
+                                <p:cTn id="5" presetID="10" presetClass="entr" presetSubtype="0" fill="hold" grpId="0" nodeType="clickEffect">
                                   <p:stCondLst>
                                     <p:cond delay="0"/>
                                   </p:stCondLst>
@@ -7286,102 +7598,11 @@
                                         <p:strVal val="visible"/>
                                       </p:to>
                                     </p:set>
-                                    <p:anim calcmode="lin" valueType="num">
-                                      <p:cBhvr additive="base">
-                                        <p:cTn id="7" dur="550" fill="hold"/>
-                                        <p:tgtEl>
-                                          <p:spTgt spid="3"/>
-                                        </p:tgtEl>
-                                        <p:attrNameLst>
-                                          <p:attrName>ppt_x</p:attrName>
-                                        </p:attrNameLst>
-                                      </p:cBhvr>
-                                      <p:tavLst>
-                                        <p:tav tm="0">
-                                          <p:val>
-                                            <p:strVal val="#ppt_x"/>
-                                          </p:val>
-                                        </p:tav>
-                                        <p:tav tm="100000">
-                                          <p:val>
-                                            <p:strVal val="#ppt_x"/>
-                                          </p:val>
-                                        </p:tav>
-                                      </p:tavLst>
-                                    </p:anim>
-                                    <p:anim calcmode="lin" valueType="num">
-                                      <p:cBhvr additive="base">
-                                        <p:cTn id="8" dur="550" fill="hold"/>
-                                        <p:tgtEl>
-                                          <p:spTgt spid="3"/>
-                                        </p:tgtEl>
-                                        <p:attrNameLst>
-                                          <p:attrName>ppt_y</p:attrName>
-                                        </p:attrNameLst>
-                                      </p:cBhvr>
-                                      <p:tavLst>
-                                        <p:tav tm="0">
-                                          <p:val>
-                                            <p:strVal val="1+#ppt_h/2"/>
-                                          </p:val>
-                                        </p:tav>
-                                        <p:tav tm="100000">
-                                          <p:val>
-                                            <p:strVal val="#ppt_y"/>
-                                          </p:val>
-                                        </p:tav>
-                                      </p:tavLst>
-                                    </p:anim>
-                                  </p:childTnLst>
-                                </p:cTn>
-                              </p:par>
-                            </p:childTnLst>
-                          </p:cTn>
-                        </p:par>
-                      </p:childTnLst>
-                    </p:cTn>
-                  </p:par>
-                  <p:par>
-                    <p:cTn id="9" fill="hold">
-                      <p:stCondLst>
-                        <p:cond delay="indefinite"/>
-                      </p:stCondLst>
-                      <p:childTnLst>
-                        <p:par>
-                          <p:cTn id="10" fill="hold">
-                            <p:stCondLst>
-                              <p:cond delay="0"/>
-                            </p:stCondLst>
-                            <p:childTnLst>
-                              <p:par>
-                                <p:cTn id="11" presetID="10" presetClass="entr" presetSubtype="0" fill="hold" grpId="0" nodeType="clickEffect">
-                                  <p:stCondLst>
-                                    <p:cond delay="0"/>
-                                  </p:stCondLst>
-                                  <p:childTnLst>
-                                    <p:set>
-                                      <p:cBhvr>
-                                        <p:cTn id="12" dur="1" fill="hold">
-                                          <p:stCondLst>
-                                            <p:cond delay="0"/>
-                                          </p:stCondLst>
-                                        </p:cTn>
-                                        <p:tgtEl>
-                                          <p:spTgt spid="4"/>
-                                        </p:tgtEl>
-                                        <p:attrNameLst>
-                                          <p:attrName>style.visibility</p:attrName>
-                                        </p:attrNameLst>
-                                      </p:cBhvr>
-                                      <p:to>
-                                        <p:strVal val="visible"/>
-                                      </p:to>
-                                    </p:set>
                                     <p:animEffect transition="in" filter="fade">
                                       <p:cBhvr>
-                                        <p:cTn id="13" dur="500"/>
-                                        <p:tgtEl>
-                                          <p:spTgt spid="4"/>
+                                        <p:cTn id="7" dur="450"/>
+                                        <p:tgtEl>
+                                          <p:spTgt spid="3"/>
                                         </p:tgtEl>
                                       </p:cBhvr>
                                     </p:animEffect>
@@ -7395,32 +7616,32 @@
                     </p:cTn>
                   </p:par>
                   <p:par>
-                    <p:cTn id="14" fill="hold">
+                    <p:cTn id="8" fill="hold">
                       <p:stCondLst>
                         <p:cond delay="indefinite"/>
                       </p:stCondLst>
                       <p:childTnLst>
                         <p:par>
-                          <p:cTn id="15" fill="hold">
+                          <p:cTn id="9" fill="hold">
                             <p:stCondLst>
                               <p:cond delay="0"/>
                             </p:stCondLst>
                             <p:childTnLst>
                               <p:par>
-                                <p:cTn id="16" presetID="2" presetClass="entr" presetSubtype="4" fill="hold" decel="100000" grpId="0" nodeType="clickEffect">
+                                <p:cTn id="10" presetID="10" presetClass="entr" presetSubtype="0" fill="hold" grpId="0" nodeType="clickEffect">
                                   <p:stCondLst>
                                     <p:cond delay="0"/>
                                   </p:stCondLst>
                                   <p:childTnLst>
                                     <p:set>
                                       <p:cBhvr>
-                                        <p:cTn id="17" dur="1" fill="hold">
+                                        <p:cTn id="11" dur="1" fill="hold">
                                           <p:stCondLst>
                                             <p:cond delay="0"/>
                                           </p:stCondLst>
                                         </p:cTn>
                                         <p:tgtEl>
-                                          <p:spTgt spid="5"/>
+                                          <p:spTgt spid="4"/>
                                         </p:tgtEl>
                                         <p:attrNameLst>
                                           <p:attrName>style.visibility</p:attrName>
@@ -7430,52 +7651,120 @@
                                         <p:strVal val="visible"/>
                                       </p:to>
                                     </p:set>
-                                    <p:anim calcmode="lin" valueType="num">
-                                      <p:cBhvr additive="base">
-                                        <p:cTn id="18" dur="550" fill="hold"/>
+                                    <p:animEffect transition="in" filter="fade">
+                                      <p:cBhvr>
+                                        <p:cTn id="12" dur="450"/>
+                                        <p:tgtEl>
+                                          <p:spTgt spid="4"/>
+                                        </p:tgtEl>
+                                      </p:cBhvr>
+                                    </p:animEffect>
+                                  </p:childTnLst>
+                                </p:cTn>
+                              </p:par>
+                            </p:childTnLst>
+                          </p:cTn>
+                        </p:par>
+                      </p:childTnLst>
+                    </p:cTn>
+                  </p:par>
+                  <p:par>
+                    <p:cTn id="13" fill="hold">
+                      <p:stCondLst>
+                        <p:cond delay="indefinite"/>
+                      </p:stCondLst>
+                      <p:childTnLst>
+                        <p:par>
+                          <p:cTn id="14" fill="hold">
+                            <p:stCondLst>
+                              <p:cond delay="0"/>
+                            </p:stCondLst>
+                            <p:childTnLst>
+                              <p:par>
+                                <p:cTn id="15" presetID="10" presetClass="entr" presetSubtype="0" fill="hold" grpId="0" nodeType="clickEffect">
+                                  <p:stCondLst>
+                                    <p:cond delay="0"/>
+                                  </p:stCondLst>
+                                  <p:childTnLst>
+                                    <p:set>
+                                      <p:cBhvr>
+                                        <p:cTn id="16" dur="1" fill="hold">
+                                          <p:stCondLst>
+                                            <p:cond delay="0"/>
+                                          </p:stCondLst>
+                                        </p:cTn>
                                         <p:tgtEl>
                                           <p:spTgt spid="5"/>
                                         </p:tgtEl>
                                         <p:attrNameLst>
-                                          <p:attrName>ppt_x</p:attrName>
-                                        </p:attrNameLst>
-                                      </p:cBhvr>
-                                      <p:tavLst>
-                                        <p:tav tm="0">
-                                          <p:val>
-                                            <p:strVal val="#ppt_x"/>
-                                          </p:val>
-                                        </p:tav>
-                                        <p:tav tm="100000">
-                                          <p:val>
-                                            <p:strVal val="#ppt_x"/>
-                                          </p:val>
-                                        </p:tav>
-                                      </p:tavLst>
-                                    </p:anim>
-                                    <p:anim calcmode="lin" valueType="num">
-                                      <p:cBhvr additive="base">
-                                        <p:cTn id="19" dur="550" fill="hold"/>
+                                          <p:attrName>style.visibility</p:attrName>
+                                        </p:attrNameLst>
+                                      </p:cBhvr>
+                                      <p:to>
+                                        <p:strVal val="visible"/>
+                                      </p:to>
+                                    </p:set>
+                                    <p:animEffect transition="in" filter="fade">
+                                      <p:cBhvr>
+                                        <p:cTn id="17" dur="450"/>
                                         <p:tgtEl>
                                           <p:spTgt spid="5"/>
                                         </p:tgtEl>
-                                        <p:attrNameLst>
-                                          <p:attrName>ppt_y</p:attrName>
-                                        </p:attrNameLst>
-                                      </p:cBhvr>
-                                      <p:tavLst>
-                                        <p:tav tm="0">
-                                          <p:val>
-                                            <p:strVal val="1+#ppt_h/2"/>
-                                          </p:val>
-                                        </p:tav>
-                                        <p:tav tm="100000">
-                                          <p:val>
-                                            <p:strVal val="#ppt_y"/>
-                                          </p:val>
-                                        </p:tav>
-                                      </p:tavLst>
-                                    </p:anim>
+                                      </p:cBhvr>
+                                    </p:animEffect>
+                                  </p:childTnLst>
+                                </p:cTn>
+                              </p:par>
+                            </p:childTnLst>
+                          </p:cTn>
+                        </p:par>
+                      </p:childTnLst>
+                    </p:cTn>
+                  </p:par>
+                  <p:par>
+                    <p:cTn id="18" fill="hold">
+                      <p:stCondLst>
+                        <p:cond delay="indefinite"/>
+                      </p:stCondLst>
+                      <p:childTnLst>
+                        <p:par>
+                          <p:cTn id="19" fill="hold">
+                            <p:stCondLst>
+                              <p:cond delay="0"/>
+                            </p:stCondLst>
+                            <p:childTnLst>
+                              <p:par>
+                                <p:cTn id="20" presetID="10" presetClass="entr" presetSubtype="0" fill="hold" grpId="0" nodeType="clickEffect">
+                                  <p:stCondLst>
+                                    <p:cond delay="0"/>
+                                  </p:stCondLst>
+                                  <p:childTnLst>
+                                    <p:set>
+                                      <p:cBhvr>
+                                        <p:cTn id="21" dur="1" fill="hold">
+                                          <p:stCondLst>
+                                            <p:cond delay="0"/>
+                                          </p:stCondLst>
+                                        </p:cTn>
+                                        <p:tgtEl>
+                                          <p:spTgt spid="6"/>
+                                        </p:tgtEl>
+                                        <p:attrNameLst>
+                                          <p:attrName>style.visibility</p:attrName>
+                                        </p:attrNameLst>
+                                      </p:cBhvr>
+                                      <p:to>
+                                        <p:strVal val="visible"/>
+                                      </p:to>
+                                    </p:set>
+                                    <p:animEffect transition="in" filter="fade">
+                                      <p:cBhvr>
+                                        <p:cTn id="22" dur="450"/>
+                                        <p:tgtEl>
+                                          <p:spTgt spid="6"/>
+                                        </p:tgtEl>
+                                      </p:cBhvr>
+                                    </p:animEffect>
                                   </p:childTnLst>
                                 </p:cTn>
                               </p:par>
@@ -7546,7 +7835,7 @@
       </p:pic>
       <p:pic>
         <p:nvPicPr>
-          <p:cNvPr id="3" name="Picture 2" descr="c3_1_0.jpg"/>
+          <p:cNvPr id="3" name="Picture 2" descr="c4_1_0.jpg"/>
           <p:cNvPicPr>
             <a:picLocks noChangeAspect="1"/>
           </p:cNvPicPr>
@@ -7584,8 +7873,8 @@
         </p:blipFill>
         <p:spPr>
           <a:xfrm>
-            <a:off x="426709" y="1722076"/>
-            <a:ext cx="11490672" cy="4099457"/>
+            <a:off x="350511" y="1722076"/>
+            <a:ext cx="11566870" cy="4099457"/>
           </a:xfrm>
           <a:prstGeom prst="rect">
             <a:avLst/>
@@ -7967,7 +8256,7 @@
       </p:pic>
       <p:pic>
         <p:nvPicPr>
-          <p:cNvPr id="3" name="Picture 2" descr="c5_1_0.jpg"/>
+          <p:cNvPr id="3" name="Picture 2" descr="c4_1_0.jpg"/>
           <p:cNvPicPr>
             <a:picLocks noChangeAspect="1"/>
           </p:cNvPicPr>
@@ -7981,8 +8270,8 @@
         </p:blipFill>
         <p:spPr>
           <a:xfrm>
-            <a:off x="350511" y="1112492"/>
-            <a:ext cx="4099457" cy="4480447"/>
+            <a:off x="426709" y="2103067"/>
+            <a:ext cx="5699617" cy="2804089"/>
           </a:xfrm>
           <a:prstGeom prst="rect">
             <a:avLst/>
@@ -8005,8 +8294,8 @@
         </p:blipFill>
         <p:spPr>
           <a:xfrm>
-            <a:off x="4084217" y="1188690"/>
-            <a:ext cx="4023259" cy="4404249"/>
+            <a:off x="426709" y="1722076"/>
+            <a:ext cx="11490672" cy="4099457"/>
           </a:xfrm>
           <a:prstGeom prst="rect">
             <a:avLst/>
@@ -8029,42 +8318,18 @@
         </p:blipFill>
         <p:spPr>
           <a:xfrm>
-            <a:off x="7817924" y="1188690"/>
-            <a:ext cx="4023259" cy="4328051"/>
+            <a:off x="0" y="5836773"/>
+            <a:ext cx="12191695" cy="1021054"/>
           </a:xfrm>
           <a:prstGeom prst="rect">
             <a:avLst/>
           </a:prstGeom>
         </p:spPr>
       </p:pic>
-      <p:pic>
-        <p:nvPicPr>
-          <p:cNvPr id="6" name="Picture 5" descr="c5_4_0.jpg"/>
-          <p:cNvPicPr>
-            <a:picLocks noChangeAspect="1"/>
-          </p:cNvPicPr>
-          <p:nvPr/>
-        </p:nvPicPr>
-        <p:blipFill>
-          <a:blip r:embed="rId6"/>
-          <a:stretch>
-            <a:fillRect/>
-          </a:stretch>
-        </p:blipFill>
-        <p:spPr>
-          <a:xfrm>
-            <a:off x="0" y="5836773"/>
-            <a:ext cx="12191695" cy="1021054"/>
-          </a:xfrm>
-          <a:prstGeom prst="rect">
-            <a:avLst/>
-          </a:prstGeom>
-        </p:spPr>
-      </p:pic>
       <p:sp>
         <p:nvSpPr>
-          <p:cNvPr id="7" name="TextBox 6">
-            <a:hlinkClick action="ppaction://hlinksldjump" r:id="rId7"/>
+          <p:cNvPr id="6" name="TextBox 5">
+            <a:hlinkClick action="ppaction://hlinksldjump" r:id="rId6"/>
           </p:cNvPr>
           <p:cNvSpPr txBox="1"/>
           <p:nvPr/>
@@ -8129,7 +8394,7 @@
                             </p:stCondLst>
                             <p:childTnLst>
                               <p:par>
-                                <p:cTn id="5" presetID="10" presetClass="entr" presetSubtype="0" fill="hold" grpId="0" nodeType="clickEffect">
+                                <p:cTn id="5" presetID="2" presetClass="entr" presetSubtype="4" fill="hold" decel="100000" grpId="0" nodeType="clickEffect">
                                   <p:stCondLst>
                                     <p:cond delay="0"/>
                                   </p:stCondLst>
@@ -8152,14 +8417,52 @@
                                         <p:strVal val="visible"/>
                                       </p:to>
                                     </p:set>
-                                    <p:animEffect transition="in" filter="fade">
-                                      <p:cBhvr>
-                                        <p:cTn id="7" dur="450"/>
+                                    <p:anim calcmode="lin" valueType="num">
+                                      <p:cBhvr additive="base">
+                                        <p:cTn id="7" dur="550" fill="hold"/>
                                         <p:tgtEl>
                                           <p:spTgt spid="3"/>
                                         </p:tgtEl>
-                                      </p:cBhvr>
-                                    </p:animEffect>
+                                        <p:attrNameLst>
+                                          <p:attrName>ppt_x</p:attrName>
+                                        </p:attrNameLst>
+                                      </p:cBhvr>
+                                      <p:tavLst>
+                                        <p:tav tm="0">
+                                          <p:val>
+                                            <p:strVal val="#ppt_x"/>
+                                          </p:val>
+                                        </p:tav>
+                                        <p:tav tm="100000">
+                                          <p:val>
+                                            <p:strVal val="#ppt_x"/>
+                                          </p:val>
+                                        </p:tav>
+                                      </p:tavLst>
+                                    </p:anim>
+                                    <p:anim calcmode="lin" valueType="num">
+                                      <p:cBhvr additive="base">
+                                        <p:cTn id="8" dur="550" fill="hold"/>
+                                        <p:tgtEl>
+                                          <p:spTgt spid="3"/>
+                                        </p:tgtEl>
+                                        <p:attrNameLst>
+                                          <p:attrName>ppt_y</p:attrName>
+                                        </p:attrNameLst>
+                                      </p:cBhvr>
+                                      <p:tavLst>
+                                        <p:tav tm="0">
+                                          <p:val>
+                                            <p:strVal val="1+#ppt_h/2"/>
+                                          </p:val>
+                                        </p:tav>
+                                        <p:tav tm="100000">
+                                          <p:val>
+                                            <p:strVal val="#ppt_y"/>
+                                          </p:val>
+                                        </p:tav>
+                                      </p:tavLst>
+                                    </p:anim>
                                   </p:childTnLst>
                                 </p:cTn>
                               </p:par>
@@ -8170,26 +8473,26 @@
                     </p:cTn>
                   </p:par>
                   <p:par>
-                    <p:cTn id="8" fill="hold">
+                    <p:cTn id="9" fill="hold">
                       <p:stCondLst>
                         <p:cond delay="indefinite"/>
                       </p:stCondLst>
                       <p:childTnLst>
                         <p:par>
-                          <p:cTn id="9" fill="hold">
+                          <p:cTn id="10" fill="hold">
                             <p:stCondLst>
                               <p:cond delay="0"/>
                             </p:stCondLst>
                             <p:childTnLst>
                               <p:par>
-                                <p:cTn id="10" presetID="2" presetClass="entr" presetSubtype="4" fill="hold" decel="100000" grpId="0" nodeType="clickEffect">
+                                <p:cTn id="11" presetID="10" presetClass="entr" presetSubtype="0" fill="hold" grpId="0" nodeType="clickEffect">
                                   <p:stCondLst>
                                     <p:cond delay="0"/>
                                   </p:stCondLst>
                                   <p:childTnLst>
                                     <p:set>
                                       <p:cBhvr>
-                                        <p:cTn id="11" dur="1" fill="hold">
+                                        <p:cTn id="12" dur="1" fill="hold">
                                           <p:stCondLst>
                                             <p:cond delay="0"/>
                                           </p:stCondLst>
@@ -8205,52 +8508,14 @@
                                         <p:strVal val="visible"/>
                                       </p:to>
                                     </p:set>
-                                    <p:anim calcmode="lin" valueType="num">
-                                      <p:cBhvr additive="base">
-                                        <p:cTn id="12" dur="550" fill="hold"/>
+                                    <p:animEffect transition="in" filter="fade">
+                                      <p:cBhvr>
+                                        <p:cTn id="13" dur="500"/>
                                         <p:tgtEl>
                                           <p:spTgt spid="4"/>
                                         </p:tgtEl>
-                                        <p:attrNameLst>
-                                          <p:attrName>ppt_x</p:attrName>
-                                        </p:attrNameLst>
-                                      </p:cBhvr>
-                                      <p:tavLst>
-                                        <p:tav tm="0">
-                                          <p:val>
-                                            <p:strVal val="#ppt_x"/>
-                                          </p:val>
-                                        </p:tav>
-                                        <p:tav tm="100000">
-                                          <p:val>
-                                            <p:strVal val="#ppt_x"/>
-                                          </p:val>
-                                        </p:tav>
-                                      </p:tavLst>
-                                    </p:anim>
-                                    <p:anim calcmode="lin" valueType="num">
-                                      <p:cBhvr additive="base">
-                                        <p:cTn id="13" dur="550" fill="hold"/>
-                                        <p:tgtEl>
-                                          <p:spTgt spid="4"/>
-                                        </p:tgtEl>
-                                        <p:attrNameLst>
-                                          <p:attrName>ppt_y</p:attrName>
-                                        </p:attrNameLst>
-                                      </p:cBhvr>
-                                      <p:tavLst>
-                                        <p:tav tm="0">
-                                          <p:val>
-                                            <p:strVal val="1+#ppt_h/2"/>
-                                          </p:val>
-                                        </p:tav>
-                                        <p:tav tm="100000">
-                                          <p:val>
-                                            <p:strVal val="#ppt_y"/>
-                                          </p:val>
-                                        </p:tav>
-                                      </p:tavLst>
-                                    </p:anim>
+                                      </p:cBhvr>
+                                    </p:animEffect>
                                   </p:childTnLst>
                                 </p:cTn>
                               </p:par>
@@ -8324,97 +8589,6 @@
                                         <p:cTn id="19" dur="550" fill="hold"/>
                                         <p:tgtEl>
                                           <p:spTgt spid="5"/>
-                                        </p:tgtEl>
-                                        <p:attrNameLst>
-                                          <p:attrName>ppt_y</p:attrName>
-                                        </p:attrNameLst>
-                                      </p:cBhvr>
-                                      <p:tavLst>
-                                        <p:tav tm="0">
-                                          <p:val>
-                                            <p:strVal val="1+#ppt_h/2"/>
-                                          </p:val>
-                                        </p:tav>
-                                        <p:tav tm="100000">
-                                          <p:val>
-                                            <p:strVal val="#ppt_y"/>
-                                          </p:val>
-                                        </p:tav>
-                                      </p:tavLst>
-                                    </p:anim>
-                                  </p:childTnLst>
-                                </p:cTn>
-                              </p:par>
-                            </p:childTnLst>
-                          </p:cTn>
-                        </p:par>
-                      </p:childTnLst>
-                    </p:cTn>
-                  </p:par>
-                  <p:par>
-                    <p:cTn id="20" fill="hold">
-                      <p:stCondLst>
-                        <p:cond delay="indefinite"/>
-                      </p:stCondLst>
-                      <p:childTnLst>
-                        <p:par>
-                          <p:cTn id="21" fill="hold">
-                            <p:stCondLst>
-                              <p:cond delay="0"/>
-                            </p:stCondLst>
-                            <p:childTnLst>
-                              <p:par>
-                                <p:cTn id="22" presetID="2" presetClass="entr" presetSubtype="4" fill="hold" decel="100000" grpId="0" nodeType="clickEffect">
-                                  <p:stCondLst>
-                                    <p:cond delay="0"/>
-                                  </p:stCondLst>
-                                  <p:childTnLst>
-                                    <p:set>
-                                      <p:cBhvr>
-                                        <p:cTn id="23" dur="1" fill="hold">
-                                          <p:stCondLst>
-                                            <p:cond delay="0"/>
-                                          </p:stCondLst>
-                                        </p:cTn>
-                                        <p:tgtEl>
-                                          <p:spTgt spid="6"/>
-                                        </p:tgtEl>
-                                        <p:attrNameLst>
-                                          <p:attrName>style.visibility</p:attrName>
-                                        </p:attrNameLst>
-                                      </p:cBhvr>
-                                      <p:to>
-                                        <p:strVal val="visible"/>
-                                      </p:to>
-                                    </p:set>
-                                    <p:anim calcmode="lin" valueType="num">
-                                      <p:cBhvr additive="base">
-                                        <p:cTn id="24" dur="550" fill="hold"/>
-                                        <p:tgtEl>
-                                          <p:spTgt spid="6"/>
-                                        </p:tgtEl>
-                                        <p:attrNameLst>
-                                          <p:attrName>ppt_x</p:attrName>
-                                        </p:attrNameLst>
-                                      </p:cBhvr>
-                                      <p:tavLst>
-                                        <p:tav tm="0">
-                                          <p:val>
-                                            <p:strVal val="#ppt_x"/>
-                                          </p:val>
-                                        </p:tav>
-                                        <p:tav tm="100000">
-                                          <p:val>
-                                            <p:strVal val="#ppt_x"/>
-                                          </p:val>
-                                        </p:tav>
-                                      </p:tavLst>
-                                    </p:anim>
-                                    <p:anim calcmode="lin" valueType="num">
-                                      <p:cBhvr additive="base">
-                                        <p:cTn id="25" dur="550" fill="hold"/>
-                                        <p:tgtEl>
-                                          <p:spTgt spid="6"/>
                                         </p:tgtEl>
                                         <p:attrNameLst>
                                           <p:attrName>ppt_y</p:attrName>
@@ -8517,8 +8691,8 @@
         </p:blipFill>
         <p:spPr>
           <a:xfrm>
-            <a:off x="426709" y="1341086"/>
-            <a:ext cx="7299777" cy="1203929"/>
+            <a:off x="350511" y="1112492"/>
+            <a:ext cx="4099457" cy="4480447"/>
           </a:xfrm>
           <a:prstGeom prst="rect">
             <a:avLst/>
@@ -8541,8 +8715,8 @@
         </p:blipFill>
         <p:spPr>
           <a:xfrm>
-            <a:off x="426709" y="1569680"/>
-            <a:ext cx="7299777" cy="1889712"/>
+            <a:off x="4084217" y="1188690"/>
+            <a:ext cx="4023259" cy="4404249"/>
           </a:xfrm>
           <a:prstGeom prst="rect">
             <a:avLst/>
@@ -8565,8 +8739,8 @@
         </p:blipFill>
         <p:spPr>
           <a:xfrm>
-            <a:off x="426709" y="3169840"/>
-            <a:ext cx="7299777" cy="1203929"/>
+            <a:off x="7817924" y="1188690"/>
+            <a:ext cx="4023259" cy="4328051"/>
           </a:xfrm>
           <a:prstGeom prst="rect">
             <a:avLst/>
@@ -8589,42 +8763,18 @@
         </p:blipFill>
         <p:spPr>
           <a:xfrm>
-            <a:off x="426709" y="4084217"/>
-            <a:ext cx="7299777" cy="1203929"/>
+            <a:off x="0" y="5836773"/>
+            <a:ext cx="12191695" cy="1021054"/>
           </a:xfrm>
           <a:prstGeom prst="rect">
             <a:avLst/>
           </a:prstGeom>
         </p:spPr>
       </p:pic>
-      <p:pic>
-        <p:nvPicPr>
-          <p:cNvPr id="7" name="Picture 6" descr="c6_5_0.jpg"/>
-          <p:cNvPicPr>
-            <a:picLocks noChangeAspect="1"/>
-          </p:cNvPicPr>
-          <p:nvPr/>
-        </p:nvPicPr>
-        <p:blipFill>
-          <a:blip r:embed="rId7"/>
-          <a:stretch>
-            <a:fillRect/>
-          </a:stretch>
-        </p:blipFill>
-        <p:spPr>
-          <a:xfrm>
-            <a:off x="0" y="5836773"/>
-            <a:ext cx="12191695" cy="1021054"/>
-          </a:xfrm>
-          <a:prstGeom prst="rect">
-            <a:avLst/>
-          </a:prstGeom>
-        </p:spPr>
-      </p:pic>
       <p:sp>
         <p:nvSpPr>
-          <p:cNvPr id="8" name="TextBox 7">
-            <a:hlinkClick action="ppaction://hlinksldjump" r:id="rId8"/>
+          <p:cNvPr id="7" name="TextBox 6">
+            <a:hlinkClick action="ppaction://hlinksldjump" r:id="rId7"/>
           </p:cNvPr>
           <p:cNvSpPr txBox="1"/>
           <p:nvPr/>
@@ -8689,7 +8839,7 @@
                             </p:stCondLst>
                             <p:childTnLst>
                               <p:par>
-                                <p:cTn id="5" presetID="2" presetClass="entr" presetSubtype="8" fill="hold" decel="100000" grpId="0" nodeType="clickEffect">
+                                <p:cTn id="5" presetID="10" presetClass="entr" presetSubtype="0" fill="hold" grpId="0" nodeType="clickEffect">
                                   <p:stCondLst>
                                     <p:cond delay="0"/>
                                   </p:stCondLst>
@@ -8712,52 +8862,14 @@
                                         <p:strVal val="visible"/>
                                       </p:to>
                                     </p:set>
-                                    <p:anim calcmode="lin" valueType="num">
-                                      <p:cBhvr additive="base">
-                                        <p:cTn id="7" dur="550" fill="hold"/>
+                                    <p:animEffect transition="in" filter="fade">
+                                      <p:cBhvr>
+                                        <p:cTn id="7" dur="450"/>
                                         <p:tgtEl>
                                           <p:spTgt spid="3"/>
                                         </p:tgtEl>
-                                        <p:attrNameLst>
-                                          <p:attrName>ppt_x</p:attrName>
-                                        </p:attrNameLst>
-                                      </p:cBhvr>
-                                      <p:tavLst>
-                                        <p:tav tm="0">
-                                          <p:val>
-                                            <p:strVal val="0-#ppt_w/2"/>
-                                          </p:val>
-                                        </p:tav>
-                                        <p:tav tm="100000">
-                                          <p:val>
-                                            <p:strVal val="#ppt_x"/>
-                                          </p:val>
-                                        </p:tav>
-                                      </p:tavLst>
-                                    </p:anim>
-                                    <p:anim calcmode="lin" valueType="num">
-                                      <p:cBhvr additive="base">
-                                        <p:cTn id="8" dur="550" fill="hold"/>
-                                        <p:tgtEl>
-                                          <p:spTgt spid="3"/>
-                                        </p:tgtEl>
-                                        <p:attrNameLst>
-                                          <p:attrName>ppt_y</p:attrName>
-                                        </p:attrNameLst>
-                                      </p:cBhvr>
-                                      <p:tavLst>
-                                        <p:tav tm="0">
-                                          <p:val>
-                                            <p:strVal val="#ppt_y"/>
-                                          </p:val>
-                                        </p:tav>
-                                        <p:tav tm="100000">
-                                          <p:val>
-                                            <p:strVal val="#ppt_y"/>
-                                          </p:val>
-                                        </p:tav>
-                                      </p:tavLst>
-                                    </p:anim>
+                                      </p:cBhvr>
+                                    </p:animEffect>
                                   </p:childTnLst>
                                 </p:cTn>
                               </p:par>
@@ -8768,26 +8880,26 @@
                     </p:cTn>
                   </p:par>
                   <p:par>
-                    <p:cTn id="9" fill="hold">
+                    <p:cTn id="8" fill="hold">
                       <p:stCondLst>
                         <p:cond delay="indefinite"/>
                       </p:stCondLst>
                       <p:childTnLst>
                         <p:par>
-                          <p:cTn id="10" fill="hold">
+                          <p:cTn id="9" fill="hold">
                             <p:stCondLst>
                               <p:cond delay="0"/>
                             </p:stCondLst>
                             <p:childTnLst>
                               <p:par>
-                                <p:cTn id="11" presetID="10" presetClass="entr" presetSubtype="0" fill="hold" grpId="0" nodeType="clickEffect">
+                                <p:cTn id="10" presetID="2" presetClass="entr" presetSubtype="4" fill="hold" decel="100000" grpId="0" nodeType="clickEffect">
                                   <p:stCondLst>
                                     <p:cond delay="0"/>
                                   </p:stCondLst>
                                   <p:childTnLst>
                                     <p:set>
                                       <p:cBhvr>
-                                        <p:cTn id="12" dur="1" fill="hold">
+                                        <p:cTn id="11" dur="1" fill="hold">
                                           <p:stCondLst>
                                             <p:cond delay="0"/>
                                           </p:stCondLst>
@@ -8803,14 +8915,52 @@
                                         <p:strVal val="visible"/>
                                       </p:to>
                                     </p:set>
-                                    <p:animEffect transition="in" filter="fade">
-                                      <p:cBhvr>
-                                        <p:cTn id="13" dur="450"/>
+                                    <p:anim calcmode="lin" valueType="num">
+                                      <p:cBhvr additive="base">
+                                        <p:cTn id="12" dur="550" fill="hold"/>
                                         <p:tgtEl>
                                           <p:spTgt spid="4"/>
                                         </p:tgtEl>
-                                      </p:cBhvr>
-                                    </p:animEffect>
+                                        <p:attrNameLst>
+                                          <p:attrName>ppt_x</p:attrName>
+                                        </p:attrNameLst>
+                                      </p:cBhvr>
+                                      <p:tavLst>
+                                        <p:tav tm="0">
+                                          <p:val>
+                                            <p:strVal val="#ppt_x"/>
+                                          </p:val>
+                                        </p:tav>
+                                        <p:tav tm="100000">
+                                          <p:val>
+                                            <p:strVal val="#ppt_x"/>
+                                          </p:val>
+                                        </p:tav>
+                                      </p:tavLst>
+                                    </p:anim>
+                                    <p:anim calcmode="lin" valueType="num">
+                                      <p:cBhvr additive="base">
+                                        <p:cTn id="13" dur="550" fill="hold"/>
+                                        <p:tgtEl>
+                                          <p:spTgt spid="4"/>
+                                        </p:tgtEl>
+                                        <p:attrNameLst>
+                                          <p:attrName>ppt_y</p:attrName>
+                                        </p:attrNameLst>
+                                      </p:cBhvr>
+                                      <p:tavLst>
+                                        <p:tav tm="0">
+                                          <p:val>
+                                            <p:strVal val="1+#ppt_h/2"/>
+                                          </p:val>
+                                        </p:tav>
+                                        <p:tav tm="100000">
+                                          <p:val>
+                                            <p:strVal val="#ppt_y"/>
+                                          </p:val>
+                                        </p:tav>
+                                      </p:tavLst>
+                                    </p:anim>
                                   </p:childTnLst>
                                 </p:cTn>
                               </p:par>
@@ -8833,7 +8983,7 @@
                             </p:stCondLst>
                             <p:childTnLst>
                               <p:par>
-                                <p:cTn id="16" presetID="2" presetClass="entr" presetSubtype="8" fill="hold" decel="100000" grpId="0" nodeType="clickEffect">
+                                <p:cTn id="16" presetID="2" presetClass="entr" presetSubtype="4" fill="hold" decel="100000" grpId="0" nodeType="clickEffect">
                                   <p:stCondLst>
                                     <p:cond delay="0"/>
                                   </p:stCondLst>
@@ -8869,7 +9019,7 @@
                                       <p:tavLst>
                                         <p:tav tm="0">
                                           <p:val>
-                                            <p:strVal val="0-#ppt_w/2"/>
+                                            <p:strVal val="#ppt_x"/>
                                           </p:val>
                                         </p:tav>
                                         <p:tav tm="100000">
@@ -8892,7 +9042,7 @@
                                       <p:tavLst>
                                         <p:tav tm="0">
                                           <p:val>
-                                            <p:strVal val="#ppt_y"/>
+                                            <p:strVal val="1+#ppt_h/2"/>
                                           </p:val>
                                         </p:tav>
                                         <p:tav tm="100000">
@@ -8924,7 +9074,7 @@
                             </p:stCondLst>
                             <p:childTnLst>
                               <p:par>
-                                <p:cTn id="22" presetID="2" presetClass="entr" presetSubtype="8" fill="hold" decel="100000" grpId="0" nodeType="clickEffect">
+                                <p:cTn id="22" presetID="2" presetClass="entr" presetSubtype="4" fill="hold" decel="100000" grpId="0" nodeType="clickEffect">
                                   <p:stCondLst>
                                     <p:cond delay="0"/>
                                   </p:stCondLst>
@@ -8960,7 +9110,7 @@
                                       <p:tavLst>
                                         <p:tav tm="0">
                                           <p:val>
-                                            <p:strVal val="0-#ppt_w/2"/>
+                                            <p:strVal val="#ppt_x"/>
                                           </p:val>
                                         </p:tav>
                                         <p:tav tm="100000">
@@ -8975,97 +9125,6 @@
                                         <p:cTn id="25" dur="550" fill="hold"/>
                                         <p:tgtEl>
                                           <p:spTgt spid="6"/>
-                                        </p:tgtEl>
-                                        <p:attrNameLst>
-                                          <p:attrName>ppt_y</p:attrName>
-                                        </p:attrNameLst>
-                                      </p:cBhvr>
-                                      <p:tavLst>
-                                        <p:tav tm="0">
-                                          <p:val>
-                                            <p:strVal val="#ppt_y"/>
-                                          </p:val>
-                                        </p:tav>
-                                        <p:tav tm="100000">
-                                          <p:val>
-                                            <p:strVal val="#ppt_y"/>
-                                          </p:val>
-                                        </p:tav>
-                                      </p:tavLst>
-                                    </p:anim>
-                                  </p:childTnLst>
-                                </p:cTn>
-                              </p:par>
-                            </p:childTnLst>
-                          </p:cTn>
-                        </p:par>
-                      </p:childTnLst>
-                    </p:cTn>
-                  </p:par>
-                  <p:par>
-                    <p:cTn id="26" fill="hold">
-                      <p:stCondLst>
-                        <p:cond delay="indefinite"/>
-                      </p:stCondLst>
-                      <p:childTnLst>
-                        <p:par>
-                          <p:cTn id="27" fill="hold">
-                            <p:stCondLst>
-                              <p:cond delay="0"/>
-                            </p:stCondLst>
-                            <p:childTnLst>
-                              <p:par>
-                                <p:cTn id="28" presetID="2" presetClass="entr" presetSubtype="4" fill="hold" decel="100000" grpId="0" nodeType="clickEffect">
-                                  <p:stCondLst>
-                                    <p:cond delay="0"/>
-                                  </p:stCondLst>
-                                  <p:childTnLst>
-                                    <p:set>
-                                      <p:cBhvr>
-                                        <p:cTn id="29" dur="1" fill="hold">
-                                          <p:stCondLst>
-                                            <p:cond delay="0"/>
-                                          </p:stCondLst>
-                                        </p:cTn>
-                                        <p:tgtEl>
-                                          <p:spTgt spid="7"/>
-                                        </p:tgtEl>
-                                        <p:attrNameLst>
-                                          <p:attrName>style.visibility</p:attrName>
-                                        </p:attrNameLst>
-                                      </p:cBhvr>
-                                      <p:to>
-                                        <p:strVal val="visible"/>
-                                      </p:to>
-                                    </p:set>
-                                    <p:anim calcmode="lin" valueType="num">
-                                      <p:cBhvr additive="base">
-                                        <p:cTn id="30" dur="550" fill="hold"/>
-                                        <p:tgtEl>
-                                          <p:spTgt spid="7"/>
-                                        </p:tgtEl>
-                                        <p:attrNameLst>
-                                          <p:attrName>ppt_x</p:attrName>
-                                        </p:attrNameLst>
-                                      </p:cBhvr>
-                                      <p:tavLst>
-                                        <p:tav tm="0">
-                                          <p:val>
-                                            <p:strVal val="#ppt_x"/>
-                                          </p:val>
-                                        </p:tav>
-                                        <p:tav tm="100000">
-                                          <p:val>
-                                            <p:strVal val="#ppt_x"/>
-                                          </p:val>
-                                        </p:tav>
-                                      </p:tavLst>
-                                    </p:anim>
-                                    <p:anim calcmode="lin" valueType="num">
-                                      <p:cBhvr additive="base">
-                                        <p:cTn id="31" dur="550" fill="hold"/>
-                                        <p:tgtEl>
-                                          <p:spTgt spid="7"/>
                                         </p:tgtEl>
                                         <p:attrNameLst>
                                           <p:attrName>ppt_y</p:attrName>
@@ -9168,8 +9227,8 @@
         </p:blipFill>
         <p:spPr>
           <a:xfrm>
-            <a:off x="426709" y="1493482"/>
-            <a:ext cx="6690192" cy="1432524"/>
+            <a:off x="426709" y="1341086"/>
+            <a:ext cx="7299777" cy="1203929"/>
           </a:xfrm>
           <a:prstGeom prst="rect">
             <a:avLst/>
@@ -9178,7 +9237,7 @@
       </p:pic>
       <p:pic>
         <p:nvPicPr>
-          <p:cNvPr id="4" name="Picture 3" descr="c7_1_1.jpg"/>
+          <p:cNvPr id="4" name="Picture 3" descr="c7_2_0.jpg"/>
           <p:cNvPicPr>
             <a:picLocks noChangeAspect="1"/>
           </p:cNvPicPr>
@@ -9192,8 +9251,8 @@
         </p:blipFill>
         <p:spPr>
           <a:xfrm>
-            <a:off x="7970320" y="3246038"/>
-            <a:ext cx="1356326" cy="670543"/>
+            <a:off x="426709" y="1569680"/>
+            <a:ext cx="7299777" cy="1889712"/>
           </a:xfrm>
           <a:prstGeom prst="rect">
             <a:avLst/>
@@ -9202,7 +9261,7 @@
       </p:pic>
       <p:pic>
         <p:nvPicPr>
-          <p:cNvPr id="5" name="Picture 4" descr="c7_2_0.jpg"/>
+          <p:cNvPr id="5" name="Picture 4" descr="c7_3_0.jpg"/>
           <p:cNvPicPr>
             <a:picLocks noChangeAspect="1"/>
           </p:cNvPicPr>
@@ -9216,8 +9275,8 @@
         </p:blipFill>
         <p:spPr>
           <a:xfrm>
-            <a:off x="883897" y="1645878"/>
-            <a:ext cx="5699617" cy="975335"/>
+            <a:off x="426709" y="3169840"/>
+            <a:ext cx="7299777" cy="1203929"/>
           </a:xfrm>
           <a:prstGeom prst="rect">
             <a:avLst/>
@@ -9226,7 +9285,7 @@
       </p:pic>
       <p:pic>
         <p:nvPicPr>
-          <p:cNvPr id="6" name="Picture 5" descr="c7_2_1.jpg"/>
+          <p:cNvPr id="6" name="Picture 5" descr="c7_4_0.jpg"/>
           <p:cNvPicPr>
             <a:picLocks noChangeAspect="1"/>
           </p:cNvPicPr>
@@ -9240,8 +9299,8 @@
         </p:blipFill>
         <p:spPr>
           <a:xfrm>
-            <a:off x="7513132" y="2560255"/>
-            <a:ext cx="822939" cy="1203929"/>
+            <a:off x="426709" y="4084217"/>
+            <a:ext cx="7299777" cy="1203929"/>
           </a:xfrm>
           <a:prstGeom prst="rect">
             <a:avLst/>
@@ -9250,7 +9309,7 @@
       </p:pic>
       <p:pic>
         <p:nvPicPr>
-          <p:cNvPr id="7" name="Picture 6" descr="c7_2_2.jpg"/>
+          <p:cNvPr id="7" name="Picture 6" descr="c7_5_0.jpg"/>
           <p:cNvPicPr>
             <a:picLocks noChangeAspect="1"/>
           </p:cNvPicPr>
@@ -9264,66 +9323,18 @@
         </p:blipFill>
         <p:spPr>
           <a:xfrm>
-            <a:off x="426709" y="2636454"/>
-            <a:ext cx="6690192" cy="1203929"/>
+            <a:off x="0" y="5836773"/>
+            <a:ext cx="12191695" cy="1021054"/>
           </a:xfrm>
           <a:prstGeom prst="rect">
             <a:avLst/>
           </a:prstGeom>
         </p:spPr>
       </p:pic>
-      <p:pic>
-        <p:nvPicPr>
-          <p:cNvPr id="8" name="Picture 7" descr="c7_3_0.jpg"/>
-          <p:cNvPicPr>
-            <a:picLocks noChangeAspect="1"/>
-          </p:cNvPicPr>
-          <p:nvPr/>
-        </p:nvPicPr>
-        <p:blipFill>
-          <a:blip r:embed="rId8"/>
-          <a:stretch>
-            <a:fillRect/>
-          </a:stretch>
-        </p:blipFill>
-        <p:spPr>
-          <a:xfrm>
-            <a:off x="426709" y="3550831"/>
-            <a:ext cx="6690192" cy="1203929"/>
-          </a:xfrm>
-          <a:prstGeom prst="rect">
-            <a:avLst/>
-          </a:prstGeom>
-        </p:spPr>
-      </p:pic>
-      <p:pic>
-        <p:nvPicPr>
-          <p:cNvPr id="9" name="Picture 8" descr="c7_4_0.jpg"/>
-          <p:cNvPicPr>
-            <a:picLocks noChangeAspect="1"/>
-          </p:cNvPicPr>
-          <p:nvPr/>
-        </p:nvPicPr>
-        <p:blipFill>
-          <a:blip r:embed="rId9"/>
-          <a:stretch>
-            <a:fillRect/>
-          </a:stretch>
-        </p:blipFill>
-        <p:spPr>
-          <a:xfrm>
-            <a:off x="9570480" y="1569680"/>
-            <a:ext cx="2270703" cy="1432524"/>
-          </a:xfrm>
-          <a:prstGeom prst="rect">
-            <a:avLst/>
-          </a:prstGeom>
-        </p:spPr>
-      </p:pic>
       <p:sp>
         <p:nvSpPr>
-          <p:cNvPr id="10" name="TextBox 9">
-            <a:hlinkClick action="ppaction://hlinksldjump" r:id="rId10"/>
+          <p:cNvPr id="8" name="TextBox 7">
+            <a:hlinkClick action="ppaction://hlinksldjump" r:id="rId8"/>
           </p:cNvPr>
           <p:cNvSpPr txBox="1"/>
           <p:nvPr/>
@@ -9388,7 +9399,7 @@
                             </p:stCondLst>
                             <p:childTnLst>
                               <p:par>
-                                <p:cTn id="5" presetID="53" presetClass="entr" presetSubtype="16" fill="hold" grpId="0" nodeType="clickEffect">
+                                <p:cTn id="5" presetID="2" presetClass="entr" presetSubtype="8" fill="hold" decel="100000" grpId="0" nodeType="clickEffect">
                                   <p:stCondLst>
                                     <p:cond delay="0"/>
                                   </p:stCondLst>
@@ -9413,70 +9424,80 @@
                                     </p:set>
                                     <p:anim calcmode="lin" valueType="num">
                                       <p:cBhvr additive="base">
-                                        <p:cTn id="7" dur="420" fill="hold"/>
+                                        <p:cTn id="7" dur="550" fill="hold"/>
                                         <p:tgtEl>
                                           <p:spTgt spid="3"/>
                                         </p:tgtEl>
                                         <p:attrNameLst>
-                                          <p:attrName>ppt_w</p:attrName>
+                                          <p:attrName>ppt_x</p:attrName>
                                         </p:attrNameLst>
                                       </p:cBhvr>
                                       <p:tavLst>
                                         <p:tav tm="0">
                                           <p:val>
-                                            <p:strVal val="0"/>
+                                            <p:strVal val="0-#ppt_w/2"/>
                                           </p:val>
                                         </p:tav>
                                         <p:tav tm="100000">
                                           <p:val>
-                                            <p:strVal val="#ppt_w"/>
+                                            <p:strVal val="#ppt_x"/>
                                           </p:val>
                                         </p:tav>
                                       </p:tavLst>
                                     </p:anim>
                                     <p:anim calcmode="lin" valueType="num">
                                       <p:cBhvr additive="base">
-                                        <p:cTn id="8" dur="420" fill="hold"/>
+                                        <p:cTn id="8" dur="550" fill="hold"/>
                                         <p:tgtEl>
                                           <p:spTgt spid="3"/>
                                         </p:tgtEl>
                                         <p:attrNameLst>
-                                          <p:attrName>ppt_h</p:attrName>
+                                          <p:attrName>ppt_y</p:attrName>
                                         </p:attrNameLst>
                                       </p:cBhvr>
                                       <p:tavLst>
                                         <p:tav tm="0">
                                           <p:val>
-                                            <p:strVal val="0"/>
+                                            <p:strVal val="#ppt_y"/>
                                           </p:val>
                                         </p:tav>
                                         <p:tav tm="100000">
                                           <p:val>
-                                            <p:strVal val="#ppt_h"/>
+                                            <p:strVal val="#ppt_y"/>
                                           </p:val>
                                         </p:tav>
                                       </p:tavLst>
                                     </p:anim>
-                                    <p:animEffect transition="in" filter="fade">
-                                      <p:cBhvr>
-                                        <p:cTn id="9" dur="420"/>
-                                        <p:tgtEl>
-                                          <p:spTgt spid="3"/>
-                                        </p:tgtEl>
-                                      </p:cBhvr>
-                                    </p:animEffect>
                                   </p:childTnLst>
                                 </p:cTn>
                               </p:par>
+                            </p:childTnLst>
+                          </p:cTn>
+                        </p:par>
+                      </p:childTnLst>
+                    </p:cTn>
+                  </p:par>
+                  <p:par>
+                    <p:cTn id="9" fill="hold">
+                      <p:stCondLst>
+                        <p:cond delay="indefinite"/>
+                      </p:stCondLst>
+                      <p:childTnLst>
+                        <p:par>
+                          <p:cTn id="10" fill="hold">
+                            <p:stCondLst>
+                              <p:cond delay="0"/>
+                            </p:stCondLst>
+                            <p:childTnLst>
                               <p:par>
-                                <p:cTn id="10" presetID="10" presetClass="entr" presetSubtype="0" fill="hold" grpId="0" nodeType="withEffect">
+                                <p:cTn id="11" presetID="10" presetClass="entr" presetSubtype="0" fill="hold" grpId="0" nodeType="clickEffect">
                                   <p:stCondLst>
-                                    <p:cond delay="120"/>
+                                    <p:cond delay="0"/>
                                   </p:stCondLst>
                                   <p:childTnLst>
                                     <p:set>
                                       <p:cBhvr>
-                                        <p:cTn id="11" dur="1" fill="hold">
+                                        <p:cTn id="12" dur="1" fill="hold">
                                           <p:stCondLst>
                                             <p:cond delay="0"/>
                                           </p:stCondLst>
@@ -9494,7 +9515,7 @@
                                     </p:set>
                                     <p:animEffect transition="in" filter="fade">
                                       <p:cBhvr>
-                                        <p:cTn id="12" dur="450"/>
+                                        <p:cTn id="13" dur="450"/>
                                         <p:tgtEl>
                                           <p:spTgt spid="4"/>
                                         </p:tgtEl>
@@ -9510,102 +9531,32 @@
                     </p:cTn>
                   </p:par>
                   <p:par>
-                    <p:cTn id="13" fill="hold">
+                    <p:cTn id="14" fill="hold">
                       <p:stCondLst>
                         <p:cond delay="indefinite"/>
                       </p:stCondLst>
                       <p:childTnLst>
                         <p:par>
-                          <p:cTn id="14" fill="hold">
+                          <p:cTn id="15" fill="hold">
                             <p:stCondLst>
                               <p:cond delay="0"/>
                             </p:stCondLst>
                             <p:childTnLst>
                               <p:par>
-                                <p:cTn id="15" presetID="10" presetClass="entr" presetSubtype="0" fill="hold" grpId="0" nodeType="clickEffect">
+                                <p:cTn id="16" presetID="2" presetClass="entr" presetSubtype="8" fill="hold" decel="100000" grpId="0" nodeType="clickEffect">
                                   <p:stCondLst>
                                     <p:cond delay="0"/>
                                   </p:stCondLst>
                                   <p:childTnLst>
                                     <p:set>
                                       <p:cBhvr>
-                                        <p:cTn id="16" dur="1" fill="hold">
+                                        <p:cTn id="17" dur="1" fill="hold">
                                           <p:stCondLst>
                                             <p:cond delay="0"/>
                                           </p:stCondLst>
                                         </p:cTn>
                                         <p:tgtEl>
                                           <p:spTgt spid="5"/>
-                                        </p:tgtEl>
-                                        <p:attrNameLst>
-                                          <p:attrName>style.visibility</p:attrName>
-                                        </p:attrNameLst>
-                                      </p:cBhvr>
-                                      <p:to>
-                                        <p:strVal val="visible"/>
-                                      </p:to>
-                                    </p:set>
-                                    <p:animEffect transition="in" filter="fade">
-                                      <p:cBhvr>
-                                        <p:cTn id="17" dur="450"/>
-                                        <p:tgtEl>
-                                          <p:spTgt spid="5"/>
-                                        </p:tgtEl>
-                                      </p:cBhvr>
-                                    </p:animEffect>
-                                  </p:childTnLst>
-                                </p:cTn>
-                              </p:par>
-                              <p:par>
-                                <p:cTn id="18" presetID="10" presetClass="entr" presetSubtype="0" fill="hold" grpId="0" nodeType="withEffect">
-                                  <p:stCondLst>
-                                    <p:cond delay="120"/>
-                                  </p:stCondLst>
-                                  <p:childTnLst>
-                                    <p:set>
-                                      <p:cBhvr>
-                                        <p:cTn id="19" dur="1" fill="hold">
-                                          <p:stCondLst>
-                                            <p:cond delay="0"/>
-                                          </p:stCondLst>
-                                        </p:cTn>
-                                        <p:tgtEl>
-                                          <p:spTgt spid="6"/>
-                                        </p:tgtEl>
-                                        <p:attrNameLst>
-                                          <p:attrName>style.visibility</p:attrName>
-                                        </p:attrNameLst>
-                                      </p:cBhvr>
-                                      <p:to>
-                                        <p:strVal val="visible"/>
-                                      </p:to>
-                                    </p:set>
-                                    <p:animEffect transition="in" filter="fade">
-                                      <p:cBhvr>
-                                        <p:cTn id="20" dur="450"/>
-                                        <p:tgtEl>
-                                          <p:spTgt spid="6"/>
-                                        </p:tgtEl>
-                                      </p:cBhvr>
-                                    </p:animEffect>
-                                  </p:childTnLst>
-                                </p:cTn>
-                              </p:par>
-                              <p:par>
-                                <p:cTn id="21" presetID="53" presetClass="entr" presetSubtype="16" fill="hold" grpId="0" nodeType="withEffect">
-                                  <p:stCondLst>
-                                    <p:cond delay="240"/>
-                                  </p:stCondLst>
-                                  <p:childTnLst>
-                                    <p:set>
-                                      <p:cBhvr>
-                                        <p:cTn id="22" dur="1" fill="hold">
-                                          <p:stCondLst>
-                                            <p:cond delay="0"/>
-                                          </p:stCondLst>
-                                        </p:cTn>
-                                        <p:tgtEl>
-                                          <p:spTgt spid="7"/>
                                         </p:tgtEl>
                                         <p:attrNameLst>
                                           <p:attrName>style.visibility</p:attrName>
@@ -9617,58 +9568,141 @@
                                     </p:set>
                                     <p:anim calcmode="lin" valueType="num">
                                       <p:cBhvr additive="base">
-                                        <p:cTn id="23" dur="420" fill="hold"/>
-                                        <p:tgtEl>
-                                          <p:spTgt spid="7"/>
-                                        </p:tgtEl>
-                                        <p:attrNameLst>
-                                          <p:attrName>ppt_w</p:attrName>
+                                        <p:cTn id="18" dur="550" fill="hold"/>
+                                        <p:tgtEl>
+                                          <p:spTgt spid="5"/>
+                                        </p:tgtEl>
+                                        <p:attrNameLst>
+                                          <p:attrName>ppt_x</p:attrName>
                                         </p:attrNameLst>
                                       </p:cBhvr>
                                       <p:tavLst>
                                         <p:tav tm="0">
                                           <p:val>
-                                            <p:strVal val="0"/>
+                                            <p:strVal val="0-#ppt_w/2"/>
                                           </p:val>
                                         </p:tav>
                                         <p:tav tm="100000">
                                           <p:val>
-                                            <p:strVal val="#ppt_w"/>
+                                            <p:strVal val="#ppt_x"/>
                                           </p:val>
                                         </p:tav>
                                       </p:tavLst>
                                     </p:anim>
                                     <p:anim calcmode="lin" valueType="num">
                                       <p:cBhvr additive="base">
-                                        <p:cTn id="24" dur="420" fill="hold"/>
-                                        <p:tgtEl>
-                                          <p:spTgt spid="7"/>
-                                        </p:tgtEl>
-                                        <p:attrNameLst>
-                                          <p:attrName>ppt_h</p:attrName>
+                                        <p:cTn id="19" dur="550" fill="hold"/>
+                                        <p:tgtEl>
+                                          <p:spTgt spid="5"/>
+                                        </p:tgtEl>
+                                        <p:attrNameLst>
+                                          <p:attrName>ppt_y</p:attrName>
                                         </p:attrNameLst>
                                       </p:cBhvr>
                                       <p:tavLst>
                                         <p:tav tm="0">
                                           <p:val>
-                                            <p:strVal val="0"/>
+                                            <p:strVal val="#ppt_y"/>
                                           </p:val>
                                         </p:tav>
                                         <p:tav tm="100000">
                                           <p:val>
-                                            <p:strVal val="#ppt_h"/>
+                                            <p:strVal val="#ppt_y"/>
                                           </p:val>
                                         </p:tav>
                                       </p:tavLst>
                                     </p:anim>
-                                    <p:animEffect transition="in" filter="fade">
+                                  </p:childTnLst>
+                                </p:cTn>
+                              </p:par>
+                            </p:childTnLst>
+                          </p:cTn>
+                        </p:par>
+                      </p:childTnLst>
+                    </p:cTn>
+                  </p:par>
+                  <p:par>
+                    <p:cTn id="20" fill="hold">
+                      <p:stCondLst>
+                        <p:cond delay="indefinite"/>
+                      </p:stCondLst>
+                      <p:childTnLst>
+                        <p:par>
+                          <p:cTn id="21" fill="hold">
+                            <p:stCondLst>
+                              <p:cond delay="0"/>
+                            </p:stCondLst>
+                            <p:childTnLst>
+                              <p:par>
+                                <p:cTn id="22" presetID="2" presetClass="entr" presetSubtype="8" fill="hold" decel="100000" grpId="0" nodeType="clickEffect">
+                                  <p:stCondLst>
+                                    <p:cond delay="0"/>
+                                  </p:stCondLst>
+                                  <p:childTnLst>
+                                    <p:set>
                                       <p:cBhvr>
-                                        <p:cTn id="25" dur="420"/>
-                                        <p:tgtEl>
-                                          <p:spTgt spid="7"/>
-                                        </p:tgtEl>
-                                      </p:cBhvr>
-                                    </p:animEffect>
+                                        <p:cTn id="23" dur="1" fill="hold">
+                                          <p:stCondLst>
+                                            <p:cond delay="0"/>
+                                          </p:stCondLst>
+                                        </p:cTn>
+                                        <p:tgtEl>
+                                          <p:spTgt spid="6"/>
+                                        </p:tgtEl>
+                                        <p:attrNameLst>
+                                          <p:attrName>style.visibility</p:attrName>
+                                        </p:attrNameLst>
+                                      </p:cBhvr>
+                                      <p:to>
+                                        <p:strVal val="visible"/>
+                                      </p:to>
+                                    </p:set>
+                                    <p:anim calcmode="lin" valueType="num">
+                                      <p:cBhvr additive="base">
+                                        <p:cTn id="24" dur="550" fill="hold"/>
+                                        <p:tgtEl>
+                                          <p:spTgt spid="6"/>
+                                        </p:tgtEl>
+                                        <p:attrNameLst>
+                                          <p:attrName>ppt_x</p:attrName>
+                                        </p:attrNameLst>
+                                      </p:cBhvr>
+                                      <p:tavLst>
+                                        <p:tav tm="0">
+                                          <p:val>
+                                            <p:strVal val="0-#ppt_w/2"/>
+                                          </p:val>
+                                        </p:tav>
+                                        <p:tav tm="100000">
+                                          <p:val>
+                                            <p:strVal val="#ppt_x"/>
+                                          </p:val>
+                                        </p:tav>
+                                      </p:tavLst>
+                                    </p:anim>
+                                    <p:anim calcmode="lin" valueType="num">
+                                      <p:cBhvr additive="base">
+                                        <p:cTn id="25" dur="550" fill="hold"/>
+                                        <p:tgtEl>
+                                          <p:spTgt spid="6"/>
+                                        </p:tgtEl>
+                                        <p:attrNameLst>
+                                          <p:attrName>ppt_y</p:attrName>
+                                        </p:attrNameLst>
+                                      </p:cBhvr>
+                                      <p:tavLst>
+                                        <p:tav tm="0">
+                                          <p:val>
+                                            <p:strVal val="#ppt_y"/>
+                                          </p:val>
+                                        </p:tav>
+                                        <p:tav tm="100000">
+                                          <p:val>
+                                            <p:strVal val="#ppt_y"/>
+                                          </p:val>
+                                        </p:tav>
+                                      </p:tavLst>
+                                    </p:anim>
                                   </p:childTnLst>
                                 </p:cTn>
                               </p:par>
@@ -9691,7 +9725,7 @@
                             </p:stCondLst>
                             <p:childTnLst>
                               <p:par>
-                                <p:cTn id="28" presetID="2" presetClass="entr" presetSubtype="8" fill="hold" decel="100000" grpId="0" nodeType="clickEffect">
+                                <p:cTn id="28" presetID="2" presetClass="entr" presetSubtype="4" fill="hold" decel="100000" grpId="0" nodeType="clickEffect">
                                   <p:stCondLst>
                                     <p:cond delay="0"/>
                                   </p:stCondLst>
@@ -9704,7 +9738,7 @@
                                           </p:stCondLst>
                                         </p:cTn>
                                         <p:tgtEl>
-                                          <p:spTgt spid="8"/>
+                                          <p:spTgt spid="7"/>
                                         </p:tgtEl>
                                         <p:attrNameLst>
                                           <p:attrName>style.visibility</p:attrName>
@@ -9718,7 +9752,7 @@
                                       <p:cBhvr additive="base">
                                         <p:cTn id="30" dur="550" fill="hold"/>
                                         <p:tgtEl>
-                                          <p:spTgt spid="8"/>
+                                          <p:spTgt spid="7"/>
                                         </p:tgtEl>
                                         <p:attrNameLst>
                                           <p:attrName>ppt_x</p:attrName>
@@ -9727,7 +9761,7 @@
                                       <p:tavLst>
                                         <p:tav tm="0">
                                           <p:val>
-                                            <p:strVal val="0-#ppt_w/2"/>
+                                            <p:strVal val="#ppt_x"/>
                                           </p:val>
                                         </p:tav>
                                         <p:tav tm="100000">
@@ -9741,7 +9775,7 @@
                                       <p:cBhvr additive="base">
                                         <p:cTn id="31" dur="550" fill="hold"/>
                                         <p:tgtEl>
-                                          <p:spTgt spid="8"/>
+                                          <p:spTgt spid="7"/>
                                         </p:tgtEl>
                                         <p:attrNameLst>
                                           <p:attrName>ppt_y</p:attrName>
@@ -9750,7 +9784,7 @@
                                       <p:tavLst>
                                         <p:tav tm="0">
                                           <p:val>
-                                            <p:strVal val="#ppt_y"/>
+                                            <p:strVal val="1+#ppt_h/2"/>
                                           </p:val>
                                         </p:tav>
                                         <p:tav tm="100000">
@@ -9760,105 +9794,6 @@
                                         </p:tav>
                                       </p:tavLst>
                                     </p:anim>
-                                  </p:childTnLst>
-                                </p:cTn>
-                              </p:par>
-                            </p:childTnLst>
-                          </p:cTn>
-                        </p:par>
-                      </p:childTnLst>
-                    </p:cTn>
-                  </p:par>
-                  <p:par>
-                    <p:cTn id="32" fill="hold">
-                      <p:stCondLst>
-                        <p:cond delay="indefinite"/>
-                      </p:stCondLst>
-                      <p:childTnLst>
-                        <p:par>
-                          <p:cTn id="33" fill="hold">
-                            <p:stCondLst>
-                              <p:cond delay="0"/>
-                            </p:stCondLst>
-                            <p:childTnLst>
-                              <p:par>
-                                <p:cTn id="34" presetID="53" presetClass="entr" presetSubtype="16" fill="hold" grpId="0" nodeType="clickEffect">
-                                  <p:stCondLst>
-                                    <p:cond delay="0"/>
-                                  </p:stCondLst>
-                                  <p:childTnLst>
-                                    <p:set>
-                                      <p:cBhvr>
-                                        <p:cTn id="35" dur="1" fill="hold">
-                                          <p:stCondLst>
-                                            <p:cond delay="0"/>
-                                          </p:stCondLst>
-                                        </p:cTn>
-                                        <p:tgtEl>
-                                          <p:spTgt spid="9"/>
-                                        </p:tgtEl>
-                                        <p:attrNameLst>
-                                          <p:attrName>style.visibility</p:attrName>
-                                        </p:attrNameLst>
-                                      </p:cBhvr>
-                                      <p:to>
-                                        <p:strVal val="visible"/>
-                                      </p:to>
-                                    </p:set>
-                                    <p:anim calcmode="lin" valueType="num">
-                                      <p:cBhvr additive="base">
-                                        <p:cTn id="36" dur="420" fill="hold"/>
-                                        <p:tgtEl>
-                                          <p:spTgt spid="9"/>
-                                        </p:tgtEl>
-                                        <p:attrNameLst>
-                                          <p:attrName>ppt_w</p:attrName>
-                                        </p:attrNameLst>
-                                      </p:cBhvr>
-                                      <p:tavLst>
-                                        <p:tav tm="0">
-                                          <p:val>
-                                            <p:strVal val="0"/>
-                                          </p:val>
-                                        </p:tav>
-                                        <p:tav tm="100000">
-                                          <p:val>
-                                            <p:strVal val="#ppt_w"/>
-                                          </p:val>
-                                        </p:tav>
-                                      </p:tavLst>
-                                    </p:anim>
-                                    <p:anim calcmode="lin" valueType="num">
-                                      <p:cBhvr additive="base">
-                                        <p:cTn id="37" dur="420" fill="hold"/>
-                                        <p:tgtEl>
-                                          <p:spTgt spid="9"/>
-                                        </p:tgtEl>
-                                        <p:attrNameLst>
-                                          <p:attrName>ppt_h</p:attrName>
-                                        </p:attrNameLst>
-                                      </p:cBhvr>
-                                      <p:tavLst>
-                                        <p:tav tm="0">
-                                          <p:val>
-                                            <p:strVal val="0"/>
-                                          </p:val>
-                                        </p:tav>
-                                        <p:tav tm="100000">
-                                          <p:val>
-                                            <p:strVal val="#ppt_h"/>
-                                          </p:val>
-                                        </p:tav>
-                                      </p:tavLst>
-                                    </p:anim>
-                                    <p:animEffect transition="in" filter="fade">
-                                      <p:cBhvr>
-                                        <p:cTn id="38" dur="420"/>
-                                        <p:tgtEl>
-                                          <p:spTgt spid="9"/>
-                                        </p:tgtEl>
-                                      </p:cBhvr>
-                                    </p:animEffect>
                                   </p:childTnLst>
                                 </p:cTn>
                               </p:par>
@@ -9943,66 +9878,162 @@
         </p:blipFill>
         <p:spPr>
           <a:xfrm>
-            <a:off x="10180065" y="4160415"/>
-            <a:ext cx="1584920" cy="2042108"/>
+            <a:off x="426709" y="1493482"/>
+            <a:ext cx="6690192" cy="1432524"/>
           </a:xfrm>
           <a:prstGeom prst="rect">
             <a:avLst/>
           </a:prstGeom>
         </p:spPr>
       </p:pic>
-      <p:sp>
-        <p:nvSpPr>
-          <p:cNvPr id="4" name="Rectangle 3">
-            <a:hlinkClick r:id="rId4"/>
-          </p:cNvPr>
-          <p:cNvSpPr/>
+      <p:pic>
+        <p:nvPicPr>
+          <p:cNvPr id="4" name="Picture 3" descr="c8_1_1.jpg"/>
+          <p:cNvPicPr>
+            <a:picLocks noChangeAspect="1"/>
+          </p:cNvPicPr>
           <p:nvPr/>
-        </p:nvSpPr>
-        <p:spPr>
-          <a:xfrm>
-            <a:off x="655303" y="4724281"/>
-            <a:ext cx="2523109" cy="754361"/>
+        </p:nvPicPr>
+        <p:blipFill>
+          <a:blip r:embed="rId4"/>
+          <a:stretch>
+            <a:fillRect/>
+          </a:stretch>
+        </p:blipFill>
+        <p:spPr>
+          <a:xfrm>
+            <a:off x="7970320" y="3246038"/>
+            <a:ext cx="1356326" cy="670543"/>
           </a:xfrm>
           <a:prstGeom prst="rect">
             <a:avLst/>
           </a:prstGeom>
-          <a:solidFill>
-            <a:srgbClr val="FFFFFF">
-              <a:alpha val="0"/>
-            </a:srgbClr>
-          </a:solidFill>
-          <a:ln>
-            <a:noFill/>
-          </a:ln>
-          <a:effectLst/>
-        </p:spPr>
-        <p:style>
-          <a:lnRef idx="1">
-            <a:schemeClr val="accent1"/>
-          </a:lnRef>
-          <a:fillRef idx="3">
-            <a:schemeClr val="accent1"/>
-          </a:fillRef>
-          <a:effectRef idx="2">
-            <a:schemeClr val="accent1"/>
-          </a:effectRef>
-          <a:fontRef idx="minor">
-            <a:schemeClr val="lt1"/>
-          </a:fontRef>
-        </p:style>
-        <p:txBody>
-          <a:bodyPr rtlCol="0" anchor="ctr"/>
-          <a:lstStyle/>
-          <a:p>
-            <a:pPr algn="ctr"/>
-          </a:p>
-        </p:txBody>
-      </p:sp>
+        </p:spPr>
+      </p:pic>
+      <p:pic>
+        <p:nvPicPr>
+          <p:cNvPr id="5" name="Picture 4" descr="c8_2_0.jpg"/>
+          <p:cNvPicPr>
+            <a:picLocks noChangeAspect="1"/>
+          </p:cNvPicPr>
+          <p:nvPr/>
+        </p:nvPicPr>
+        <p:blipFill>
+          <a:blip r:embed="rId5"/>
+          <a:stretch>
+            <a:fillRect/>
+          </a:stretch>
+        </p:blipFill>
+        <p:spPr>
+          <a:xfrm>
+            <a:off x="883897" y="1645878"/>
+            <a:ext cx="5699617" cy="975335"/>
+          </a:xfrm>
+          <a:prstGeom prst="rect">
+            <a:avLst/>
+          </a:prstGeom>
+        </p:spPr>
+      </p:pic>
+      <p:pic>
+        <p:nvPicPr>
+          <p:cNvPr id="6" name="Picture 5" descr="c8_2_1.jpg"/>
+          <p:cNvPicPr>
+            <a:picLocks noChangeAspect="1"/>
+          </p:cNvPicPr>
+          <p:nvPr/>
+        </p:nvPicPr>
+        <p:blipFill>
+          <a:blip r:embed="rId6"/>
+          <a:stretch>
+            <a:fillRect/>
+          </a:stretch>
+        </p:blipFill>
+        <p:spPr>
+          <a:xfrm>
+            <a:off x="7513132" y="2560255"/>
+            <a:ext cx="822939" cy="1203929"/>
+          </a:xfrm>
+          <a:prstGeom prst="rect">
+            <a:avLst/>
+          </a:prstGeom>
+        </p:spPr>
+      </p:pic>
+      <p:pic>
+        <p:nvPicPr>
+          <p:cNvPr id="7" name="Picture 6" descr="c8_2_2.jpg"/>
+          <p:cNvPicPr>
+            <a:picLocks noChangeAspect="1"/>
+          </p:cNvPicPr>
+          <p:nvPr/>
+        </p:nvPicPr>
+        <p:blipFill>
+          <a:blip r:embed="rId7"/>
+          <a:stretch>
+            <a:fillRect/>
+          </a:stretch>
+        </p:blipFill>
+        <p:spPr>
+          <a:xfrm>
+            <a:off x="426709" y="2636454"/>
+            <a:ext cx="6690192" cy="1203929"/>
+          </a:xfrm>
+          <a:prstGeom prst="rect">
+            <a:avLst/>
+          </a:prstGeom>
+        </p:spPr>
+      </p:pic>
+      <p:pic>
+        <p:nvPicPr>
+          <p:cNvPr id="8" name="Picture 7" descr="c8_3_0.jpg"/>
+          <p:cNvPicPr>
+            <a:picLocks noChangeAspect="1"/>
+          </p:cNvPicPr>
+          <p:nvPr/>
+        </p:nvPicPr>
+        <p:blipFill>
+          <a:blip r:embed="rId8"/>
+          <a:stretch>
+            <a:fillRect/>
+          </a:stretch>
+        </p:blipFill>
+        <p:spPr>
+          <a:xfrm>
+            <a:off x="426709" y="3550831"/>
+            <a:ext cx="6690192" cy="1203929"/>
+          </a:xfrm>
+          <a:prstGeom prst="rect">
+            <a:avLst/>
+          </a:prstGeom>
+        </p:spPr>
+      </p:pic>
+      <p:pic>
+        <p:nvPicPr>
+          <p:cNvPr id="9" name="Picture 8" descr="c8_4_0.jpg"/>
+          <p:cNvPicPr>
+            <a:picLocks noChangeAspect="1"/>
+          </p:cNvPicPr>
+          <p:nvPr/>
+        </p:nvPicPr>
+        <p:blipFill>
+          <a:blip r:embed="rId9"/>
+          <a:stretch>
+            <a:fillRect/>
+          </a:stretch>
+        </p:blipFill>
+        <p:spPr>
+          <a:xfrm>
+            <a:off x="9570480" y="1569680"/>
+            <a:ext cx="2270703" cy="1432524"/>
+          </a:xfrm>
+          <a:prstGeom prst="rect">
+            <a:avLst/>
+          </a:prstGeom>
+        </p:spPr>
+      </p:pic>
       <p:sp>
         <p:nvSpPr>
-          <p:cNvPr id="5" name="TextBox 4">
-            <a:hlinkClick action="ppaction://hlinksldjump" r:id="rId5"/>
+          <p:cNvPr id="10" name="TextBox 9">
+            <a:hlinkClick action="ppaction://hlinksldjump" r:id="rId10"/>
           </p:cNvPr>
           <p:cNvSpPr txBox="1"/>
           <p:nvPr/>
@@ -10067,7 +10098,7 @@
                             </p:stCondLst>
                             <p:childTnLst>
                               <p:par>
-                                <p:cTn id="5" presetID="10" presetClass="entr" presetSubtype="0" fill="hold" grpId="0" nodeType="clickEffect">
+                                <p:cTn id="5" presetID="53" presetClass="entr" presetSubtype="16" fill="hold" grpId="0" nodeType="clickEffect">
                                   <p:stCondLst>
                                     <p:cond delay="0"/>
                                   </p:stCondLst>
@@ -10090,11 +10121,451 @@
                                         <p:strVal val="visible"/>
                                       </p:to>
                                     </p:set>
+                                    <p:anim calcmode="lin" valueType="num">
+                                      <p:cBhvr additive="base">
+                                        <p:cTn id="7" dur="420" fill="hold"/>
+                                        <p:tgtEl>
+                                          <p:spTgt spid="3"/>
+                                        </p:tgtEl>
+                                        <p:attrNameLst>
+                                          <p:attrName>ppt_w</p:attrName>
+                                        </p:attrNameLst>
+                                      </p:cBhvr>
+                                      <p:tavLst>
+                                        <p:tav tm="0">
+                                          <p:val>
+                                            <p:strVal val="0"/>
+                                          </p:val>
+                                        </p:tav>
+                                        <p:tav tm="100000">
+                                          <p:val>
+                                            <p:strVal val="#ppt_w"/>
+                                          </p:val>
+                                        </p:tav>
+                                      </p:tavLst>
+                                    </p:anim>
+                                    <p:anim calcmode="lin" valueType="num">
+                                      <p:cBhvr additive="base">
+                                        <p:cTn id="8" dur="420" fill="hold"/>
+                                        <p:tgtEl>
+                                          <p:spTgt spid="3"/>
+                                        </p:tgtEl>
+                                        <p:attrNameLst>
+                                          <p:attrName>ppt_h</p:attrName>
+                                        </p:attrNameLst>
+                                      </p:cBhvr>
+                                      <p:tavLst>
+                                        <p:tav tm="0">
+                                          <p:val>
+                                            <p:strVal val="0"/>
+                                          </p:val>
+                                        </p:tav>
+                                        <p:tav tm="100000">
+                                          <p:val>
+                                            <p:strVal val="#ppt_h"/>
+                                          </p:val>
+                                        </p:tav>
+                                      </p:tavLst>
+                                    </p:anim>
                                     <p:animEffect transition="in" filter="fade">
                                       <p:cBhvr>
-                                        <p:cTn id="7" dur="450"/>
+                                        <p:cTn id="9" dur="420"/>
                                         <p:tgtEl>
                                           <p:spTgt spid="3"/>
+                                        </p:tgtEl>
+                                      </p:cBhvr>
+                                    </p:animEffect>
+                                  </p:childTnLst>
+                                </p:cTn>
+                              </p:par>
+                              <p:par>
+                                <p:cTn id="10" presetID="10" presetClass="entr" presetSubtype="0" fill="hold" grpId="0" nodeType="withEffect">
+                                  <p:stCondLst>
+                                    <p:cond delay="120"/>
+                                  </p:stCondLst>
+                                  <p:childTnLst>
+                                    <p:set>
+                                      <p:cBhvr>
+                                        <p:cTn id="11" dur="1" fill="hold">
+                                          <p:stCondLst>
+                                            <p:cond delay="0"/>
+                                          </p:stCondLst>
+                                        </p:cTn>
+                                        <p:tgtEl>
+                                          <p:spTgt spid="4"/>
+                                        </p:tgtEl>
+                                        <p:attrNameLst>
+                                          <p:attrName>style.visibility</p:attrName>
+                                        </p:attrNameLst>
+                                      </p:cBhvr>
+                                      <p:to>
+                                        <p:strVal val="visible"/>
+                                      </p:to>
+                                    </p:set>
+                                    <p:animEffect transition="in" filter="fade">
+                                      <p:cBhvr>
+                                        <p:cTn id="12" dur="450"/>
+                                        <p:tgtEl>
+                                          <p:spTgt spid="4"/>
+                                        </p:tgtEl>
+                                      </p:cBhvr>
+                                    </p:animEffect>
+                                  </p:childTnLst>
+                                </p:cTn>
+                              </p:par>
+                            </p:childTnLst>
+                          </p:cTn>
+                        </p:par>
+                      </p:childTnLst>
+                    </p:cTn>
+                  </p:par>
+                  <p:par>
+                    <p:cTn id="13" fill="hold">
+                      <p:stCondLst>
+                        <p:cond delay="indefinite"/>
+                      </p:stCondLst>
+                      <p:childTnLst>
+                        <p:par>
+                          <p:cTn id="14" fill="hold">
+                            <p:stCondLst>
+                              <p:cond delay="0"/>
+                            </p:stCondLst>
+                            <p:childTnLst>
+                              <p:par>
+                                <p:cTn id="15" presetID="10" presetClass="entr" presetSubtype="0" fill="hold" grpId="0" nodeType="clickEffect">
+                                  <p:stCondLst>
+                                    <p:cond delay="0"/>
+                                  </p:stCondLst>
+                                  <p:childTnLst>
+                                    <p:set>
+                                      <p:cBhvr>
+                                        <p:cTn id="16" dur="1" fill="hold">
+                                          <p:stCondLst>
+                                            <p:cond delay="0"/>
+                                          </p:stCondLst>
+                                        </p:cTn>
+                                        <p:tgtEl>
+                                          <p:spTgt spid="5"/>
+                                        </p:tgtEl>
+                                        <p:attrNameLst>
+                                          <p:attrName>style.visibility</p:attrName>
+                                        </p:attrNameLst>
+                                      </p:cBhvr>
+                                      <p:to>
+                                        <p:strVal val="visible"/>
+                                      </p:to>
+                                    </p:set>
+                                    <p:animEffect transition="in" filter="fade">
+                                      <p:cBhvr>
+                                        <p:cTn id="17" dur="450"/>
+                                        <p:tgtEl>
+                                          <p:spTgt spid="5"/>
+                                        </p:tgtEl>
+                                      </p:cBhvr>
+                                    </p:animEffect>
+                                  </p:childTnLst>
+                                </p:cTn>
+                              </p:par>
+                              <p:par>
+                                <p:cTn id="18" presetID="10" presetClass="entr" presetSubtype="0" fill="hold" grpId="0" nodeType="withEffect">
+                                  <p:stCondLst>
+                                    <p:cond delay="120"/>
+                                  </p:stCondLst>
+                                  <p:childTnLst>
+                                    <p:set>
+                                      <p:cBhvr>
+                                        <p:cTn id="19" dur="1" fill="hold">
+                                          <p:stCondLst>
+                                            <p:cond delay="0"/>
+                                          </p:stCondLst>
+                                        </p:cTn>
+                                        <p:tgtEl>
+                                          <p:spTgt spid="6"/>
+                                        </p:tgtEl>
+                                        <p:attrNameLst>
+                                          <p:attrName>style.visibility</p:attrName>
+                                        </p:attrNameLst>
+                                      </p:cBhvr>
+                                      <p:to>
+                                        <p:strVal val="visible"/>
+                                      </p:to>
+                                    </p:set>
+                                    <p:animEffect transition="in" filter="fade">
+                                      <p:cBhvr>
+                                        <p:cTn id="20" dur="450"/>
+                                        <p:tgtEl>
+                                          <p:spTgt spid="6"/>
+                                        </p:tgtEl>
+                                      </p:cBhvr>
+                                    </p:animEffect>
+                                  </p:childTnLst>
+                                </p:cTn>
+                              </p:par>
+                              <p:par>
+                                <p:cTn id="21" presetID="53" presetClass="entr" presetSubtype="16" fill="hold" grpId="0" nodeType="withEffect">
+                                  <p:stCondLst>
+                                    <p:cond delay="240"/>
+                                  </p:stCondLst>
+                                  <p:childTnLst>
+                                    <p:set>
+                                      <p:cBhvr>
+                                        <p:cTn id="22" dur="1" fill="hold">
+                                          <p:stCondLst>
+                                            <p:cond delay="0"/>
+                                          </p:stCondLst>
+                                        </p:cTn>
+                                        <p:tgtEl>
+                                          <p:spTgt spid="7"/>
+                                        </p:tgtEl>
+                                        <p:attrNameLst>
+                                          <p:attrName>style.visibility</p:attrName>
+                                        </p:attrNameLst>
+                                      </p:cBhvr>
+                                      <p:to>
+                                        <p:strVal val="visible"/>
+                                      </p:to>
+                                    </p:set>
+                                    <p:anim calcmode="lin" valueType="num">
+                                      <p:cBhvr additive="base">
+                                        <p:cTn id="23" dur="420" fill="hold"/>
+                                        <p:tgtEl>
+                                          <p:spTgt spid="7"/>
+                                        </p:tgtEl>
+                                        <p:attrNameLst>
+                                          <p:attrName>ppt_w</p:attrName>
+                                        </p:attrNameLst>
+                                      </p:cBhvr>
+                                      <p:tavLst>
+                                        <p:tav tm="0">
+                                          <p:val>
+                                            <p:strVal val="0"/>
+                                          </p:val>
+                                        </p:tav>
+                                        <p:tav tm="100000">
+                                          <p:val>
+                                            <p:strVal val="#ppt_w"/>
+                                          </p:val>
+                                        </p:tav>
+                                      </p:tavLst>
+                                    </p:anim>
+                                    <p:anim calcmode="lin" valueType="num">
+                                      <p:cBhvr additive="base">
+                                        <p:cTn id="24" dur="420" fill="hold"/>
+                                        <p:tgtEl>
+                                          <p:spTgt spid="7"/>
+                                        </p:tgtEl>
+                                        <p:attrNameLst>
+                                          <p:attrName>ppt_h</p:attrName>
+                                        </p:attrNameLst>
+                                      </p:cBhvr>
+                                      <p:tavLst>
+                                        <p:tav tm="0">
+                                          <p:val>
+                                            <p:strVal val="0"/>
+                                          </p:val>
+                                        </p:tav>
+                                        <p:tav tm="100000">
+                                          <p:val>
+                                            <p:strVal val="#ppt_h"/>
+                                          </p:val>
+                                        </p:tav>
+                                      </p:tavLst>
+                                    </p:anim>
+                                    <p:animEffect transition="in" filter="fade">
+                                      <p:cBhvr>
+                                        <p:cTn id="25" dur="420"/>
+                                        <p:tgtEl>
+                                          <p:spTgt spid="7"/>
+                                        </p:tgtEl>
+                                      </p:cBhvr>
+                                    </p:animEffect>
+                                  </p:childTnLst>
+                                </p:cTn>
+                              </p:par>
+                            </p:childTnLst>
+                          </p:cTn>
+                        </p:par>
+                      </p:childTnLst>
+                    </p:cTn>
+                  </p:par>
+                  <p:par>
+                    <p:cTn id="26" fill="hold">
+                      <p:stCondLst>
+                        <p:cond delay="indefinite"/>
+                      </p:stCondLst>
+                      <p:childTnLst>
+                        <p:par>
+                          <p:cTn id="27" fill="hold">
+                            <p:stCondLst>
+                              <p:cond delay="0"/>
+                            </p:stCondLst>
+                            <p:childTnLst>
+                              <p:par>
+                                <p:cTn id="28" presetID="2" presetClass="entr" presetSubtype="8" fill="hold" decel="100000" grpId="0" nodeType="clickEffect">
+                                  <p:stCondLst>
+                                    <p:cond delay="0"/>
+                                  </p:stCondLst>
+                                  <p:childTnLst>
+                                    <p:set>
+                                      <p:cBhvr>
+                                        <p:cTn id="29" dur="1" fill="hold">
+                                          <p:stCondLst>
+                                            <p:cond delay="0"/>
+                                          </p:stCondLst>
+                                        </p:cTn>
+                                        <p:tgtEl>
+                                          <p:spTgt spid="8"/>
+                                        </p:tgtEl>
+                                        <p:attrNameLst>
+                                          <p:attrName>style.visibility</p:attrName>
+                                        </p:attrNameLst>
+                                      </p:cBhvr>
+                                      <p:to>
+                                        <p:strVal val="visible"/>
+                                      </p:to>
+                                    </p:set>
+                                    <p:anim calcmode="lin" valueType="num">
+                                      <p:cBhvr additive="base">
+                                        <p:cTn id="30" dur="550" fill="hold"/>
+                                        <p:tgtEl>
+                                          <p:spTgt spid="8"/>
+                                        </p:tgtEl>
+                                        <p:attrNameLst>
+                                          <p:attrName>ppt_x</p:attrName>
+                                        </p:attrNameLst>
+                                      </p:cBhvr>
+                                      <p:tavLst>
+                                        <p:tav tm="0">
+                                          <p:val>
+                                            <p:strVal val="0-#ppt_w/2"/>
+                                          </p:val>
+                                        </p:tav>
+                                        <p:tav tm="100000">
+                                          <p:val>
+                                            <p:strVal val="#ppt_x"/>
+                                          </p:val>
+                                        </p:tav>
+                                      </p:tavLst>
+                                    </p:anim>
+                                    <p:anim calcmode="lin" valueType="num">
+                                      <p:cBhvr additive="base">
+                                        <p:cTn id="31" dur="550" fill="hold"/>
+                                        <p:tgtEl>
+                                          <p:spTgt spid="8"/>
+                                        </p:tgtEl>
+                                        <p:attrNameLst>
+                                          <p:attrName>ppt_y</p:attrName>
+                                        </p:attrNameLst>
+                                      </p:cBhvr>
+                                      <p:tavLst>
+                                        <p:tav tm="0">
+                                          <p:val>
+                                            <p:strVal val="#ppt_y"/>
+                                          </p:val>
+                                        </p:tav>
+                                        <p:tav tm="100000">
+                                          <p:val>
+                                            <p:strVal val="#ppt_y"/>
+                                          </p:val>
+                                        </p:tav>
+                                      </p:tavLst>
+                                    </p:anim>
+                                  </p:childTnLst>
+                                </p:cTn>
+                              </p:par>
+                            </p:childTnLst>
+                          </p:cTn>
+                        </p:par>
+                      </p:childTnLst>
+                    </p:cTn>
+                  </p:par>
+                  <p:par>
+                    <p:cTn id="32" fill="hold">
+                      <p:stCondLst>
+                        <p:cond delay="indefinite"/>
+                      </p:stCondLst>
+                      <p:childTnLst>
+                        <p:par>
+                          <p:cTn id="33" fill="hold">
+                            <p:stCondLst>
+                              <p:cond delay="0"/>
+                            </p:stCondLst>
+                            <p:childTnLst>
+                              <p:par>
+                                <p:cTn id="34" presetID="53" presetClass="entr" presetSubtype="16" fill="hold" grpId="0" nodeType="clickEffect">
+                                  <p:stCondLst>
+                                    <p:cond delay="0"/>
+                                  </p:stCondLst>
+                                  <p:childTnLst>
+                                    <p:set>
+                                      <p:cBhvr>
+                                        <p:cTn id="35" dur="1" fill="hold">
+                                          <p:stCondLst>
+                                            <p:cond delay="0"/>
+                                          </p:stCondLst>
+                                        </p:cTn>
+                                        <p:tgtEl>
+                                          <p:spTgt spid="9"/>
+                                        </p:tgtEl>
+                                        <p:attrNameLst>
+                                          <p:attrName>style.visibility</p:attrName>
+                                        </p:attrNameLst>
+                                      </p:cBhvr>
+                                      <p:to>
+                                        <p:strVal val="visible"/>
+                                      </p:to>
+                                    </p:set>
+                                    <p:anim calcmode="lin" valueType="num">
+                                      <p:cBhvr additive="base">
+                                        <p:cTn id="36" dur="420" fill="hold"/>
+                                        <p:tgtEl>
+                                          <p:spTgt spid="9"/>
+                                        </p:tgtEl>
+                                        <p:attrNameLst>
+                                          <p:attrName>ppt_w</p:attrName>
+                                        </p:attrNameLst>
+                                      </p:cBhvr>
+                                      <p:tavLst>
+                                        <p:tav tm="0">
+                                          <p:val>
+                                            <p:strVal val="0"/>
+                                          </p:val>
+                                        </p:tav>
+                                        <p:tav tm="100000">
+                                          <p:val>
+                                            <p:strVal val="#ppt_w"/>
+                                          </p:val>
+                                        </p:tav>
+                                      </p:tavLst>
+                                    </p:anim>
+                                    <p:anim calcmode="lin" valueType="num">
+                                      <p:cBhvr additive="base">
+                                        <p:cTn id="37" dur="420" fill="hold"/>
+                                        <p:tgtEl>
+                                          <p:spTgt spid="9"/>
+                                        </p:tgtEl>
+                                        <p:attrNameLst>
+                                          <p:attrName>ppt_h</p:attrName>
+                                        </p:attrNameLst>
+                                      </p:cBhvr>
+                                      <p:tavLst>
+                                        <p:tav tm="0">
+                                          <p:val>
+                                            <p:strVal val="0"/>
+                                          </p:val>
+                                        </p:tav>
+                                        <p:tav tm="100000">
+                                          <p:val>
+                                            <p:strVal val="#ppt_h"/>
+                                          </p:val>
+                                        </p:tav>
+                                      </p:tavLst>
+                                    </p:anim>
+                                    <p:animEffect transition="in" filter="fade">
+                                      <p:cBhvr>
+                                        <p:cTn id="38" dur="420"/>
+                                        <p:tgtEl>
+                                          <p:spTgt spid="9"/>
                                         </p:tgtEl>
                                       </p:cBhvr>
                                     </p:animEffect>
